--- a/docs/docs/ConfortAnimal_Apresentacao.pptx
+++ b/docs/docs/ConfortAnimal_Apresentacao.pptx
@@ -27,8 +27,8 @@
 </file>
 
 <file path=ppt/slideLayouts/slideLayout1.xml><?xml version="1.0" encoding="utf-8"?>
-<p:sldLayout xmlns:a="http://schemas.openxmlformats.org/drawingml/2006/main" xmlns:p="http://schemas.openxmlformats.org/presentationml/2006/main" xmlns:r="http://schemas.openxmlformats.org/officeDocument/2006/relationships" xmlns:p14="http://schemas.microsoft.com/office/powerpoint/2010/main" xmlns:p15="http://schemas.microsoft.com/office/powerpoint/2012/main" xmlns:mc="http://schemas.openxmlformats.org/markup-compatibility/2006" type="title" preserve="1">
-  <p:cSld name="Title Slide">
+<p:sldLayout xmlns:a="http://schemas.openxmlformats.org/drawingml/2006/main" xmlns:p="http://schemas.openxmlformats.org/presentationml/2006/main" xmlns:r="http://schemas.openxmlformats.org/officeDocument/2006/relationships" xmlns:p14="http://schemas.microsoft.com/office/powerpoint/2010/main" xmlns:p15="http://schemas.microsoft.com/office/powerpoint/2012/main" xmlns:mc="http://schemas.openxmlformats.org/markup-compatibility/2006" type="vertTitleAndTx" preserve="1">
+  <p:cSld name="Vertical Title and Text">
     <p:bg>
       <p:bgPr>
         <a:solidFill>
@@ -62,8 +62,8 @@
         </p:nvSpPr>
         <p:spPr>
           <a:xfrm>
-            <a:off x="685800" y="2130480"/>
-            <a:ext cx="7772040" cy="1469520"/>
+            <a:off x="6629400" y="274680"/>
+            <a:ext cx="2055960" cy="5850000"/>
           </a:xfrm>
           <a:prstGeom prst="rect">
             <a:avLst/>
@@ -74,7 +74,7 @@
           </a:ln>
         </p:spPr>
         <p:txBody>
-          <a:bodyPr lIns="91440" rIns="91440" tIns="45720" bIns="45720" anchor="ctr">
+          <a:bodyPr lIns="91440" rIns="91440" tIns="45720" bIns="45720" anchor="ctr" vert="eaVert">
             <a:noAutofit/>
           </a:bodyPr>
           <a:p>
@@ -83,6 +83,9 @@
                 <a:spcPct val="100000"/>
               </a:lnSpc>
               <a:buNone/>
+              <a:tabLst>
+                <a:tab algn="l" pos="0"/>
+              </a:tabLst>
             </a:pPr>
             <a:r>
               <a:rPr lang="en-US" sz="4400" b="0" u="none" strike="noStrike">
@@ -95,13 +98,13 @@
               </a:rPr>
               <a:t>Click to edit Master title style</a:t>
             </a:r>
-            <a:endParaRPr lang="en-US" sz="4400" b="0" u="none" strike="noStrike">
-              <a:solidFill>
-                <a:schemeClr val="dk1"/>
-              </a:solidFill>
-              <a:effectLst/>
-              <a:uFillTx/>
-              <a:latin typeface="Calibri"/>
+            <a:endParaRPr lang="pt-PT" sz="4400" b="0" u="none" strike="noStrike">
+              <a:solidFill>
+                <a:srgbClr val="000000"/>
+              </a:solidFill>
+              <a:effectLst/>
+              <a:uFillTx/>
+              <a:latin typeface="Arial"/>
             </a:endParaRPr>
           </a:p>
         </p:txBody>
@@ -109,6 +112,205 @@
       <p:sp>
         <p:nvSpPr>
           <p:cNvPr id="3" name="PlaceHolder 2"/>
+          <p:cNvSpPr>
+            <a:spLocks noGrp="1"/>
+          </p:cNvSpPr>
+          <p:nvPr>
+            <p:ph type="body"/>
+          </p:nvPr>
+        </p:nvSpPr>
+        <p:spPr>
+          <a:xfrm>
+            <a:off x="457200" y="274680"/>
+            <a:ext cx="6018480" cy="5850000"/>
+          </a:xfrm>
+          <a:prstGeom prst="rect">
+            <a:avLst/>
+          </a:prstGeom>
+          <a:noFill/>
+          <a:ln w="0">
+            <a:noFill/>
+          </a:ln>
+        </p:spPr>
+        <p:txBody>
+          <a:bodyPr lIns="91440" rIns="91440" tIns="45720" bIns="45720" anchor="t" vert="eaVert">
+            <a:noAutofit/>
+          </a:bodyPr>
+          <a:p>
+            <a:pPr marL="343080" indent="-343080" defTabSz="457200">
+              <a:lnSpc>
+                <a:spcPct val="100000"/>
+              </a:lnSpc>
+              <a:spcBef>
+                <a:spcPts val="641"/>
+              </a:spcBef>
+              <a:buClr>
+                <a:srgbClr val="000000"/>
+              </a:buClr>
+              <a:buFont typeface="Arial"/>
+              <a:buChar char="•"/>
+            </a:pPr>
+            <a:r>
+              <a:rPr lang="en-US" sz="3200" b="0" u="none" strike="noStrike">
+                <a:solidFill>
+                  <a:schemeClr val="dk1"/>
+                </a:solidFill>
+                <a:effectLst/>
+                <a:uFillTx/>
+                <a:latin typeface="Calibri"/>
+              </a:rPr>
+              <a:t>Click to edit Master text styles</a:t>
+            </a:r>
+            <a:endParaRPr lang="pt-PT" sz="3200" b="0" u="none" strike="noStrike">
+              <a:solidFill>
+                <a:srgbClr val="000000"/>
+              </a:solidFill>
+              <a:effectLst/>
+              <a:uFillTx/>
+              <a:latin typeface="Arial"/>
+            </a:endParaRPr>
+          </a:p>
+          <a:p>
+            <a:pPr marL="743040" lvl="1" indent="-285840" defTabSz="457200">
+              <a:lnSpc>
+                <a:spcPct val="100000"/>
+              </a:lnSpc>
+              <a:spcBef>
+                <a:spcPts val="561"/>
+              </a:spcBef>
+              <a:buClr>
+                <a:srgbClr val="000000"/>
+              </a:buClr>
+              <a:buFont typeface="Arial"/>
+              <a:buChar char="–"/>
+            </a:pPr>
+            <a:r>
+              <a:rPr lang="en-US" sz="2800" b="0" u="none" strike="noStrike">
+                <a:solidFill>
+                  <a:schemeClr val="dk1"/>
+                </a:solidFill>
+                <a:effectLst/>
+                <a:uFillTx/>
+                <a:latin typeface="Calibri"/>
+              </a:rPr>
+              <a:t>Second level</a:t>
+            </a:r>
+            <a:endParaRPr lang="pt-PT" sz="2800" b="0" u="none" strike="noStrike">
+              <a:solidFill>
+                <a:srgbClr val="000000"/>
+              </a:solidFill>
+              <a:effectLst/>
+              <a:uFillTx/>
+              <a:latin typeface="Arial"/>
+            </a:endParaRPr>
+          </a:p>
+          <a:p>
+            <a:pPr marL="1143000" lvl="2" indent="-228600" defTabSz="457200">
+              <a:lnSpc>
+                <a:spcPct val="100000"/>
+              </a:lnSpc>
+              <a:spcBef>
+                <a:spcPts val="479"/>
+              </a:spcBef>
+              <a:buClr>
+                <a:srgbClr val="000000"/>
+              </a:buClr>
+              <a:buFont typeface="Arial"/>
+              <a:buChar char="•"/>
+            </a:pPr>
+            <a:r>
+              <a:rPr lang="en-US" sz="2400" b="0" u="none" strike="noStrike">
+                <a:solidFill>
+                  <a:schemeClr val="dk1"/>
+                </a:solidFill>
+                <a:effectLst/>
+                <a:uFillTx/>
+                <a:latin typeface="Calibri"/>
+              </a:rPr>
+              <a:t>Third level</a:t>
+            </a:r>
+            <a:endParaRPr lang="pt-PT" sz="2400" b="0" u="none" strike="noStrike">
+              <a:solidFill>
+                <a:srgbClr val="000000"/>
+              </a:solidFill>
+              <a:effectLst/>
+              <a:uFillTx/>
+              <a:latin typeface="Arial"/>
+            </a:endParaRPr>
+          </a:p>
+          <a:p>
+            <a:pPr marL="1600200" lvl="3" indent="-228600" defTabSz="457200">
+              <a:lnSpc>
+                <a:spcPct val="100000"/>
+              </a:lnSpc>
+              <a:spcBef>
+                <a:spcPts val="400"/>
+              </a:spcBef>
+              <a:buClr>
+                <a:srgbClr val="000000"/>
+              </a:buClr>
+              <a:buFont typeface="Arial"/>
+              <a:buChar char="–"/>
+            </a:pPr>
+            <a:r>
+              <a:rPr lang="en-US" sz="2000" b="0" u="none" strike="noStrike">
+                <a:solidFill>
+                  <a:schemeClr val="dk1"/>
+                </a:solidFill>
+                <a:effectLst/>
+                <a:uFillTx/>
+                <a:latin typeface="Calibri"/>
+              </a:rPr>
+              <a:t>Fourth level</a:t>
+            </a:r>
+            <a:endParaRPr lang="pt-PT" sz="2000" b="0" u="none" strike="noStrike">
+              <a:solidFill>
+                <a:srgbClr val="000000"/>
+              </a:solidFill>
+              <a:effectLst/>
+              <a:uFillTx/>
+              <a:latin typeface="Arial"/>
+            </a:endParaRPr>
+          </a:p>
+          <a:p>
+            <a:pPr marL="2057400" lvl="4" indent="-228600" defTabSz="457200">
+              <a:lnSpc>
+                <a:spcPct val="100000"/>
+              </a:lnSpc>
+              <a:spcBef>
+                <a:spcPts val="400"/>
+              </a:spcBef>
+              <a:buClr>
+                <a:srgbClr val="000000"/>
+              </a:buClr>
+              <a:buFont typeface="Arial"/>
+              <a:buChar char="»"/>
+            </a:pPr>
+            <a:r>
+              <a:rPr lang="en-US" sz="2000" b="0" u="none" strike="noStrike">
+                <a:solidFill>
+                  <a:schemeClr val="dk1"/>
+                </a:solidFill>
+                <a:effectLst/>
+                <a:uFillTx/>
+                <a:latin typeface="Calibri"/>
+              </a:rPr>
+              <a:t>Fifth level</a:t>
+            </a:r>
+            <a:endParaRPr lang="pt-PT" sz="2000" b="0" u="none" strike="noStrike">
+              <a:solidFill>
+                <a:srgbClr val="000000"/>
+              </a:solidFill>
+              <a:effectLst/>
+              <a:uFillTx/>
+              <a:latin typeface="Arial"/>
+            </a:endParaRPr>
+          </a:p>
+        </p:txBody>
+      </p:sp>
+      <p:sp>
+        <p:nvSpPr>
+          <p:cNvPr id="4" name="PlaceHolder 3"/>
           <p:cNvSpPr>
             <a:spLocks noGrp="1"/>
           </p:cNvSpPr>
@@ -119,7 +321,7 @@
         <p:spPr>
           <a:xfrm>
             <a:off x="457200" y="6356520"/>
-            <a:ext cx="2133360" cy="364680"/>
+            <a:ext cx="2132280" cy="363600"/>
           </a:xfrm>
           <a:prstGeom prst="rect">
             <a:avLst/>
@@ -139,6 +341,9 @@
                 <a:spcPct val="100000"/>
               </a:lnSpc>
               <a:buNone/>
+              <a:tabLst>
+                <a:tab algn="l" pos="0"/>
+              </a:tabLst>
               <a:defRPr lang="en-US" sz="1200" b="0" u="none" strike="noStrike">
                 <a:solidFill>
                   <a:schemeClr val="dk1">
@@ -157,6 +362,9 @@
                 <a:spcPct val="100000"/>
               </a:lnSpc>
               <a:buNone/>
+              <a:tabLst>
+                <a:tab algn="l" pos="0"/>
+              </a:tabLst>
             </a:pPr>
             <a:r>
               <a:rPr lang="en-US" sz="1200" b="0" u="none" strike="noStrike">
@@ -184,7 +392,7 @@
       </p:sp>
       <p:sp>
         <p:nvSpPr>
-          <p:cNvPr id="4" name="PlaceHolder 3"/>
+          <p:cNvPr id="5" name="PlaceHolder 4"/>
           <p:cNvSpPr>
             <a:spLocks noGrp="1"/>
           </p:cNvSpPr>
@@ -195,7 +403,7 @@
         <p:spPr>
           <a:xfrm>
             <a:off x="3124080" y="6356520"/>
-            <a:ext cx="2895120" cy="364680"/>
+            <a:ext cx="2894040" cy="363600"/>
           </a:xfrm>
           <a:prstGeom prst="rect">
             <a:avLst/>
@@ -211,7 +419,13 @@
           </a:bodyPr>
           <a:lstStyle>
             <a:lvl1pPr indent="0" algn="ctr">
+              <a:lnSpc>
+                <a:spcPct val="100000"/>
+              </a:lnSpc>
               <a:buNone/>
+              <a:tabLst>
+                <a:tab algn="l" pos="0"/>
+              </a:tabLst>
               <a:defRPr lang="pt-PT" sz="1400" b="0" u="none" strike="noStrike">
                 <a:solidFill>
                   <a:srgbClr val="000000"/>
@@ -224,7 +438,13 @@
           </a:lstStyle>
           <a:p>
             <a:pPr indent="0" algn="ctr">
+              <a:lnSpc>
+                <a:spcPct val="100000"/>
+              </a:lnSpc>
               <a:buNone/>
+              <a:tabLst>
+                <a:tab algn="l" pos="0"/>
+              </a:tabLst>
             </a:pPr>
             <a:r>
               <a:rPr lang="pt-PT" sz="1400" b="0" u="none" strike="noStrike">
@@ -250,7 +470,7 @@
       </p:sp>
       <p:sp>
         <p:nvSpPr>
-          <p:cNvPr id="5" name="PlaceHolder 4"/>
+          <p:cNvPr id="6" name="PlaceHolder 5"/>
           <p:cNvSpPr>
             <a:spLocks noGrp="1"/>
           </p:cNvSpPr>
@@ -261,7 +481,7 @@
         <p:spPr>
           <a:xfrm>
             <a:off x="6553080" y="6356520"/>
-            <a:ext cx="2133360" cy="364680"/>
+            <a:ext cx="2132280" cy="363600"/>
           </a:xfrm>
           <a:prstGeom prst="rect">
             <a:avLst/>
@@ -281,6 +501,9 @@
                 <a:spcPct val="100000"/>
               </a:lnSpc>
               <a:buNone/>
+              <a:tabLst>
+                <a:tab algn="l" pos="0"/>
+              </a:tabLst>
               <a:defRPr lang="en-US" sz="1200" b="0" u="none" strike="noStrike">
                 <a:solidFill>
                   <a:schemeClr val="dk1">
@@ -299,8 +522,11 @@
                 <a:spcPct val="100000"/>
               </a:lnSpc>
               <a:buNone/>
-            </a:pPr>
-            <a:fld id="{A07714FA-D0AC-436F-8C2F-1D5A7EED855C}" type="slidenum">
+              <a:tabLst>
+                <a:tab algn="l" pos="0"/>
+              </a:tabLst>
+            </a:pPr>
+            <a:fld id="{E78CE5EF-8DD1-4345-B347-A8132310B714}" type="slidenum">
               <a:rPr lang="en-US" sz="1200" b="0" u="none" strike="noStrike">
                 <a:solidFill>
                   <a:schemeClr val="dk1">
@@ -330,8 +556,8 @@
 </file>
 
 <file path=ppt/slideLayouts/slideLayout10.xml><?xml version="1.0" encoding="utf-8"?>
-<p:sldLayout xmlns:a="http://schemas.openxmlformats.org/drawingml/2006/main" xmlns:p="http://schemas.openxmlformats.org/presentationml/2006/main" xmlns:r="http://schemas.openxmlformats.org/officeDocument/2006/relationships" xmlns:p14="http://schemas.microsoft.com/office/powerpoint/2010/main" xmlns:p15="http://schemas.microsoft.com/office/powerpoint/2012/main" xmlns:mc="http://schemas.openxmlformats.org/markup-compatibility/2006" type="blank" preserve="1">
-  <p:cSld name="Content with Caption">
+<p:sldLayout xmlns:a="http://schemas.openxmlformats.org/drawingml/2006/main" xmlns:p="http://schemas.openxmlformats.org/presentationml/2006/main" xmlns:r="http://schemas.openxmlformats.org/officeDocument/2006/relationships" xmlns:p14="http://schemas.microsoft.com/office/powerpoint/2010/main" xmlns:p15="http://schemas.microsoft.com/office/powerpoint/2012/main" xmlns:mc="http://schemas.openxmlformats.org/markup-compatibility/2006" type="title" preserve="1">
+  <p:cSld name="Title Slide">
     <p:bg>
       <p:bgPr>
         <a:solidFill>
@@ -355,7 +581,7 @@
       </p:grpSpPr>
       <p:sp>
         <p:nvSpPr>
-          <p:cNvPr id="49" name="PlaceHolder 1"/>
+          <p:cNvPr id="52" name="PlaceHolder 1"/>
           <p:cNvSpPr>
             <a:spLocks noGrp="1"/>
           </p:cNvSpPr>
@@ -365,8 +591,8 @@
         </p:nvSpPr>
         <p:spPr>
           <a:xfrm>
-            <a:off x="457200" y="272880"/>
-            <a:ext cx="3007800" cy="1161720"/>
+            <a:off x="685800" y="2130480"/>
+            <a:ext cx="7770960" cy="1468440"/>
           </a:xfrm>
           <a:prstGeom prst="rect">
             <a:avLst/>
@@ -377,18 +603,21 @@
           </a:ln>
         </p:spPr>
         <p:txBody>
-          <a:bodyPr lIns="91440" rIns="91440" tIns="45720" bIns="45720" anchor="b">
+          <a:bodyPr lIns="91440" rIns="91440" tIns="45720" bIns="45720" anchor="ctr">
             <a:noAutofit/>
           </a:bodyPr>
           <a:p>
-            <a:pPr indent="0" defTabSz="457200">
+            <a:pPr indent="0" algn="ctr" defTabSz="457200">
               <a:lnSpc>
                 <a:spcPct val="100000"/>
               </a:lnSpc>
               <a:buNone/>
-            </a:pPr>
-            <a:r>
-              <a:rPr lang="en-US" sz="2000" b="1" u="none" strike="noStrike">
+              <a:tabLst>
+                <a:tab algn="l" pos="0"/>
+              </a:tabLst>
+            </a:pPr>
+            <a:r>
+              <a:rPr lang="en-US" sz="4400" b="0" u="none" strike="noStrike">
                 <a:solidFill>
                   <a:schemeClr val="dk1"/>
                 </a:solidFill>
@@ -398,281 +627,20 @@
               </a:rPr>
               <a:t>Click to edit Master title style</a:t>
             </a:r>
-            <a:endParaRPr lang="en-US" sz="2000" b="0" u="none" strike="noStrike">
-              <a:solidFill>
-                <a:schemeClr val="dk1"/>
-              </a:solidFill>
-              <a:effectLst/>
-              <a:uFillTx/>
-              <a:latin typeface="Calibri"/>
+            <a:endParaRPr lang="pt-PT" sz="4400" b="0" u="none" strike="noStrike">
+              <a:solidFill>
+                <a:srgbClr val="000000"/>
+              </a:solidFill>
+              <a:effectLst/>
+              <a:uFillTx/>
+              <a:latin typeface="Arial"/>
             </a:endParaRPr>
           </a:p>
         </p:txBody>
       </p:sp>
       <p:sp>
         <p:nvSpPr>
-          <p:cNvPr id="50" name="PlaceHolder 2"/>
-          <p:cNvSpPr>
-            <a:spLocks noGrp="1"/>
-          </p:cNvSpPr>
-          <p:nvPr>
-            <p:ph type="body"/>
-          </p:nvPr>
-        </p:nvSpPr>
-        <p:spPr>
-          <a:xfrm>
-            <a:off x="3575160" y="272880"/>
-            <a:ext cx="5111280" cy="5852880"/>
-          </a:xfrm>
-          <a:prstGeom prst="rect">
-            <a:avLst/>
-          </a:prstGeom>
-          <a:noFill/>
-          <a:ln w="0">
-            <a:noFill/>
-          </a:ln>
-        </p:spPr>
-        <p:txBody>
-          <a:bodyPr lIns="91440" rIns="91440" tIns="45720" bIns="45720" anchor="t">
-            <a:noAutofit/>
-          </a:bodyPr>
-          <a:p>
-            <a:pPr marL="343080" indent="-343080" defTabSz="457200">
-              <a:lnSpc>
-                <a:spcPct val="100000"/>
-              </a:lnSpc>
-              <a:spcBef>
-                <a:spcPts val="641"/>
-              </a:spcBef>
-              <a:buClr>
-                <a:srgbClr val="000000"/>
-              </a:buClr>
-              <a:buFont typeface="Arial"/>
-              <a:buChar char="•"/>
-            </a:pPr>
-            <a:r>
-              <a:rPr lang="en-US" sz="3200" b="0" u="none" strike="noStrike">
-                <a:solidFill>
-                  <a:schemeClr val="dk1"/>
-                </a:solidFill>
-                <a:effectLst/>
-                <a:uFillTx/>
-                <a:latin typeface="Calibri"/>
-              </a:rPr>
-              <a:t>Click to edit Master text styles</a:t>
-            </a:r>
-            <a:endParaRPr lang="en-US" sz="3200" b="0" u="none" strike="noStrike">
-              <a:solidFill>
-                <a:schemeClr val="dk1"/>
-              </a:solidFill>
-              <a:effectLst/>
-              <a:uFillTx/>
-              <a:latin typeface="Calibri"/>
-            </a:endParaRPr>
-          </a:p>
-          <a:p>
-            <a:pPr marL="743040" lvl="1" indent="-285840" defTabSz="457200">
-              <a:lnSpc>
-                <a:spcPct val="100000"/>
-              </a:lnSpc>
-              <a:spcBef>
-                <a:spcPts val="561"/>
-              </a:spcBef>
-              <a:buClr>
-                <a:srgbClr val="000000"/>
-              </a:buClr>
-              <a:buFont typeface="Arial"/>
-              <a:buChar char="–"/>
-            </a:pPr>
-            <a:r>
-              <a:rPr lang="en-US" sz="2800" b="0" u="none" strike="noStrike">
-                <a:solidFill>
-                  <a:schemeClr val="dk1"/>
-                </a:solidFill>
-                <a:effectLst/>
-                <a:uFillTx/>
-                <a:latin typeface="Calibri"/>
-              </a:rPr>
-              <a:t>Second level</a:t>
-            </a:r>
-            <a:endParaRPr lang="en-US" sz="2800" b="0" u="none" strike="noStrike">
-              <a:solidFill>
-                <a:schemeClr val="dk1"/>
-              </a:solidFill>
-              <a:effectLst/>
-              <a:uFillTx/>
-              <a:latin typeface="Calibri"/>
-            </a:endParaRPr>
-          </a:p>
-          <a:p>
-            <a:pPr marL="1143000" lvl="2" indent="-228600" defTabSz="457200">
-              <a:lnSpc>
-                <a:spcPct val="100000"/>
-              </a:lnSpc>
-              <a:spcBef>
-                <a:spcPts val="479"/>
-              </a:spcBef>
-              <a:buClr>
-                <a:srgbClr val="000000"/>
-              </a:buClr>
-              <a:buFont typeface="Arial"/>
-              <a:buChar char="•"/>
-            </a:pPr>
-            <a:r>
-              <a:rPr lang="en-US" sz="2400" b="0" u="none" strike="noStrike">
-                <a:solidFill>
-                  <a:schemeClr val="dk1"/>
-                </a:solidFill>
-                <a:effectLst/>
-                <a:uFillTx/>
-                <a:latin typeface="Calibri"/>
-              </a:rPr>
-              <a:t>Third level</a:t>
-            </a:r>
-            <a:endParaRPr lang="en-US" sz="2400" b="0" u="none" strike="noStrike">
-              <a:solidFill>
-                <a:schemeClr val="dk1"/>
-              </a:solidFill>
-              <a:effectLst/>
-              <a:uFillTx/>
-              <a:latin typeface="Calibri"/>
-            </a:endParaRPr>
-          </a:p>
-          <a:p>
-            <a:pPr marL="1600200" lvl="3" indent="-228600" defTabSz="457200">
-              <a:lnSpc>
-                <a:spcPct val="100000"/>
-              </a:lnSpc>
-              <a:spcBef>
-                <a:spcPts val="400"/>
-              </a:spcBef>
-              <a:buClr>
-                <a:srgbClr val="000000"/>
-              </a:buClr>
-              <a:buFont typeface="Arial"/>
-              <a:buChar char="–"/>
-            </a:pPr>
-            <a:r>
-              <a:rPr lang="en-US" sz="2000" b="0" u="none" strike="noStrike">
-                <a:solidFill>
-                  <a:schemeClr val="dk1"/>
-                </a:solidFill>
-                <a:effectLst/>
-                <a:uFillTx/>
-                <a:latin typeface="Calibri"/>
-              </a:rPr>
-              <a:t>Fourth level</a:t>
-            </a:r>
-            <a:endParaRPr lang="en-US" sz="2000" b="0" u="none" strike="noStrike">
-              <a:solidFill>
-                <a:schemeClr val="dk1"/>
-              </a:solidFill>
-              <a:effectLst/>
-              <a:uFillTx/>
-              <a:latin typeface="Calibri"/>
-            </a:endParaRPr>
-          </a:p>
-          <a:p>
-            <a:pPr marL="2057400" lvl="4" indent="-228600" defTabSz="457200">
-              <a:lnSpc>
-                <a:spcPct val="100000"/>
-              </a:lnSpc>
-              <a:spcBef>
-                <a:spcPts val="400"/>
-              </a:spcBef>
-              <a:buClr>
-                <a:srgbClr val="000000"/>
-              </a:buClr>
-              <a:buFont typeface="Arial"/>
-              <a:buChar char="»"/>
-            </a:pPr>
-            <a:r>
-              <a:rPr lang="en-US" sz="2000" b="0" u="none" strike="noStrike">
-                <a:solidFill>
-                  <a:schemeClr val="dk1"/>
-                </a:solidFill>
-                <a:effectLst/>
-                <a:uFillTx/>
-                <a:latin typeface="Calibri"/>
-              </a:rPr>
-              <a:t>Fifth level</a:t>
-            </a:r>
-            <a:endParaRPr lang="en-US" sz="2000" b="0" u="none" strike="noStrike">
-              <a:solidFill>
-                <a:schemeClr val="dk1"/>
-              </a:solidFill>
-              <a:effectLst/>
-              <a:uFillTx/>
-              <a:latin typeface="Calibri"/>
-            </a:endParaRPr>
-          </a:p>
-        </p:txBody>
-      </p:sp>
-      <p:sp>
-        <p:nvSpPr>
-          <p:cNvPr id="51" name="PlaceHolder 3"/>
-          <p:cNvSpPr>
-            <a:spLocks noGrp="1"/>
-          </p:cNvSpPr>
-          <p:nvPr>
-            <p:ph type="body"/>
-          </p:nvPr>
-        </p:nvSpPr>
-        <p:spPr>
-          <a:xfrm>
-            <a:off x="457200" y="1434960"/>
-            <a:ext cx="3007800" cy="4690800"/>
-          </a:xfrm>
-          <a:prstGeom prst="rect">
-            <a:avLst/>
-          </a:prstGeom>
-          <a:noFill/>
-          <a:ln w="0">
-            <a:noFill/>
-          </a:ln>
-        </p:spPr>
-        <p:txBody>
-          <a:bodyPr lIns="91440" rIns="91440" tIns="45720" bIns="45720" anchor="t">
-            <a:noAutofit/>
-          </a:bodyPr>
-          <a:p>
-            <a:pPr indent="0" defTabSz="457200">
-              <a:lnSpc>
-                <a:spcPct val="100000"/>
-              </a:lnSpc>
-              <a:spcBef>
-                <a:spcPts val="281"/>
-              </a:spcBef>
-              <a:buNone/>
-              <a:tabLst>
-                <a:tab algn="l" pos="0"/>
-              </a:tabLst>
-            </a:pPr>
-            <a:r>
-              <a:rPr lang="en-US" sz="1400" b="0" u="none" strike="noStrike">
-                <a:solidFill>
-                  <a:schemeClr val="dk1"/>
-                </a:solidFill>
-                <a:effectLst/>
-                <a:uFillTx/>
-                <a:latin typeface="Calibri"/>
-              </a:rPr>
-              <a:t>Click to edit Master text styles</a:t>
-            </a:r>
-            <a:endParaRPr lang="en-US" sz="1400" b="0" u="none" strike="noStrike">
-              <a:solidFill>
-                <a:schemeClr val="dk1"/>
-              </a:solidFill>
-              <a:effectLst/>
-              <a:uFillTx/>
-              <a:latin typeface="Calibri"/>
-            </a:endParaRPr>
-          </a:p>
-        </p:txBody>
-      </p:sp>
-      <p:sp>
-        <p:nvSpPr>
-          <p:cNvPr id="52" name="PlaceHolder 4"/>
+          <p:cNvPr id="53" name="PlaceHolder 2"/>
           <p:cNvSpPr>
             <a:spLocks noGrp="1"/>
           </p:cNvSpPr>
@@ -683,7 +651,7 @@
         <p:spPr>
           <a:xfrm>
             <a:off x="457200" y="6356520"/>
-            <a:ext cx="2133360" cy="364680"/>
+            <a:ext cx="2132280" cy="363600"/>
           </a:xfrm>
           <a:prstGeom prst="rect">
             <a:avLst/>
@@ -703,6 +671,9 @@
                 <a:spcPct val="100000"/>
               </a:lnSpc>
               <a:buNone/>
+              <a:tabLst>
+                <a:tab algn="l" pos="0"/>
+              </a:tabLst>
               <a:defRPr lang="en-US" sz="1200" b="0" u="none" strike="noStrike">
                 <a:solidFill>
                   <a:schemeClr val="dk1">
@@ -721,6 +692,9 @@
                 <a:spcPct val="100000"/>
               </a:lnSpc>
               <a:buNone/>
+              <a:tabLst>
+                <a:tab algn="l" pos="0"/>
+              </a:tabLst>
             </a:pPr>
             <a:r>
               <a:rPr lang="en-US" sz="1200" b="0" u="none" strike="noStrike">
@@ -748,7 +722,7 @@
       </p:sp>
       <p:sp>
         <p:nvSpPr>
-          <p:cNvPr id="53" name="PlaceHolder 5"/>
+          <p:cNvPr id="54" name="PlaceHolder 3"/>
           <p:cNvSpPr>
             <a:spLocks noGrp="1"/>
           </p:cNvSpPr>
@@ -759,7 +733,7 @@
         <p:spPr>
           <a:xfrm>
             <a:off x="3124080" y="6356520"/>
-            <a:ext cx="2895120" cy="364680"/>
+            <a:ext cx="2894040" cy="363600"/>
           </a:xfrm>
           <a:prstGeom prst="rect">
             <a:avLst/>
@@ -775,7 +749,13 @@
           </a:bodyPr>
           <a:lstStyle>
             <a:lvl1pPr indent="0" algn="ctr">
+              <a:lnSpc>
+                <a:spcPct val="100000"/>
+              </a:lnSpc>
               <a:buNone/>
+              <a:tabLst>
+                <a:tab algn="l" pos="0"/>
+              </a:tabLst>
               <a:defRPr lang="pt-PT" sz="1400" b="0" u="none" strike="noStrike">
                 <a:solidFill>
                   <a:srgbClr val="000000"/>
@@ -788,7 +768,13 @@
           </a:lstStyle>
           <a:p>
             <a:pPr indent="0" algn="ctr">
+              <a:lnSpc>
+                <a:spcPct val="100000"/>
+              </a:lnSpc>
               <a:buNone/>
+              <a:tabLst>
+                <a:tab algn="l" pos="0"/>
+              </a:tabLst>
             </a:pPr>
             <a:r>
               <a:rPr lang="pt-PT" sz="1400" b="0" u="none" strike="noStrike">
@@ -814,7 +800,7 @@
       </p:sp>
       <p:sp>
         <p:nvSpPr>
-          <p:cNvPr id="54" name="PlaceHolder 6"/>
+          <p:cNvPr id="55" name="PlaceHolder 4"/>
           <p:cNvSpPr>
             <a:spLocks noGrp="1"/>
           </p:cNvSpPr>
@@ -825,7 +811,7 @@
         <p:spPr>
           <a:xfrm>
             <a:off x="6553080" y="6356520"/>
-            <a:ext cx="2133360" cy="364680"/>
+            <a:ext cx="2132280" cy="363600"/>
           </a:xfrm>
           <a:prstGeom prst="rect">
             <a:avLst/>
@@ -845,6 +831,9 @@
                 <a:spcPct val="100000"/>
               </a:lnSpc>
               <a:buNone/>
+              <a:tabLst>
+                <a:tab algn="l" pos="0"/>
+              </a:tabLst>
               <a:defRPr lang="en-US" sz="1200" b="0" u="none" strike="noStrike">
                 <a:solidFill>
                   <a:schemeClr val="dk1">
@@ -863,8 +852,11 @@
                 <a:spcPct val="100000"/>
               </a:lnSpc>
               <a:buNone/>
-            </a:pPr>
-            <a:fld id="{A9D884AD-5CE4-4ED4-A2DB-9E9ED71F84E0}" type="slidenum">
+              <a:tabLst>
+                <a:tab algn="l" pos="0"/>
+              </a:tabLst>
+            </a:pPr>
+            <a:fld id="{8E3E0224-6B8B-40C6-ACD1-3C93FE3F9363}" type="slidenum">
               <a:rPr lang="en-US" sz="1200" b="0" u="none" strike="noStrike">
                 <a:solidFill>
                   <a:schemeClr val="dk1">
@@ -894,624 +886,6 @@
 </file>
 
 <file path=ppt/slideLayouts/slideLayout11.xml><?xml version="1.0" encoding="utf-8"?>
-<p:sldLayout xmlns:a="http://schemas.openxmlformats.org/drawingml/2006/main" xmlns:p="http://schemas.openxmlformats.org/presentationml/2006/main" xmlns:r="http://schemas.openxmlformats.org/officeDocument/2006/relationships" xmlns:p14="http://schemas.microsoft.com/office/powerpoint/2010/main" xmlns:p15="http://schemas.microsoft.com/office/powerpoint/2012/main" xmlns:mc="http://schemas.openxmlformats.org/markup-compatibility/2006" type="blank" preserve="1">
-  <p:cSld name="Picture with Caption">
-    <p:bg>
-      <p:bgPr>
-        <a:solidFill>
-          <a:srgbClr val="ffffff"/>
-        </a:solidFill>
-      </p:bgPr>
-    </p:bg>
-    <p:spTree>
-      <p:nvGrpSpPr>
-        <p:cNvPr id="1" name=""/>
-        <p:cNvGrpSpPr/>
-        <p:nvPr/>
-      </p:nvGrpSpPr>
-      <p:grpSpPr>
-        <a:xfrm>
-          <a:off x="0" y="0"/>
-          <a:ext cx="0" cy="0"/>
-          <a:chOff x="0" y="0"/>
-          <a:chExt cx="0" cy="0"/>
-        </a:xfrm>
-      </p:grpSpPr>
-      <p:sp>
-        <p:nvSpPr>
-          <p:cNvPr id="55" name="PlaceHolder 1"/>
-          <p:cNvSpPr>
-            <a:spLocks noGrp="1"/>
-          </p:cNvSpPr>
-          <p:nvPr>
-            <p:ph type="title"/>
-          </p:nvPr>
-        </p:nvSpPr>
-        <p:spPr>
-          <a:xfrm>
-            <a:off x="1792440" y="4800600"/>
-            <a:ext cx="5486040" cy="566280"/>
-          </a:xfrm>
-          <a:prstGeom prst="rect">
-            <a:avLst/>
-          </a:prstGeom>
-          <a:noFill/>
-          <a:ln w="0">
-            <a:noFill/>
-          </a:ln>
-        </p:spPr>
-        <p:txBody>
-          <a:bodyPr lIns="91440" rIns="91440" tIns="45720" bIns="45720" anchor="b">
-            <a:noAutofit/>
-          </a:bodyPr>
-          <a:p>
-            <a:pPr indent="0" defTabSz="457200">
-              <a:lnSpc>
-                <a:spcPct val="100000"/>
-              </a:lnSpc>
-              <a:buNone/>
-            </a:pPr>
-            <a:r>
-              <a:rPr lang="en-US" sz="2000" b="1" u="none" strike="noStrike">
-                <a:solidFill>
-                  <a:schemeClr val="dk1"/>
-                </a:solidFill>
-                <a:effectLst/>
-                <a:uFillTx/>
-                <a:latin typeface="Calibri"/>
-              </a:rPr>
-              <a:t>Click to edit Master title style</a:t>
-            </a:r>
-            <a:endParaRPr lang="en-US" sz="2000" b="0" u="none" strike="noStrike">
-              <a:solidFill>
-                <a:schemeClr val="dk1"/>
-              </a:solidFill>
-              <a:effectLst/>
-              <a:uFillTx/>
-              <a:latin typeface="Calibri"/>
-            </a:endParaRPr>
-          </a:p>
-        </p:txBody>
-      </p:sp>
-      <p:sp>
-        <p:nvSpPr>
-          <p:cNvPr id="56" name="PlaceHolder 2"/>
-          <p:cNvSpPr>
-            <a:spLocks noGrp="1"/>
-          </p:cNvSpPr>
-          <p:nvPr>
-            <p:ph type="body"/>
-          </p:nvPr>
-        </p:nvSpPr>
-        <p:spPr>
-          <a:xfrm>
-            <a:off x="1792440" y="612720"/>
-            <a:ext cx="5486040" cy="4114440"/>
-          </a:xfrm>
-          <a:prstGeom prst="rect">
-            <a:avLst/>
-          </a:prstGeom>
-          <a:noFill/>
-          <a:ln w="0">
-            <a:noFill/>
-          </a:ln>
-        </p:spPr>
-        <p:txBody>
-          <a:bodyPr lIns="90000" rIns="90000" tIns="45000" bIns="45000" anchor="t">
-            <a:noAutofit/>
-          </a:bodyPr>
-          <a:p>
-            <a:pPr marL="432000" indent="-324000">
-              <a:spcBef>
-                <a:spcPts val="1417"/>
-              </a:spcBef>
-              <a:buClr>
-                <a:srgbClr val="000000"/>
-              </a:buClr>
-              <a:buSzPct val="45000"/>
-              <a:buFont typeface="Wingdings" charset="2"/>
-              <a:buChar char=""/>
-            </a:pPr>
-            <a:r>
-              <a:rPr lang="en-US" sz="3200" b="0" u="none" strike="noStrike">
-                <a:solidFill>
-                  <a:schemeClr val="dk1"/>
-                </a:solidFill>
-                <a:effectLst/>
-                <a:uFillTx/>
-                <a:latin typeface="Calibri"/>
-              </a:rPr>
-              <a:t>Clique para editar o formato de texto dos tópicos</a:t>
-            </a:r>
-            <a:endParaRPr lang="en-US" sz="3200" b="0" u="none" strike="noStrike">
-              <a:solidFill>
-                <a:schemeClr val="dk1"/>
-              </a:solidFill>
-              <a:effectLst/>
-              <a:uFillTx/>
-              <a:latin typeface="Calibri"/>
-            </a:endParaRPr>
-          </a:p>
-          <a:p>
-            <a:pPr marL="864000" lvl="1" indent="-324000">
-              <a:spcBef>
-                <a:spcPts val="1134"/>
-              </a:spcBef>
-              <a:buClr>
-                <a:srgbClr val="000000"/>
-              </a:buClr>
-              <a:buSzPct val="75000"/>
-              <a:buFont typeface="Symbol" charset="2"/>
-              <a:buChar char=""/>
-            </a:pPr>
-            <a:r>
-              <a:rPr lang="en-US" sz="3200" b="0" u="none" strike="noStrike">
-                <a:solidFill>
-                  <a:schemeClr val="dk1"/>
-                </a:solidFill>
-                <a:effectLst/>
-                <a:uFillTx/>
-                <a:latin typeface="Calibri"/>
-              </a:rPr>
-              <a:t>Segundo nível de tópicos</a:t>
-            </a:r>
-            <a:endParaRPr lang="en-US" sz="3200" b="0" u="none" strike="noStrike">
-              <a:solidFill>
-                <a:schemeClr val="dk1"/>
-              </a:solidFill>
-              <a:effectLst/>
-              <a:uFillTx/>
-              <a:latin typeface="Calibri"/>
-            </a:endParaRPr>
-          </a:p>
-          <a:p>
-            <a:pPr marL="1296000" lvl="2" indent="-288000">
-              <a:spcBef>
-                <a:spcPts val="850"/>
-              </a:spcBef>
-              <a:buClr>
-                <a:srgbClr val="000000"/>
-              </a:buClr>
-              <a:buSzPct val="45000"/>
-              <a:buFont typeface="Wingdings" charset="2"/>
-              <a:buChar char=""/>
-            </a:pPr>
-            <a:r>
-              <a:rPr lang="en-US" sz="3200" b="0" u="none" strike="noStrike">
-                <a:solidFill>
-                  <a:schemeClr val="dk1"/>
-                </a:solidFill>
-                <a:effectLst/>
-                <a:uFillTx/>
-                <a:latin typeface="Calibri"/>
-              </a:rPr>
-              <a:t>Terceiro nível de tópicos</a:t>
-            </a:r>
-            <a:endParaRPr lang="en-US" sz="3200" b="0" u="none" strike="noStrike">
-              <a:solidFill>
-                <a:schemeClr val="dk1"/>
-              </a:solidFill>
-              <a:effectLst/>
-              <a:uFillTx/>
-              <a:latin typeface="Calibri"/>
-            </a:endParaRPr>
-          </a:p>
-          <a:p>
-            <a:pPr marL="1728000" lvl="3" indent="-216000">
-              <a:spcBef>
-                <a:spcPts val="567"/>
-              </a:spcBef>
-              <a:buClr>
-                <a:srgbClr val="000000"/>
-              </a:buClr>
-              <a:buSzPct val="75000"/>
-              <a:buFont typeface="Symbol" charset="2"/>
-              <a:buChar char=""/>
-            </a:pPr>
-            <a:r>
-              <a:rPr lang="en-US" sz="3200" b="0" u="none" strike="noStrike">
-                <a:solidFill>
-                  <a:schemeClr val="dk1"/>
-                </a:solidFill>
-                <a:effectLst/>
-                <a:uFillTx/>
-                <a:latin typeface="Calibri"/>
-              </a:rPr>
-              <a:t>Quarto nível de tópicos</a:t>
-            </a:r>
-            <a:endParaRPr lang="en-US" sz="3200" b="0" u="none" strike="noStrike">
-              <a:solidFill>
-                <a:schemeClr val="dk1"/>
-              </a:solidFill>
-              <a:effectLst/>
-              <a:uFillTx/>
-              <a:latin typeface="Calibri"/>
-            </a:endParaRPr>
-          </a:p>
-          <a:p>
-            <a:pPr marL="2160000" lvl="4" indent="-216000">
-              <a:spcBef>
-                <a:spcPts val="283"/>
-              </a:spcBef>
-              <a:buClr>
-                <a:srgbClr val="000000"/>
-              </a:buClr>
-              <a:buSzPct val="45000"/>
-              <a:buFont typeface="Wingdings" charset="2"/>
-              <a:buChar char=""/>
-            </a:pPr>
-            <a:r>
-              <a:rPr lang="en-US" sz="3200" b="0" u="none" strike="noStrike">
-                <a:solidFill>
-                  <a:schemeClr val="dk1"/>
-                </a:solidFill>
-                <a:effectLst/>
-                <a:uFillTx/>
-                <a:latin typeface="Calibri"/>
-              </a:rPr>
-              <a:t>Quinto nível de tópicos</a:t>
-            </a:r>
-            <a:endParaRPr lang="en-US" sz="3200" b="0" u="none" strike="noStrike">
-              <a:solidFill>
-                <a:schemeClr val="dk1"/>
-              </a:solidFill>
-              <a:effectLst/>
-              <a:uFillTx/>
-              <a:latin typeface="Calibri"/>
-            </a:endParaRPr>
-          </a:p>
-          <a:p>
-            <a:pPr marL="2592000" lvl="5" indent="-216000">
-              <a:spcBef>
-                <a:spcPts val="283"/>
-              </a:spcBef>
-              <a:buClr>
-                <a:srgbClr val="000000"/>
-              </a:buClr>
-              <a:buSzPct val="45000"/>
-              <a:buFont typeface="Wingdings" charset="2"/>
-              <a:buChar char=""/>
-            </a:pPr>
-            <a:r>
-              <a:rPr lang="en-US" sz="3200" b="0" u="none" strike="noStrike">
-                <a:solidFill>
-                  <a:schemeClr val="dk1"/>
-                </a:solidFill>
-                <a:effectLst/>
-                <a:uFillTx/>
-                <a:latin typeface="Calibri"/>
-              </a:rPr>
-              <a:t>Sexto nível de tópicos</a:t>
-            </a:r>
-            <a:endParaRPr lang="en-US" sz="3200" b="0" u="none" strike="noStrike">
-              <a:solidFill>
-                <a:schemeClr val="dk1"/>
-              </a:solidFill>
-              <a:effectLst/>
-              <a:uFillTx/>
-              <a:latin typeface="Calibri"/>
-            </a:endParaRPr>
-          </a:p>
-          <a:p>
-            <a:pPr marL="3024000" lvl="6" indent="-216000">
-              <a:spcBef>
-                <a:spcPts val="283"/>
-              </a:spcBef>
-              <a:buClr>
-                <a:srgbClr val="000000"/>
-              </a:buClr>
-              <a:buSzPct val="45000"/>
-              <a:buFont typeface="Wingdings" charset="2"/>
-              <a:buChar char=""/>
-            </a:pPr>
-            <a:r>
-              <a:rPr lang="en-US" sz="3200" b="0" u="none" strike="noStrike">
-                <a:solidFill>
-                  <a:schemeClr val="dk1"/>
-                </a:solidFill>
-                <a:effectLst/>
-                <a:uFillTx/>
-                <a:latin typeface="Calibri"/>
-              </a:rPr>
-              <a:t>Sétimo nível de tópicos</a:t>
-            </a:r>
-            <a:endParaRPr lang="en-US" sz="3200" b="0" u="none" strike="noStrike">
-              <a:solidFill>
-                <a:schemeClr val="dk1"/>
-              </a:solidFill>
-              <a:effectLst/>
-              <a:uFillTx/>
-              <a:latin typeface="Calibri"/>
-            </a:endParaRPr>
-          </a:p>
-        </p:txBody>
-      </p:sp>
-      <p:sp>
-        <p:nvSpPr>
-          <p:cNvPr id="57" name="PlaceHolder 3"/>
-          <p:cNvSpPr>
-            <a:spLocks noGrp="1"/>
-          </p:cNvSpPr>
-          <p:nvPr>
-            <p:ph type="body"/>
-          </p:nvPr>
-        </p:nvSpPr>
-        <p:spPr>
-          <a:xfrm>
-            <a:off x="1792440" y="5367240"/>
-            <a:ext cx="5486040" cy="804600"/>
-          </a:xfrm>
-          <a:prstGeom prst="rect">
-            <a:avLst/>
-          </a:prstGeom>
-          <a:noFill/>
-          <a:ln w="0">
-            <a:noFill/>
-          </a:ln>
-        </p:spPr>
-        <p:txBody>
-          <a:bodyPr lIns="91440" rIns="91440" tIns="45720" bIns="45720" anchor="t">
-            <a:noAutofit/>
-          </a:bodyPr>
-          <a:p>
-            <a:pPr indent="0" defTabSz="457200">
-              <a:lnSpc>
-                <a:spcPct val="100000"/>
-              </a:lnSpc>
-              <a:spcBef>
-                <a:spcPts val="281"/>
-              </a:spcBef>
-              <a:buNone/>
-              <a:tabLst>
-                <a:tab algn="l" pos="0"/>
-              </a:tabLst>
-            </a:pPr>
-            <a:r>
-              <a:rPr lang="en-US" sz="1400" b="0" u="none" strike="noStrike">
-                <a:solidFill>
-                  <a:schemeClr val="dk1"/>
-                </a:solidFill>
-                <a:effectLst/>
-                <a:uFillTx/>
-                <a:latin typeface="Calibri"/>
-              </a:rPr>
-              <a:t>Click to edit Master text styles</a:t>
-            </a:r>
-            <a:endParaRPr lang="en-US" sz="1400" b="0" u="none" strike="noStrike">
-              <a:solidFill>
-                <a:schemeClr val="dk1"/>
-              </a:solidFill>
-              <a:effectLst/>
-              <a:uFillTx/>
-              <a:latin typeface="Calibri"/>
-            </a:endParaRPr>
-          </a:p>
-        </p:txBody>
-      </p:sp>
-      <p:sp>
-        <p:nvSpPr>
-          <p:cNvPr id="58" name="PlaceHolder 4"/>
-          <p:cNvSpPr>
-            <a:spLocks noGrp="1"/>
-          </p:cNvSpPr>
-          <p:nvPr>
-            <p:ph type="dt" idx="31"/>
-          </p:nvPr>
-        </p:nvSpPr>
-        <p:spPr>
-          <a:xfrm>
-            <a:off x="457200" y="6356520"/>
-            <a:ext cx="2133360" cy="364680"/>
-          </a:xfrm>
-          <a:prstGeom prst="rect">
-            <a:avLst/>
-          </a:prstGeom>
-          <a:noFill/>
-          <a:ln w="0">
-            <a:noFill/>
-          </a:ln>
-        </p:spPr>
-        <p:txBody>
-          <a:bodyPr lIns="91440" rIns="91440" tIns="45720" bIns="45720" anchor="ctr">
-            <a:noAutofit/>
-          </a:bodyPr>
-          <a:lstStyle>
-            <a:lvl1pPr indent="0" defTabSz="457200">
-              <a:lnSpc>
-                <a:spcPct val="100000"/>
-              </a:lnSpc>
-              <a:buNone/>
-              <a:defRPr lang="en-US" sz="1200" b="0" u="none" strike="noStrike">
-                <a:solidFill>
-                  <a:schemeClr val="dk1">
-                    <a:tint val="75000"/>
-                  </a:schemeClr>
-                </a:solidFill>
-                <a:effectLst/>
-                <a:uFillTx/>
-                <a:latin typeface="Calibri"/>
-              </a:defRPr>
-            </a:lvl1pPr>
-          </a:lstStyle>
-          <a:p>
-            <a:pPr indent="0" defTabSz="457200">
-              <a:lnSpc>
-                <a:spcPct val="100000"/>
-              </a:lnSpc>
-              <a:buNone/>
-            </a:pPr>
-            <a:r>
-              <a:rPr lang="en-US" sz="1200" b="0" u="none" strike="noStrike">
-                <a:solidFill>
-                  <a:schemeClr val="dk1">
-                    <a:tint val="75000"/>
-                  </a:schemeClr>
-                </a:solidFill>
-                <a:effectLst/>
-                <a:uFillTx/>
-                <a:latin typeface="Calibri"/>
-              </a:rPr>
-              <a:t>&lt;data/hora&gt;</a:t>
-            </a:r>
-            <a:endParaRPr lang="pt-PT" sz="1200" b="0" u="none" strike="noStrike">
-              <a:solidFill>
-                <a:srgbClr val="000000"/>
-              </a:solidFill>
-              <a:effectLst/>
-              <a:uFillTx/>
-              <a:latin typeface="Times New Roman"/>
-            </a:endParaRPr>
-          </a:p>
-        </p:txBody>
-      </p:sp>
-      <p:sp>
-        <p:nvSpPr>
-          <p:cNvPr id="59" name="PlaceHolder 5"/>
-          <p:cNvSpPr>
-            <a:spLocks noGrp="1"/>
-          </p:cNvSpPr>
-          <p:nvPr>
-            <p:ph type="ftr" idx="32"/>
-          </p:nvPr>
-        </p:nvSpPr>
-        <p:spPr>
-          <a:xfrm>
-            <a:off x="3124080" y="6356520"/>
-            <a:ext cx="2895120" cy="364680"/>
-          </a:xfrm>
-          <a:prstGeom prst="rect">
-            <a:avLst/>
-          </a:prstGeom>
-          <a:noFill/>
-          <a:ln w="0">
-            <a:noFill/>
-          </a:ln>
-        </p:spPr>
-        <p:txBody>
-          <a:bodyPr lIns="91440" rIns="91440" tIns="45720" bIns="45720" anchor="ctr">
-            <a:noAutofit/>
-          </a:bodyPr>
-          <a:lstStyle>
-            <a:lvl1pPr indent="0" algn="ctr">
-              <a:buNone/>
-              <a:defRPr lang="pt-PT" sz="1400" b="0" u="none" strike="noStrike">
-                <a:solidFill>
-                  <a:srgbClr val="000000"/>
-                </a:solidFill>
-                <a:effectLst/>
-                <a:uFillTx/>
-                <a:latin typeface="Times New Roman"/>
-              </a:defRPr>
-            </a:lvl1pPr>
-          </a:lstStyle>
-          <a:p>
-            <a:pPr indent="0" algn="ctr">
-              <a:buNone/>
-            </a:pPr>
-            <a:r>
-              <a:rPr lang="pt-PT" sz="1400" b="0" u="none" strike="noStrike">
-                <a:solidFill>
-                  <a:srgbClr val="000000"/>
-                </a:solidFill>
-                <a:effectLst/>
-                <a:uFillTx/>
-                <a:latin typeface="Times New Roman"/>
-              </a:rPr>
-              <a:t>&lt;rodapé&gt;</a:t>
-            </a:r>
-            <a:endParaRPr lang="pt-PT" sz="1400" b="0" u="none" strike="noStrike">
-              <a:solidFill>
-                <a:srgbClr val="000000"/>
-              </a:solidFill>
-              <a:effectLst/>
-              <a:uFillTx/>
-              <a:latin typeface="Times New Roman"/>
-            </a:endParaRPr>
-          </a:p>
-        </p:txBody>
-      </p:sp>
-      <p:sp>
-        <p:nvSpPr>
-          <p:cNvPr id="60" name="PlaceHolder 6"/>
-          <p:cNvSpPr>
-            <a:spLocks noGrp="1"/>
-          </p:cNvSpPr>
-          <p:nvPr>
-            <p:ph type="sldNum" idx="33"/>
-          </p:nvPr>
-        </p:nvSpPr>
-        <p:spPr>
-          <a:xfrm>
-            <a:off x="6553080" y="6356520"/>
-            <a:ext cx="2133360" cy="364680"/>
-          </a:xfrm>
-          <a:prstGeom prst="rect">
-            <a:avLst/>
-          </a:prstGeom>
-          <a:noFill/>
-          <a:ln w="0">
-            <a:noFill/>
-          </a:ln>
-        </p:spPr>
-        <p:txBody>
-          <a:bodyPr lIns="91440" rIns="91440" tIns="45720" bIns="45720" anchor="ctr">
-            <a:noAutofit/>
-          </a:bodyPr>
-          <a:lstStyle>
-            <a:lvl1pPr indent="0" algn="r" defTabSz="457200">
-              <a:lnSpc>
-                <a:spcPct val="100000"/>
-              </a:lnSpc>
-              <a:buNone/>
-              <a:defRPr lang="en-US" sz="1200" b="0" u="none" strike="noStrike">
-                <a:solidFill>
-                  <a:schemeClr val="dk1">
-                    <a:tint val="75000"/>
-                  </a:schemeClr>
-                </a:solidFill>
-                <a:effectLst/>
-                <a:uFillTx/>
-                <a:latin typeface="Calibri"/>
-              </a:defRPr>
-            </a:lvl1pPr>
-          </a:lstStyle>
-          <a:p>
-            <a:pPr indent="0" algn="r" defTabSz="457200">
-              <a:lnSpc>
-                <a:spcPct val="100000"/>
-              </a:lnSpc>
-              <a:buNone/>
-            </a:pPr>
-            <a:fld id="{411A39DB-94BA-4ACF-8951-1D35587CBAF4}" type="slidenum">
-              <a:rPr lang="en-US" sz="1200" b="0" u="none" strike="noStrike">
-                <a:solidFill>
-                  <a:schemeClr val="dk1">
-                    <a:tint val="75000"/>
-                  </a:schemeClr>
-                </a:solidFill>
-                <a:effectLst/>
-                <a:uFillTx/>
-                <a:latin typeface="Calibri"/>
-              </a:rPr>
-              <a:t>&lt;número&gt;</a:t>
-            </a:fld>
-            <a:endParaRPr lang="pt-PT" sz="1200" b="0" u="none" strike="noStrike">
-              <a:solidFill>
-                <a:srgbClr val="000000"/>
-              </a:solidFill>
-              <a:effectLst/>
-              <a:uFillTx/>
-              <a:latin typeface="Times New Roman"/>
-            </a:endParaRPr>
-          </a:p>
-        </p:txBody>
-      </p:sp>
-    </p:spTree>
-  </p:cSld>
-</p:sldLayout>
-</file>
-
-<file path=ppt/slideLayouts/slideLayout2.xml><?xml version="1.0" encoding="utf-8"?>
 <p:sldLayout xmlns:a="http://schemas.openxmlformats.org/drawingml/2006/main" xmlns:p="http://schemas.openxmlformats.org/presentationml/2006/main" xmlns:r="http://schemas.openxmlformats.org/officeDocument/2006/relationships" xmlns:p14="http://schemas.microsoft.com/office/powerpoint/2010/main" xmlns:p15="http://schemas.microsoft.com/office/powerpoint/2012/main" xmlns:mc="http://schemas.openxmlformats.org/markup-compatibility/2006" type="vertTx" preserve="1">
   <p:cSld name="Title and Vertical Text">
     <p:bg>
@@ -1537,7 +911,7 @@
       </p:grpSpPr>
       <p:sp>
         <p:nvSpPr>
-          <p:cNvPr id="6" name="PlaceHolder 1"/>
+          <p:cNvPr id="56" name="PlaceHolder 1"/>
           <p:cNvSpPr>
             <a:spLocks noGrp="1"/>
           </p:cNvSpPr>
@@ -1548,7 +922,7 @@
         <p:spPr>
           <a:xfrm>
             <a:off x="457200" y="274680"/>
-            <a:ext cx="8229240" cy="1142640"/>
+            <a:ext cx="8228160" cy="1141560"/>
           </a:xfrm>
           <a:prstGeom prst="rect">
             <a:avLst/>
@@ -1568,6 +942,9 @@
                 <a:spcPct val="100000"/>
               </a:lnSpc>
               <a:buNone/>
+              <a:tabLst>
+                <a:tab algn="l" pos="0"/>
+              </a:tabLst>
             </a:pPr>
             <a:r>
               <a:rPr lang="en-US" sz="4400" b="0" u="none" strike="noStrike">
@@ -1580,20 +957,20 @@
               </a:rPr>
               <a:t>Click to edit Master title style</a:t>
             </a:r>
-            <a:endParaRPr lang="en-US" sz="4400" b="0" u="none" strike="noStrike">
-              <a:solidFill>
-                <a:schemeClr val="dk1"/>
-              </a:solidFill>
-              <a:effectLst/>
-              <a:uFillTx/>
-              <a:latin typeface="Calibri"/>
+            <a:endParaRPr lang="pt-PT" sz="4400" b="0" u="none" strike="noStrike">
+              <a:solidFill>
+                <a:srgbClr val="000000"/>
+              </a:solidFill>
+              <a:effectLst/>
+              <a:uFillTx/>
+              <a:latin typeface="Arial"/>
             </a:endParaRPr>
           </a:p>
         </p:txBody>
       </p:sp>
       <p:sp>
         <p:nvSpPr>
-          <p:cNvPr id="7" name="PlaceHolder 2"/>
+          <p:cNvPr id="57" name="PlaceHolder 2"/>
           <p:cNvSpPr>
             <a:spLocks noGrp="1"/>
           </p:cNvSpPr>
@@ -1604,7 +981,7 @@
         <p:spPr>
           <a:xfrm>
             <a:off x="457200" y="1600200"/>
-            <a:ext cx="8229240" cy="4525560"/>
+            <a:ext cx="8228160" cy="4524480"/>
           </a:xfrm>
           <a:prstGeom prst="rect">
             <a:avLst/>
@@ -1643,13 +1020,13 @@
               </a:rPr>
               <a:t>Click to edit Master text styles</a:t>
             </a:r>
-            <a:endParaRPr lang="en-US" sz="3200" b="0" u="none" strike="noStrike">
-              <a:solidFill>
-                <a:schemeClr val="dk1"/>
-              </a:solidFill>
-              <a:effectLst/>
-              <a:uFillTx/>
-              <a:latin typeface="Calibri"/>
+            <a:endParaRPr lang="pt-PT" sz="3200" b="0" u="none" strike="noStrike">
+              <a:solidFill>
+                <a:srgbClr val="000000"/>
+              </a:solidFill>
+              <a:effectLst/>
+              <a:uFillTx/>
+              <a:latin typeface="Arial"/>
             </a:endParaRPr>
           </a:p>
           <a:p>
@@ -1677,13 +1054,13 @@
               </a:rPr>
               <a:t>Second level</a:t>
             </a:r>
-            <a:endParaRPr lang="en-US" sz="2800" b="0" u="none" strike="noStrike">
-              <a:solidFill>
-                <a:schemeClr val="dk1"/>
-              </a:solidFill>
-              <a:effectLst/>
-              <a:uFillTx/>
-              <a:latin typeface="Calibri"/>
+            <a:endParaRPr lang="pt-PT" sz="2800" b="0" u="none" strike="noStrike">
+              <a:solidFill>
+                <a:srgbClr val="000000"/>
+              </a:solidFill>
+              <a:effectLst/>
+              <a:uFillTx/>
+              <a:latin typeface="Arial"/>
             </a:endParaRPr>
           </a:p>
           <a:p>
@@ -1711,13 +1088,13 @@
               </a:rPr>
               <a:t>Third level</a:t>
             </a:r>
-            <a:endParaRPr lang="en-US" sz="2400" b="0" u="none" strike="noStrike">
-              <a:solidFill>
-                <a:schemeClr val="dk1"/>
-              </a:solidFill>
-              <a:effectLst/>
-              <a:uFillTx/>
-              <a:latin typeface="Calibri"/>
+            <a:endParaRPr lang="pt-PT" sz="2400" b="0" u="none" strike="noStrike">
+              <a:solidFill>
+                <a:srgbClr val="000000"/>
+              </a:solidFill>
+              <a:effectLst/>
+              <a:uFillTx/>
+              <a:latin typeface="Arial"/>
             </a:endParaRPr>
           </a:p>
           <a:p>
@@ -1745,13 +1122,13 @@
               </a:rPr>
               <a:t>Fourth level</a:t>
             </a:r>
-            <a:endParaRPr lang="en-US" sz="2000" b="0" u="none" strike="noStrike">
-              <a:solidFill>
-                <a:schemeClr val="dk1"/>
-              </a:solidFill>
-              <a:effectLst/>
-              <a:uFillTx/>
-              <a:latin typeface="Calibri"/>
+            <a:endParaRPr lang="pt-PT" sz="2000" b="0" u="none" strike="noStrike">
+              <a:solidFill>
+                <a:srgbClr val="000000"/>
+              </a:solidFill>
+              <a:effectLst/>
+              <a:uFillTx/>
+              <a:latin typeface="Arial"/>
             </a:endParaRPr>
           </a:p>
           <a:p>
@@ -1779,31 +1156,31 @@
               </a:rPr>
               <a:t>Fifth level</a:t>
             </a:r>
-            <a:endParaRPr lang="en-US" sz="2000" b="0" u="none" strike="noStrike">
-              <a:solidFill>
-                <a:schemeClr val="dk1"/>
-              </a:solidFill>
-              <a:effectLst/>
-              <a:uFillTx/>
-              <a:latin typeface="Calibri"/>
+            <a:endParaRPr lang="pt-PT" sz="2000" b="0" u="none" strike="noStrike">
+              <a:solidFill>
+                <a:srgbClr val="000000"/>
+              </a:solidFill>
+              <a:effectLst/>
+              <a:uFillTx/>
+              <a:latin typeface="Arial"/>
             </a:endParaRPr>
           </a:p>
         </p:txBody>
       </p:sp>
       <p:sp>
         <p:nvSpPr>
-          <p:cNvPr id="8" name="PlaceHolder 3"/>
+          <p:cNvPr id="58" name="PlaceHolder 3"/>
           <p:cNvSpPr>
             <a:spLocks noGrp="1"/>
           </p:cNvSpPr>
           <p:nvPr>
-            <p:ph type="dt" idx="4"/>
+            <p:ph type="dt" idx="31"/>
           </p:nvPr>
         </p:nvSpPr>
         <p:spPr>
           <a:xfrm>
             <a:off x="457200" y="6356520"/>
-            <a:ext cx="2133360" cy="364680"/>
+            <a:ext cx="2132280" cy="363600"/>
           </a:xfrm>
           <a:prstGeom prst="rect">
             <a:avLst/>
@@ -1823,6 +1200,9 @@
                 <a:spcPct val="100000"/>
               </a:lnSpc>
               <a:buNone/>
+              <a:tabLst>
+                <a:tab algn="l" pos="0"/>
+              </a:tabLst>
               <a:defRPr lang="en-US" sz="1200" b="0" u="none" strike="noStrike">
                 <a:solidFill>
                   <a:schemeClr val="dk1">
@@ -1841,6 +1221,9 @@
                 <a:spcPct val="100000"/>
               </a:lnSpc>
               <a:buNone/>
+              <a:tabLst>
+                <a:tab algn="l" pos="0"/>
+              </a:tabLst>
             </a:pPr>
             <a:r>
               <a:rPr lang="en-US" sz="1200" b="0" u="none" strike="noStrike">
@@ -1868,18 +1251,18 @@
       </p:sp>
       <p:sp>
         <p:nvSpPr>
-          <p:cNvPr id="9" name="PlaceHolder 4"/>
+          <p:cNvPr id="59" name="PlaceHolder 4"/>
           <p:cNvSpPr>
             <a:spLocks noGrp="1"/>
           </p:cNvSpPr>
           <p:nvPr>
-            <p:ph type="ftr" idx="5"/>
+            <p:ph type="ftr" idx="32"/>
           </p:nvPr>
         </p:nvSpPr>
         <p:spPr>
           <a:xfrm>
             <a:off x="3124080" y="6356520"/>
-            <a:ext cx="2895120" cy="364680"/>
+            <a:ext cx="2894040" cy="363600"/>
           </a:xfrm>
           <a:prstGeom prst="rect">
             <a:avLst/>
@@ -1895,7 +1278,13 @@
           </a:bodyPr>
           <a:lstStyle>
             <a:lvl1pPr indent="0" algn="ctr">
+              <a:lnSpc>
+                <a:spcPct val="100000"/>
+              </a:lnSpc>
               <a:buNone/>
+              <a:tabLst>
+                <a:tab algn="l" pos="0"/>
+              </a:tabLst>
               <a:defRPr lang="pt-PT" sz="1400" b="0" u="none" strike="noStrike">
                 <a:solidFill>
                   <a:srgbClr val="000000"/>
@@ -1908,7 +1297,13 @@
           </a:lstStyle>
           <a:p>
             <a:pPr indent="0" algn="ctr">
+              <a:lnSpc>
+                <a:spcPct val="100000"/>
+              </a:lnSpc>
               <a:buNone/>
+              <a:tabLst>
+                <a:tab algn="l" pos="0"/>
+              </a:tabLst>
             </a:pPr>
             <a:r>
               <a:rPr lang="pt-PT" sz="1400" b="0" u="none" strike="noStrike">
@@ -1934,18 +1329,18 @@
       </p:sp>
       <p:sp>
         <p:nvSpPr>
-          <p:cNvPr id="10" name="PlaceHolder 5"/>
+          <p:cNvPr id="60" name="PlaceHolder 5"/>
           <p:cNvSpPr>
             <a:spLocks noGrp="1"/>
           </p:cNvSpPr>
           <p:nvPr>
-            <p:ph type="sldNum" idx="6"/>
+            <p:ph type="sldNum" idx="33"/>
           </p:nvPr>
         </p:nvSpPr>
         <p:spPr>
           <a:xfrm>
             <a:off x="6553080" y="6356520"/>
-            <a:ext cx="2133360" cy="364680"/>
+            <a:ext cx="2132280" cy="363600"/>
           </a:xfrm>
           <a:prstGeom prst="rect">
             <a:avLst/>
@@ -1965,6 +1360,9 @@
                 <a:spcPct val="100000"/>
               </a:lnSpc>
               <a:buNone/>
+              <a:tabLst>
+                <a:tab algn="l" pos="0"/>
+              </a:tabLst>
               <a:defRPr lang="en-US" sz="1200" b="0" u="none" strike="noStrike">
                 <a:solidFill>
                   <a:schemeClr val="dk1">
@@ -1983,8 +1381,11 @@
                 <a:spcPct val="100000"/>
               </a:lnSpc>
               <a:buNone/>
-            </a:pPr>
-            <a:fld id="{0591B2B4-7314-4AED-9AD6-2E70995768D4}" type="slidenum">
+              <a:tabLst>
+                <a:tab algn="l" pos="0"/>
+              </a:tabLst>
+            </a:pPr>
+            <a:fld id="{89578652-6A71-4E6D-9FB4-0E71379C4CF5}" type="slidenum">
               <a:rPr lang="en-US" sz="1200" b="0" u="none" strike="noStrike">
                 <a:solidFill>
                   <a:schemeClr val="dk1">
@@ -2013,509 +1414,7 @@
 </p:sldLayout>
 </file>
 
-<file path=ppt/slideLayouts/slideLayout3.xml><?xml version="1.0" encoding="utf-8"?>
-<p:sldLayout xmlns:a="http://schemas.openxmlformats.org/drawingml/2006/main" xmlns:p="http://schemas.openxmlformats.org/presentationml/2006/main" xmlns:r="http://schemas.openxmlformats.org/officeDocument/2006/relationships" xmlns:p14="http://schemas.microsoft.com/office/powerpoint/2010/main" xmlns:p15="http://schemas.microsoft.com/office/powerpoint/2012/main" xmlns:mc="http://schemas.openxmlformats.org/markup-compatibility/2006" type="vertTitleAndTx" preserve="1">
-  <p:cSld name="Vertical Title and Text">
-    <p:bg>
-      <p:bgPr>
-        <a:solidFill>
-          <a:srgbClr val="ffffff"/>
-        </a:solidFill>
-      </p:bgPr>
-    </p:bg>
-    <p:spTree>
-      <p:nvGrpSpPr>
-        <p:cNvPr id="1" name=""/>
-        <p:cNvGrpSpPr/>
-        <p:nvPr/>
-      </p:nvGrpSpPr>
-      <p:grpSpPr>
-        <a:xfrm>
-          <a:off x="0" y="0"/>
-          <a:ext cx="0" cy="0"/>
-          <a:chOff x="0" y="0"/>
-          <a:chExt cx="0" cy="0"/>
-        </a:xfrm>
-      </p:grpSpPr>
-      <p:sp>
-        <p:nvSpPr>
-          <p:cNvPr id="11" name="PlaceHolder 1"/>
-          <p:cNvSpPr>
-            <a:spLocks noGrp="1"/>
-          </p:cNvSpPr>
-          <p:nvPr>
-            <p:ph type="title"/>
-          </p:nvPr>
-        </p:nvSpPr>
-        <p:spPr>
-          <a:xfrm>
-            <a:off x="6629400" y="274680"/>
-            <a:ext cx="2057040" cy="5851080"/>
-          </a:xfrm>
-          <a:prstGeom prst="rect">
-            <a:avLst/>
-          </a:prstGeom>
-          <a:noFill/>
-          <a:ln w="0">
-            <a:noFill/>
-          </a:ln>
-        </p:spPr>
-        <p:txBody>
-          <a:bodyPr lIns="91440" rIns="91440" tIns="45720" bIns="45720" anchor="ctr" vert="eaVert">
-            <a:noAutofit/>
-          </a:bodyPr>
-          <a:p>
-            <a:pPr indent="0" algn="ctr" defTabSz="457200">
-              <a:lnSpc>
-                <a:spcPct val="100000"/>
-              </a:lnSpc>
-              <a:buNone/>
-            </a:pPr>
-            <a:r>
-              <a:rPr lang="en-US" sz="4400" b="0" u="none" strike="noStrike">
-                <a:solidFill>
-                  <a:schemeClr val="dk1"/>
-                </a:solidFill>
-                <a:effectLst/>
-                <a:uFillTx/>
-                <a:latin typeface="Calibri"/>
-              </a:rPr>
-              <a:t>Click to edit Master title style</a:t>
-            </a:r>
-            <a:endParaRPr lang="en-US" sz="4400" b="0" u="none" strike="noStrike">
-              <a:solidFill>
-                <a:schemeClr val="dk1"/>
-              </a:solidFill>
-              <a:effectLst/>
-              <a:uFillTx/>
-              <a:latin typeface="Calibri"/>
-            </a:endParaRPr>
-          </a:p>
-        </p:txBody>
-      </p:sp>
-      <p:sp>
-        <p:nvSpPr>
-          <p:cNvPr id="12" name="PlaceHolder 2"/>
-          <p:cNvSpPr>
-            <a:spLocks noGrp="1"/>
-          </p:cNvSpPr>
-          <p:nvPr>
-            <p:ph type="body"/>
-          </p:nvPr>
-        </p:nvSpPr>
-        <p:spPr>
-          <a:xfrm>
-            <a:off x="457200" y="274680"/>
-            <a:ext cx="6019560" cy="5851080"/>
-          </a:xfrm>
-          <a:prstGeom prst="rect">
-            <a:avLst/>
-          </a:prstGeom>
-          <a:noFill/>
-          <a:ln w="0">
-            <a:noFill/>
-          </a:ln>
-        </p:spPr>
-        <p:txBody>
-          <a:bodyPr lIns="91440" rIns="91440" tIns="45720" bIns="45720" anchor="t" vert="eaVert">
-            <a:noAutofit/>
-          </a:bodyPr>
-          <a:p>
-            <a:pPr marL="343080" indent="-343080" defTabSz="457200">
-              <a:lnSpc>
-                <a:spcPct val="100000"/>
-              </a:lnSpc>
-              <a:spcBef>
-                <a:spcPts val="641"/>
-              </a:spcBef>
-              <a:buClr>
-                <a:srgbClr val="000000"/>
-              </a:buClr>
-              <a:buFont typeface="Arial"/>
-              <a:buChar char="•"/>
-            </a:pPr>
-            <a:r>
-              <a:rPr lang="en-US" sz="3200" b="0" u="none" strike="noStrike">
-                <a:solidFill>
-                  <a:schemeClr val="dk1"/>
-                </a:solidFill>
-                <a:effectLst/>
-                <a:uFillTx/>
-                <a:latin typeface="Calibri"/>
-              </a:rPr>
-              <a:t>Click to edit Master text styles</a:t>
-            </a:r>
-            <a:endParaRPr lang="en-US" sz="3200" b="0" u="none" strike="noStrike">
-              <a:solidFill>
-                <a:schemeClr val="dk1"/>
-              </a:solidFill>
-              <a:effectLst/>
-              <a:uFillTx/>
-              <a:latin typeface="Calibri"/>
-            </a:endParaRPr>
-          </a:p>
-          <a:p>
-            <a:pPr marL="743040" lvl="1" indent="-285840" defTabSz="457200">
-              <a:lnSpc>
-                <a:spcPct val="100000"/>
-              </a:lnSpc>
-              <a:spcBef>
-                <a:spcPts val="561"/>
-              </a:spcBef>
-              <a:buClr>
-                <a:srgbClr val="000000"/>
-              </a:buClr>
-              <a:buFont typeface="Arial"/>
-              <a:buChar char="–"/>
-            </a:pPr>
-            <a:r>
-              <a:rPr lang="en-US" sz="2800" b="0" u="none" strike="noStrike">
-                <a:solidFill>
-                  <a:schemeClr val="dk1"/>
-                </a:solidFill>
-                <a:effectLst/>
-                <a:uFillTx/>
-                <a:latin typeface="Calibri"/>
-              </a:rPr>
-              <a:t>Second level</a:t>
-            </a:r>
-            <a:endParaRPr lang="en-US" sz="2800" b="0" u="none" strike="noStrike">
-              <a:solidFill>
-                <a:schemeClr val="dk1"/>
-              </a:solidFill>
-              <a:effectLst/>
-              <a:uFillTx/>
-              <a:latin typeface="Calibri"/>
-            </a:endParaRPr>
-          </a:p>
-          <a:p>
-            <a:pPr marL="1143000" lvl="2" indent="-228600" defTabSz="457200">
-              <a:lnSpc>
-                <a:spcPct val="100000"/>
-              </a:lnSpc>
-              <a:spcBef>
-                <a:spcPts val="479"/>
-              </a:spcBef>
-              <a:buClr>
-                <a:srgbClr val="000000"/>
-              </a:buClr>
-              <a:buFont typeface="Arial"/>
-              <a:buChar char="•"/>
-            </a:pPr>
-            <a:r>
-              <a:rPr lang="en-US" sz="2400" b="0" u="none" strike="noStrike">
-                <a:solidFill>
-                  <a:schemeClr val="dk1"/>
-                </a:solidFill>
-                <a:effectLst/>
-                <a:uFillTx/>
-                <a:latin typeface="Calibri"/>
-              </a:rPr>
-              <a:t>Third level</a:t>
-            </a:r>
-            <a:endParaRPr lang="en-US" sz="2400" b="0" u="none" strike="noStrike">
-              <a:solidFill>
-                <a:schemeClr val="dk1"/>
-              </a:solidFill>
-              <a:effectLst/>
-              <a:uFillTx/>
-              <a:latin typeface="Calibri"/>
-            </a:endParaRPr>
-          </a:p>
-          <a:p>
-            <a:pPr marL="1600200" lvl="3" indent="-228600" defTabSz="457200">
-              <a:lnSpc>
-                <a:spcPct val="100000"/>
-              </a:lnSpc>
-              <a:spcBef>
-                <a:spcPts val="400"/>
-              </a:spcBef>
-              <a:buClr>
-                <a:srgbClr val="000000"/>
-              </a:buClr>
-              <a:buFont typeface="Arial"/>
-              <a:buChar char="–"/>
-            </a:pPr>
-            <a:r>
-              <a:rPr lang="en-US" sz="2000" b="0" u="none" strike="noStrike">
-                <a:solidFill>
-                  <a:schemeClr val="dk1"/>
-                </a:solidFill>
-                <a:effectLst/>
-                <a:uFillTx/>
-                <a:latin typeface="Calibri"/>
-              </a:rPr>
-              <a:t>Fourth level</a:t>
-            </a:r>
-            <a:endParaRPr lang="en-US" sz="2000" b="0" u="none" strike="noStrike">
-              <a:solidFill>
-                <a:schemeClr val="dk1"/>
-              </a:solidFill>
-              <a:effectLst/>
-              <a:uFillTx/>
-              <a:latin typeface="Calibri"/>
-            </a:endParaRPr>
-          </a:p>
-          <a:p>
-            <a:pPr marL="2057400" lvl="4" indent="-228600" defTabSz="457200">
-              <a:lnSpc>
-                <a:spcPct val="100000"/>
-              </a:lnSpc>
-              <a:spcBef>
-                <a:spcPts val="400"/>
-              </a:spcBef>
-              <a:buClr>
-                <a:srgbClr val="000000"/>
-              </a:buClr>
-              <a:buFont typeface="Arial"/>
-              <a:buChar char="»"/>
-            </a:pPr>
-            <a:r>
-              <a:rPr lang="en-US" sz="2000" b="0" u="none" strike="noStrike">
-                <a:solidFill>
-                  <a:schemeClr val="dk1"/>
-                </a:solidFill>
-                <a:effectLst/>
-                <a:uFillTx/>
-                <a:latin typeface="Calibri"/>
-              </a:rPr>
-              <a:t>Fifth level</a:t>
-            </a:r>
-            <a:endParaRPr lang="en-US" sz="2000" b="0" u="none" strike="noStrike">
-              <a:solidFill>
-                <a:schemeClr val="dk1"/>
-              </a:solidFill>
-              <a:effectLst/>
-              <a:uFillTx/>
-              <a:latin typeface="Calibri"/>
-            </a:endParaRPr>
-          </a:p>
-        </p:txBody>
-      </p:sp>
-      <p:sp>
-        <p:nvSpPr>
-          <p:cNvPr id="13" name="PlaceHolder 3"/>
-          <p:cNvSpPr>
-            <a:spLocks noGrp="1"/>
-          </p:cNvSpPr>
-          <p:nvPr>
-            <p:ph type="dt" idx="7"/>
-          </p:nvPr>
-        </p:nvSpPr>
-        <p:spPr>
-          <a:xfrm>
-            <a:off x="457200" y="6356520"/>
-            <a:ext cx="2133360" cy="364680"/>
-          </a:xfrm>
-          <a:prstGeom prst="rect">
-            <a:avLst/>
-          </a:prstGeom>
-          <a:noFill/>
-          <a:ln w="0">
-            <a:noFill/>
-          </a:ln>
-        </p:spPr>
-        <p:txBody>
-          <a:bodyPr lIns="91440" rIns="91440" tIns="45720" bIns="45720" anchor="ctr">
-            <a:noAutofit/>
-          </a:bodyPr>
-          <a:lstStyle>
-            <a:lvl1pPr indent="0" defTabSz="457200">
-              <a:lnSpc>
-                <a:spcPct val="100000"/>
-              </a:lnSpc>
-              <a:buNone/>
-              <a:defRPr lang="en-US" sz="1200" b="0" u="none" strike="noStrike">
-                <a:solidFill>
-                  <a:schemeClr val="dk1">
-                    <a:tint val="75000"/>
-                  </a:schemeClr>
-                </a:solidFill>
-                <a:effectLst/>
-                <a:uFillTx/>
-                <a:latin typeface="Calibri"/>
-              </a:defRPr>
-            </a:lvl1pPr>
-          </a:lstStyle>
-          <a:p>
-            <a:pPr indent="0" defTabSz="457200">
-              <a:lnSpc>
-                <a:spcPct val="100000"/>
-              </a:lnSpc>
-              <a:buNone/>
-            </a:pPr>
-            <a:r>
-              <a:rPr lang="en-US" sz="1200" b="0" u="none" strike="noStrike">
-                <a:solidFill>
-                  <a:schemeClr val="dk1">
-                    <a:tint val="75000"/>
-                  </a:schemeClr>
-                </a:solidFill>
-                <a:effectLst/>
-                <a:uFillTx/>
-                <a:latin typeface="Calibri"/>
-              </a:rPr>
-              <a:t>&lt;data/hora&gt;</a:t>
-            </a:r>
-            <a:endParaRPr lang="pt-PT" sz="1200" b="0" u="none" strike="noStrike">
-              <a:solidFill>
-                <a:srgbClr val="000000"/>
-              </a:solidFill>
-              <a:effectLst/>
-              <a:uFillTx/>
-              <a:latin typeface="Times New Roman"/>
-            </a:endParaRPr>
-          </a:p>
-        </p:txBody>
-      </p:sp>
-      <p:sp>
-        <p:nvSpPr>
-          <p:cNvPr id="14" name="PlaceHolder 4"/>
-          <p:cNvSpPr>
-            <a:spLocks noGrp="1"/>
-          </p:cNvSpPr>
-          <p:nvPr>
-            <p:ph type="ftr" idx="8"/>
-          </p:nvPr>
-        </p:nvSpPr>
-        <p:spPr>
-          <a:xfrm>
-            <a:off x="3124080" y="6356520"/>
-            <a:ext cx="2895120" cy="364680"/>
-          </a:xfrm>
-          <a:prstGeom prst="rect">
-            <a:avLst/>
-          </a:prstGeom>
-          <a:noFill/>
-          <a:ln w="0">
-            <a:noFill/>
-          </a:ln>
-        </p:spPr>
-        <p:txBody>
-          <a:bodyPr lIns="91440" rIns="91440" tIns="45720" bIns="45720" anchor="ctr">
-            <a:noAutofit/>
-          </a:bodyPr>
-          <a:lstStyle>
-            <a:lvl1pPr indent="0" algn="ctr">
-              <a:buNone/>
-              <a:defRPr lang="pt-PT" sz="1400" b="0" u="none" strike="noStrike">
-                <a:solidFill>
-                  <a:srgbClr val="000000"/>
-                </a:solidFill>
-                <a:effectLst/>
-                <a:uFillTx/>
-                <a:latin typeface="Times New Roman"/>
-              </a:defRPr>
-            </a:lvl1pPr>
-          </a:lstStyle>
-          <a:p>
-            <a:pPr indent="0" algn="ctr">
-              <a:buNone/>
-            </a:pPr>
-            <a:r>
-              <a:rPr lang="pt-PT" sz="1400" b="0" u="none" strike="noStrike">
-                <a:solidFill>
-                  <a:srgbClr val="000000"/>
-                </a:solidFill>
-                <a:effectLst/>
-                <a:uFillTx/>
-                <a:latin typeface="Times New Roman"/>
-              </a:rPr>
-              <a:t>&lt;rodapé&gt;</a:t>
-            </a:r>
-            <a:endParaRPr lang="pt-PT" sz="1400" b="0" u="none" strike="noStrike">
-              <a:solidFill>
-                <a:srgbClr val="000000"/>
-              </a:solidFill>
-              <a:effectLst/>
-              <a:uFillTx/>
-              <a:latin typeface="Times New Roman"/>
-            </a:endParaRPr>
-          </a:p>
-        </p:txBody>
-      </p:sp>
-      <p:sp>
-        <p:nvSpPr>
-          <p:cNvPr id="15" name="PlaceHolder 5"/>
-          <p:cNvSpPr>
-            <a:spLocks noGrp="1"/>
-          </p:cNvSpPr>
-          <p:nvPr>
-            <p:ph type="sldNum" idx="9"/>
-          </p:nvPr>
-        </p:nvSpPr>
-        <p:spPr>
-          <a:xfrm>
-            <a:off x="6553080" y="6356520"/>
-            <a:ext cx="2133360" cy="364680"/>
-          </a:xfrm>
-          <a:prstGeom prst="rect">
-            <a:avLst/>
-          </a:prstGeom>
-          <a:noFill/>
-          <a:ln w="0">
-            <a:noFill/>
-          </a:ln>
-        </p:spPr>
-        <p:txBody>
-          <a:bodyPr lIns="91440" rIns="91440" tIns="45720" bIns="45720" anchor="ctr">
-            <a:noAutofit/>
-          </a:bodyPr>
-          <a:lstStyle>
-            <a:lvl1pPr indent="0" algn="r" defTabSz="457200">
-              <a:lnSpc>
-                <a:spcPct val="100000"/>
-              </a:lnSpc>
-              <a:buNone/>
-              <a:defRPr lang="en-US" sz="1200" b="0" u="none" strike="noStrike">
-                <a:solidFill>
-                  <a:schemeClr val="dk1">
-                    <a:tint val="75000"/>
-                  </a:schemeClr>
-                </a:solidFill>
-                <a:effectLst/>
-                <a:uFillTx/>
-                <a:latin typeface="Calibri"/>
-              </a:defRPr>
-            </a:lvl1pPr>
-          </a:lstStyle>
-          <a:p>
-            <a:pPr indent="0" algn="r" defTabSz="457200">
-              <a:lnSpc>
-                <a:spcPct val="100000"/>
-              </a:lnSpc>
-              <a:buNone/>
-            </a:pPr>
-            <a:fld id="{81A04821-4734-406D-B248-C561B1538C31}" type="slidenum">
-              <a:rPr lang="en-US" sz="1200" b="0" u="none" strike="noStrike">
-                <a:solidFill>
-                  <a:schemeClr val="dk1">
-                    <a:tint val="75000"/>
-                  </a:schemeClr>
-                </a:solidFill>
-                <a:effectLst/>
-                <a:uFillTx/>
-                <a:latin typeface="Calibri"/>
-              </a:rPr>
-              <a:t>&lt;número&gt;</a:t>
-            </a:fld>
-            <a:endParaRPr lang="pt-PT" sz="1200" b="0" u="none" strike="noStrike">
-              <a:solidFill>
-                <a:srgbClr val="000000"/>
-              </a:solidFill>
-              <a:effectLst/>
-              <a:uFillTx/>
-              <a:latin typeface="Times New Roman"/>
-            </a:endParaRPr>
-          </a:p>
-        </p:txBody>
-      </p:sp>
-    </p:spTree>
-  </p:cSld>
-</p:sldLayout>
-</file>
-
-<file path=ppt/slideLayouts/slideLayout4.xml><?xml version="1.0" encoding="utf-8"?>
+<file path=ppt/slideLayouts/slideLayout2.xml><?xml version="1.0" encoding="utf-8"?>
 <p:sldLayout xmlns:a="http://schemas.openxmlformats.org/drawingml/2006/main" xmlns:p="http://schemas.openxmlformats.org/presentationml/2006/main" xmlns:r="http://schemas.openxmlformats.org/officeDocument/2006/relationships" xmlns:p14="http://schemas.microsoft.com/office/powerpoint/2010/main" xmlns:p15="http://schemas.microsoft.com/office/powerpoint/2012/main" xmlns:mc="http://schemas.openxmlformats.org/markup-compatibility/2006" type="obj" preserve="1">
   <p:cSld name="Title and Content">
     <p:bg>
@@ -2541,7 +1440,7 @@
       </p:grpSpPr>
       <p:sp>
         <p:nvSpPr>
-          <p:cNvPr id="16" name="PlaceHolder 1"/>
+          <p:cNvPr id="7" name="PlaceHolder 1"/>
           <p:cNvSpPr>
             <a:spLocks noGrp="1"/>
           </p:cNvSpPr>
@@ -2552,7 +1451,7 @@
         <p:spPr>
           <a:xfrm>
             <a:off x="457200" y="274680"/>
-            <a:ext cx="8229240" cy="1142640"/>
+            <a:ext cx="8228160" cy="1141560"/>
           </a:xfrm>
           <a:prstGeom prst="rect">
             <a:avLst/>
@@ -2572,6 +1471,9 @@
                 <a:spcPct val="100000"/>
               </a:lnSpc>
               <a:buNone/>
+              <a:tabLst>
+                <a:tab algn="l" pos="0"/>
+              </a:tabLst>
             </a:pPr>
             <a:r>
               <a:rPr lang="en-US" sz="4400" b="0" u="none" strike="noStrike">
@@ -2584,20 +1486,20 @@
               </a:rPr>
               <a:t>Click to edit Master title style</a:t>
             </a:r>
-            <a:endParaRPr lang="en-US" sz="4400" b="0" u="none" strike="noStrike">
-              <a:solidFill>
-                <a:schemeClr val="dk1"/>
-              </a:solidFill>
-              <a:effectLst/>
-              <a:uFillTx/>
-              <a:latin typeface="Calibri"/>
+            <a:endParaRPr lang="pt-PT" sz="4400" b="0" u="none" strike="noStrike">
+              <a:solidFill>
+                <a:srgbClr val="000000"/>
+              </a:solidFill>
+              <a:effectLst/>
+              <a:uFillTx/>
+              <a:latin typeface="Arial"/>
             </a:endParaRPr>
           </a:p>
         </p:txBody>
       </p:sp>
       <p:sp>
         <p:nvSpPr>
-          <p:cNvPr id="17" name="PlaceHolder 2"/>
+          <p:cNvPr id="8" name="PlaceHolder 2"/>
           <p:cNvSpPr>
             <a:spLocks noGrp="1"/>
           </p:cNvSpPr>
@@ -2608,7 +1510,7 @@
         <p:spPr>
           <a:xfrm>
             <a:off x="457200" y="1600200"/>
-            <a:ext cx="8229240" cy="4525560"/>
+            <a:ext cx="8228160" cy="4524480"/>
           </a:xfrm>
           <a:prstGeom prst="rect">
             <a:avLst/>
@@ -2647,13 +1549,13 @@
               </a:rPr>
               <a:t>Click to edit Master text styles</a:t>
             </a:r>
-            <a:endParaRPr lang="en-US" sz="3200" b="0" u="none" strike="noStrike">
-              <a:solidFill>
-                <a:schemeClr val="dk1"/>
-              </a:solidFill>
-              <a:effectLst/>
-              <a:uFillTx/>
-              <a:latin typeface="Calibri"/>
+            <a:endParaRPr lang="pt-PT" sz="3200" b="0" u="none" strike="noStrike">
+              <a:solidFill>
+                <a:srgbClr val="000000"/>
+              </a:solidFill>
+              <a:effectLst/>
+              <a:uFillTx/>
+              <a:latin typeface="Arial"/>
             </a:endParaRPr>
           </a:p>
           <a:p>
@@ -2681,13 +1583,13 @@
               </a:rPr>
               <a:t>Second level</a:t>
             </a:r>
-            <a:endParaRPr lang="en-US" sz="2800" b="0" u="none" strike="noStrike">
-              <a:solidFill>
-                <a:schemeClr val="dk1"/>
-              </a:solidFill>
-              <a:effectLst/>
-              <a:uFillTx/>
-              <a:latin typeface="Calibri"/>
+            <a:endParaRPr lang="pt-PT" sz="2800" b="0" u="none" strike="noStrike">
+              <a:solidFill>
+                <a:srgbClr val="000000"/>
+              </a:solidFill>
+              <a:effectLst/>
+              <a:uFillTx/>
+              <a:latin typeface="Arial"/>
             </a:endParaRPr>
           </a:p>
           <a:p>
@@ -2715,13 +1617,13 @@
               </a:rPr>
               <a:t>Third level</a:t>
             </a:r>
-            <a:endParaRPr lang="en-US" sz="2400" b="0" u="none" strike="noStrike">
-              <a:solidFill>
-                <a:schemeClr val="dk1"/>
-              </a:solidFill>
-              <a:effectLst/>
-              <a:uFillTx/>
-              <a:latin typeface="Calibri"/>
+            <a:endParaRPr lang="pt-PT" sz="2400" b="0" u="none" strike="noStrike">
+              <a:solidFill>
+                <a:srgbClr val="000000"/>
+              </a:solidFill>
+              <a:effectLst/>
+              <a:uFillTx/>
+              <a:latin typeface="Arial"/>
             </a:endParaRPr>
           </a:p>
           <a:p>
@@ -2749,13 +1651,13 @@
               </a:rPr>
               <a:t>Fourth level</a:t>
             </a:r>
-            <a:endParaRPr lang="en-US" sz="2000" b="0" u="none" strike="noStrike">
-              <a:solidFill>
-                <a:schemeClr val="dk1"/>
-              </a:solidFill>
-              <a:effectLst/>
-              <a:uFillTx/>
-              <a:latin typeface="Calibri"/>
+            <a:endParaRPr lang="pt-PT" sz="2000" b="0" u="none" strike="noStrike">
+              <a:solidFill>
+                <a:srgbClr val="000000"/>
+              </a:solidFill>
+              <a:effectLst/>
+              <a:uFillTx/>
+              <a:latin typeface="Arial"/>
             </a:endParaRPr>
           </a:p>
           <a:p>
@@ -2783,31 +1685,31 @@
               </a:rPr>
               <a:t>Fifth level</a:t>
             </a:r>
-            <a:endParaRPr lang="en-US" sz="2000" b="0" u="none" strike="noStrike">
-              <a:solidFill>
-                <a:schemeClr val="dk1"/>
-              </a:solidFill>
-              <a:effectLst/>
-              <a:uFillTx/>
-              <a:latin typeface="Calibri"/>
+            <a:endParaRPr lang="pt-PT" sz="2000" b="0" u="none" strike="noStrike">
+              <a:solidFill>
+                <a:srgbClr val="000000"/>
+              </a:solidFill>
+              <a:effectLst/>
+              <a:uFillTx/>
+              <a:latin typeface="Arial"/>
             </a:endParaRPr>
           </a:p>
         </p:txBody>
       </p:sp>
       <p:sp>
         <p:nvSpPr>
-          <p:cNvPr id="18" name="PlaceHolder 3"/>
+          <p:cNvPr id="9" name="PlaceHolder 3"/>
           <p:cNvSpPr>
             <a:spLocks noGrp="1"/>
           </p:cNvSpPr>
           <p:nvPr>
-            <p:ph type="dt" idx="10"/>
+            <p:ph type="dt" idx="4"/>
           </p:nvPr>
         </p:nvSpPr>
         <p:spPr>
           <a:xfrm>
             <a:off x="457200" y="6356520"/>
-            <a:ext cx="2133360" cy="364680"/>
+            <a:ext cx="2132280" cy="363600"/>
           </a:xfrm>
           <a:prstGeom prst="rect">
             <a:avLst/>
@@ -2827,6 +1729,9 @@
                 <a:spcPct val="100000"/>
               </a:lnSpc>
               <a:buNone/>
+              <a:tabLst>
+                <a:tab algn="l" pos="0"/>
+              </a:tabLst>
               <a:defRPr lang="en-US" sz="1200" b="0" u="none" strike="noStrike">
                 <a:solidFill>
                   <a:schemeClr val="dk1">
@@ -2845,6 +1750,9 @@
                 <a:spcPct val="100000"/>
               </a:lnSpc>
               <a:buNone/>
+              <a:tabLst>
+                <a:tab algn="l" pos="0"/>
+              </a:tabLst>
             </a:pPr>
             <a:r>
               <a:rPr lang="en-US" sz="1200" b="0" u="none" strike="noStrike">
@@ -2872,18 +1780,18 @@
       </p:sp>
       <p:sp>
         <p:nvSpPr>
-          <p:cNvPr id="19" name="PlaceHolder 4"/>
+          <p:cNvPr id="10" name="PlaceHolder 4"/>
           <p:cNvSpPr>
             <a:spLocks noGrp="1"/>
           </p:cNvSpPr>
           <p:nvPr>
-            <p:ph type="ftr" idx="11"/>
+            <p:ph type="ftr" idx="5"/>
           </p:nvPr>
         </p:nvSpPr>
         <p:spPr>
           <a:xfrm>
             <a:off x="3124080" y="6356520"/>
-            <a:ext cx="2895120" cy="364680"/>
+            <a:ext cx="2894040" cy="363600"/>
           </a:xfrm>
           <a:prstGeom prst="rect">
             <a:avLst/>
@@ -2899,7 +1807,13 @@
           </a:bodyPr>
           <a:lstStyle>
             <a:lvl1pPr indent="0" algn="ctr">
+              <a:lnSpc>
+                <a:spcPct val="100000"/>
+              </a:lnSpc>
               <a:buNone/>
+              <a:tabLst>
+                <a:tab algn="l" pos="0"/>
+              </a:tabLst>
               <a:defRPr lang="pt-PT" sz="1400" b="0" u="none" strike="noStrike">
                 <a:solidFill>
                   <a:srgbClr val="000000"/>
@@ -2912,7 +1826,13 @@
           </a:lstStyle>
           <a:p>
             <a:pPr indent="0" algn="ctr">
+              <a:lnSpc>
+                <a:spcPct val="100000"/>
+              </a:lnSpc>
               <a:buNone/>
+              <a:tabLst>
+                <a:tab algn="l" pos="0"/>
+              </a:tabLst>
             </a:pPr>
             <a:r>
               <a:rPr lang="pt-PT" sz="1400" b="0" u="none" strike="noStrike">
@@ -2938,18 +1858,18 @@
       </p:sp>
       <p:sp>
         <p:nvSpPr>
-          <p:cNvPr id="20" name="PlaceHolder 5"/>
+          <p:cNvPr id="11" name="PlaceHolder 5"/>
           <p:cNvSpPr>
             <a:spLocks noGrp="1"/>
           </p:cNvSpPr>
           <p:nvPr>
-            <p:ph type="sldNum" idx="12"/>
+            <p:ph type="sldNum" idx="6"/>
           </p:nvPr>
         </p:nvSpPr>
         <p:spPr>
           <a:xfrm>
             <a:off x="6553080" y="6356520"/>
-            <a:ext cx="2133360" cy="364680"/>
+            <a:ext cx="2132280" cy="363600"/>
           </a:xfrm>
           <a:prstGeom prst="rect">
             <a:avLst/>
@@ -2969,6 +1889,9 @@
                 <a:spcPct val="100000"/>
               </a:lnSpc>
               <a:buNone/>
+              <a:tabLst>
+                <a:tab algn="l" pos="0"/>
+              </a:tabLst>
               <a:defRPr lang="en-US" sz="1200" b="0" u="none" strike="noStrike">
                 <a:solidFill>
                   <a:schemeClr val="dk1">
@@ -2987,8 +1910,11 @@
                 <a:spcPct val="100000"/>
               </a:lnSpc>
               <a:buNone/>
-            </a:pPr>
-            <a:fld id="{58104635-FA73-4487-8E9E-D9F9DC734D88}" type="slidenum">
+              <a:tabLst>
+                <a:tab algn="l" pos="0"/>
+              </a:tabLst>
+            </a:pPr>
+            <a:fld id="{CE798DAE-689A-4BD6-8940-FAB17D8A1B31}" type="slidenum">
               <a:rPr lang="en-US" sz="1200" b="0" u="none" strike="noStrike">
                 <a:solidFill>
                   <a:schemeClr val="dk1">
@@ -3017,7 +1943,7 @@
 </p:sldLayout>
 </file>
 
-<file path=ppt/slideLayouts/slideLayout5.xml><?xml version="1.0" encoding="utf-8"?>
+<file path=ppt/slideLayouts/slideLayout3.xml><?xml version="1.0" encoding="utf-8"?>
 <p:sldLayout xmlns:a="http://schemas.openxmlformats.org/drawingml/2006/main" xmlns:p="http://schemas.openxmlformats.org/presentationml/2006/main" xmlns:r="http://schemas.openxmlformats.org/officeDocument/2006/relationships" xmlns:p14="http://schemas.microsoft.com/office/powerpoint/2010/main" xmlns:p15="http://schemas.microsoft.com/office/powerpoint/2012/main" xmlns:mc="http://schemas.openxmlformats.org/markup-compatibility/2006" type="blank" preserve="1">
   <p:cSld name="Section Header">
     <p:bg>
@@ -3043,7 +1969,7 @@
       </p:grpSpPr>
       <p:sp>
         <p:nvSpPr>
-          <p:cNvPr id="21" name="PlaceHolder 1"/>
+          <p:cNvPr id="12" name="PlaceHolder 1"/>
           <p:cNvSpPr>
             <a:spLocks noGrp="1"/>
           </p:cNvSpPr>
@@ -3054,7 +1980,7 @@
         <p:spPr>
           <a:xfrm>
             <a:off x="722160" y="4406760"/>
-            <a:ext cx="7772040" cy="1361880"/>
+            <a:ext cx="7770960" cy="1360800"/>
           </a:xfrm>
           <a:prstGeom prst="rect">
             <a:avLst/>
@@ -3074,6 +2000,9 @@
                 <a:spcPct val="100000"/>
               </a:lnSpc>
               <a:buNone/>
+              <a:tabLst>
+                <a:tab algn="l" pos="0"/>
+              </a:tabLst>
             </a:pPr>
             <a:r>
               <a:rPr lang="en-US" sz="4000" b="1" u="none" strike="noStrike" cap="all">
@@ -3086,20 +2015,20 @@
               </a:rPr>
               <a:t>Click to edit Master title style</a:t>
             </a:r>
-            <a:endParaRPr lang="en-US" sz="4000" b="0" u="none" strike="noStrike">
-              <a:solidFill>
-                <a:schemeClr val="dk1"/>
-              </a:solidFill>
-              <a:effectLst/>
-              <a:uFillTx/>
-              <a:latin typeface="Calibri"/>
+            <a:endParaRPr lang="pt-PT" sz="4000" b="0" u="none" strike="noStrike">
+              <a:solidFill>
+                <a:srgbClr val="000000"/>
+              </a:solidFill>
+              <a:effectLst/>
+              <a:uFillTx/>
+              <a:latin typeface="Arial"/>
             </a:endParaRPr>
           </a:p>
         </p:txBody>
       </p:sp>
       <p:sp>
         <p:nvSpPr>
-          <p:cNvPr id="22" name="PlaceHolder 2"/>
+          <p:cNvPr id="13" name="PlaceHolder 2"/>
           <p:cNvSpPr>
             <a:spLocks noGrp="1"/>
           </p:cNvSpPr>
@@ -3110,7 +2039,7 @@
         <p:spPr>
           <a:xfrm>
             <a:off x="722160" y="2906640"/>
-            <a:ext cx="7772040" cy="1499760"/>
+            <a:ext cx="7770960" cy="1498680"/>
           </a:xfrm>
           <a:prstGeom prst="rect">
             <a:avLst/>
@@ -3150,31 +2079,31 @@
               </a:rPr>
               <a:t>Click to edit Master text styles</a:t>
             </a:r>
-            <a:endParaRPr lang="en-US" sz="2000" b="0" u="none" strike="noStrike">
-              <a:solidFill>
-                <a:schemeClr val="dk1"/>
-              </a:solidFill>
-              <a:effectLst/>
-              <a:uFillTx/>
-              <a:latin typeface="Calibri"/>
+            <a:endParaRPr lang="pt-PT" sz="2000" b="0" u="none" strike="noStrike">
+              <a:solidFill>
+                <a:srgbClr val="000000"/>
+              </a:solidFill>
+              <a:effectLst/>
+              <a:uFillTx/>
+              <a:latin typeface="Arial"/>
             </a:endParaRPr>
           </a:p>
         </p:txBody>
       </p:sp>
       <p:sp>
         <p:nvSpPr>
-          <p:cNvPr id="23" name="PlaceHolder 3"/>
+          <p:cNvPr id="14" name="PlaceHolder 3"/>
           <p:cNvSpPr>
             <a:spLocks noGrp="1"/>
           </p:cNvSpPr>
           <p:nvPr>
-            <p:ph type="dt" idx="13"/>
+            <p:ph type="dt" idx="7"/>
           </p:nvPr>
         </p:nvSpPr>
         <p:spPr>
           <a:xfrm>
             <a:off x="457200" y="6356520"/>
-            <a:ext cx="2133360" cy="364680"/>
+            <a:ext cx="2132280" cy="363600"/>
           </a:xfrm>
           <a:prstGeom prst="rect">
             <a:avLst/>
@@ -3194,6 +2123,9 @@
                 <a:spcPct val="100000"/>
               </a:lnSpc>
               <a:buNone/>
+              <a:tabLst>
+                <a:tab algn="l" pos="0"/>
+              </a:tabLst>
               <a:defRPr lang="en-US" sz="1200" b="0" u="none" strike="noStrike">
                 <a:solidFill>
                   <a:schemeClr val="dk1">
@@ -3212,6 +2144,9 @@
                 <a:spcPct val="100000"/>
               </a:lnSpc>
               <a:buNone/>
+              <a:tabLst>
+                <a:tab algn="l" pos="0"/>
+              </a:tabLst>
             </a:pPr>
             <a:r>
               <a:rPr lang="en-US" sz="1200" b="0" u="none" strike="noStrike">
@@ -3239,18 +2174,18 @@
       </p:sp>
       <p:sp>
         <p:nvSpPr>
-          <p:cNvPr id="24" name="PlaceHolder 4"/>
+          <p:cNvPr id="15" name="PlaceHolder 4"/>
           <p:cNvSpPr>
             <a:spLocks noGrp="1"/>
           </p:cNvSpPr>
           <p:nvPr>
-            <p:ph type="ftr" idx="14"/>
+            <p:ph type="ftr" idx="8"/>
           </p:nvPr>
         </p:nvSpPr>
         <p:spPr>
           <a:xfrm>
             <a:off x="3124080" y="6356520"/>
-            <a:ext cx="2895120" cy="364680"/>
+            <a:ext cx="2894040" cy="363600"/>
           </a:xfrm>
           <a:prstGeom prst="rect">
             <a:avLst/>
@@ -3266,7 +2201,13 @@
           </a:bodyPr>
           <a:lstStyle>
             <a:lvl1pPr indent="0" algn="ctr">
+              <a:lnSpc>
+                <a:spcPct val="100000"/>
+              </a:lnSpc>
               <a:buNone/>
+              <a:tabLst>
+                <a:tab algn="l" pos="0"/>
+              </a:tabLst>
               <a:defRPr lang="pt-PT" sz="1400" b="0" u="none" strike="noStrike">
                 <a:solidFill>
                   <a:srgbClr val="000000"/>
@@ -3279,7 +2220,13 @@
           </a:lstStyle>
           <a:p>
             <a:pPr indent="0" algn="ctr">
+              <a:lnSpc>
+                <a:spcPct val="100000"/>
+              </a:lnSpc>
               <a:buNone/>
+              <a:tabLst>
+                <a:tab algn="l" pos="0"/>
+              </a:tabLst>
             </a:pPr>
             <a:r>
               <a:rPr lang="pt-PT" sz="1400" b="0" u="none" strike="noStrike">
@@ -3305,18 +2252,18 @@
       </p:sp>
       <p:sp>
         <p:nvSpPr>
-          <p:cNvPr id="25" name="PlaceHolder 5"/>
+          <p:cNvPr id="16" name="PlaceHolder 5"/>
           <p:cNvSpPr>
             <a:spLocks noGrp="1"/>
           </p:cNvSpPr>
           <p:nvPr>
-            <p:ph type="sldNum" idx="15"/>
+            <p:ph type="sldNum" idx="9"/>
           </p:nvPr>
         </p:nvSpPr>
         <p:spPr>
           <a:xfrm>
             <a:off x="6553080" y="6356520"/>
-            <a:ext cx="2133360" cy="364680"/>
+            <a:ext cx="2132280" cy="363600"/>
           </a:xfrm>
           <a:prstGeom prst="rect">
             <a:avLst/>
@@ -3336,6 +2283,9 @@
                 <a:spcPct val="100000"/>
               </a:lnSpc>
               <a:buNone/>
+              <a:tabLst>
+                <a:tab algn="l" pos="0"/>
+              </a:tabLst>
               <a:defRPr lang="en-US" sz="1200" b="0" u="none" strike="noStrike">
                 <a:solidFill>
                   <a:schemeClr val="dk1">
@@ -3354,8 +2304,11 @@
                 <a:spcPct val="100000"/>
               </a:lnSpc>
               <a:buNone/>
-            </a:pPr>
-            <a:fld id="{06FAA09F-4784-4878-BA28-C774BF7A6A27}" type="slidenum">
+              <a:tabLst>
+                <a:tab algn="l" pos="0"/>
+              </a:tabLst>
+            </a:pPr>
+            <a:fld id="{972BD440-3D80-4502-8844-5F4B1F56B2CD}" type="slidenum">
               <a:rPr lang="en-US" sz="1200" b="0" u="none" strike="noStrike">
                 <a:solidFill>
                   <a:schemeClr val="dk1">
@@ -3384,7 +2337,7 @@
 </p:sldLayout>
 </file>
 
-<file path=ppt/slideLayouts/slideLayout6.xml><?xml version="1.0" encoding="utf-8"?>
+<file path=ppt/slideLayouts/slideLayout4.xml><?xml version="1.0" encoding="utf-8"?>
 <p:sldLayout xmlns:a="http://schemas.openxmlformats.org/drawingml/2006/main" xmlns:p="http://schemas.openxmlformats.org/presentationml/2006/main" xmlns:r="http://schemas.openxmlformats.org/officeDocument/2006/relationships" xmlns:p14="http://schemas.microsoft.com/office/powerpoint/2010/main" xmlns:p15="http://schemas.microsoft.com/office/powerpoint/2012/main" xmlns:mc="http://schemas.openxmlformats.org/markup-compatibility/2006" type="twoObj" preserve="1">
   <p:cSld name="Two Content">
     <p:bg>
@@ -3410,7 +2363,7 @@
       </p:grpSpPr>
       <p:sp>
         <p:nvSpPr>
-          <p:cNvPr id="26" name="PlaceHolder 1"/>
+          <p:cNvPr id="17" name="PlaceHolder 1"/>
           <p:cNvSpPr>
             <a:spLocks noGrp="1"/>
           </p:cNvSpPr>
@@ -3421,7 +2374,7 @@
         <p:spPr>
           <a:xfrm>
             <a:off x="457200" y="274680"/>
-            <a:ext cx="8229240" cy="1142640"/>
+            <a:ext cx="8228160" cy="1141560"/>
           </a:xfrm>
           <a:prstGeom prst="rect">
             <a:avLst/>
@@ -3441,6 +2394,9 @@
                 <a:spcPct val="100000"/>
               </a:lnSpc>
               <a:buNone/>
+              <a:tabLst>
+                <a:tab algn="l" pos="0"/>
+              </a:tabLst>
             </a:pPr>
             <a:r>
               <a:rPr lang="en-US" sz="4400" b="0" u="none" strike="noStrike">
@@ -3453,20 +2409,20 @@
               </a:rPr>
               <a:t>Click to edit Master title style</a:t>
             </a:r>
-            <a:endParaRPr lang="en-US" sz="4400" b="0" u="none" strike="noStrike">
-              <a:solidFill>
-                <a:schemeClr val="dk1"/>
-              </a:solidFill>
-              <a:effectLst/>
-              <a:uFillTx/>
-              <a:latin typeface="Calibri"/>
+            <a:endParaRPr lang="pt-PT" sz="4400" b="0" u="none" strike="noStrike">
+              <a:solidFill>
+                <a:srgbClr val="000000"/>
+              </a:solidFill>
+              <a:effectLst/>
+              <a:uFillTx/>
+              <a:latin typeface="Arial"/>
             </a:endParaRPr>
           </a:p>
         </p:txBody>
       </p:sp>
       <p:sp>
         <p:nvSpPr>
-          <p:cNvPr id="27" name="PlaceHolder 2"/>
+          <p:cNvPr id="18" name="PlaceHolder 2"/>
           <p:cNvSpPr>
             <a:spLocks noGrp="1"/>
           </p:cNvSpPr>
@@ -3477,7 +2433,7 @@
         <p:spPr>
           <a:xfrm>
             <a:off x="457200" y="1600200"/>
-            <a:ext cx="4038120" cy="4525560"/>
+            <a:ext cx="4037040" cy="4524480"/>
           </a:xfrm>
           <a:prstGeom prst="rect">
             <a:avLst/>
@@ -3516,13 +2472,13 @@
               </a:rPr>
               <a:t>Click to edit Master text styles</a:t>
             </a:r>
-            <a:endParaRPr lang="en-US" sz="2800" b="0" u="none" strike="noStrike">
-              <a:solidFill>
-                <a:schemeClr val="dk1"/>
-              </a:solidFill>
-              <a:effectLst/>
-              <a:uFillTx/>
-              <a:latin typeface="Calibri"/>
+            <a:endParaRPr lang="pt-PT" sz="2800" b="0" u="none" strike="noStrike">
+              <a:solidFill>
+                <a:srgbClr val="000000"/>
+              </a:solidFill>
+              <a:effectLst/>
+              <a:uFillTx/>
+              <a:latin typeface="Arial"/>
             </a:endParaRPr>
           </a:p>
           <a:p>
@@ -3550,13 +2506,13 @@
               </a:rPr>
               <a:t>Second level</a:t>
             </a:r>
-            <a:endParaRPr lang="en-US" sz="2400" b="0" u="none" strike="noStrike">
-              <a:solidFill>
-                <a:schemeClr val="dk1"/>
-              </a:solidFill>
-              <a:effectLst/>
-              <a:uFillTx/>
-              <a:latin typeface="Calibri"/>
+            <a:endParaRPr lang="pt-PT" sz="2400" b="0" u="none" strike="noStrike">
+              <a:solidFill>
+                <a:srgbClr val="000000"/>
+              </a:solidFill>
+              <a:effectLst/>
+              <a:uFillTx/>
+              <a:latin typeface="Arial"/>
             </a:endParaRPr>
           </a:p>
           <a:p>
@@ -3584,13 +2540,13 @@
               </a:rPr>
               <a:t>Third level</a:t>
             </a:r>
-            <a:endParaRPr lang="en-US" sz="2000" b="0" u="none" strike="noStrike">
-              <a:solidFill>
-                <a:schemeClr val="dk1"/>
-              </a:solidFill>
-              <a:effectLst/>
-              <a:uFillTx/>
-              <a:latin typeface="Calibri"/>
+            <a:endParaRPr lang="pt-PT" sz="2000" b="0" u="none" strike="noStrike">
+              <a:solidFill>
+                <a:srgbClr val="000000"/>
+              </a:solidFill>
+              <a:effectLst/>
+              <a:uFillTx/>
+              <a:latin typeface="Arial"/>
             </a:endParaRPr>
           </a:p>
           <a:p>
@@ -3618,13 +2574,13 @@
               </a:rPr>
               <a:t>Fourth level</a:t>
             </a:r>
-            <a:endParaRPr lang="en-US" sz="1800" b="0" u="none" strike="noStrike">
-              <a:solidFill>
-                <a:schemeClr val="dk1"/>
-              </a:solidFill>
-              <a:effectLst/>
-              <a:uFillTx/>
-              <a:latin typeface="Calibri"/>
+            <a:endParaRPr lang="pt-PT" sz="1800" b="0" u="none" strike="noStrike">
+              <a:solidFill>
+                <a:srgbClr val="000000"/>
+              </a:solidFill>
+              <a:effectLst/>
+              <a:uFillTx/>
+              <a:latin typeface="Arial"/>
             </a:endParaRPr>
           </a:p>
           <a:p>
@@ -3652,20 +2608,20 @@
               </a:rPr>
               <a:t>Fifth level</a:t>
             </a:r>
-            <a:endParaRPr lang="en-US" sz="1800" b="0" u="none" strike="noStrike">
-              <a:solidFill>
-                <a:schemeClr val="dk1"/>
-              </a:solidFill>
-              <a:effectLst/>
-              <a:uFillTx/>
-              <a:latin typeface="Calibri"/>
+            <a:endParaRPr lang="pt-PT" sz="1800" b="0" u="none" strike="noStrike">
+              <a:solidFill>
+                <a:srgbClr val="000000"/>
+              </a:solidFill>
+              <a:effectLst/>
+              <a:uFillTx/>
+              <a:latin typeface="Arial"/>
             </a:endParaRPr>
           </a:p>
         </p:txBody>
       </p:sp>
       <p:sp>
         <p:nvSpPr>
-          <p:cNvPr id="28" name="PlaceHolder 3"/>
+          <p:cNvPr id="19" name="PlaceHolder 3"/>
           <p:cNvSpPr>
             <a:spLocks noGrp="1"/>
           </p:cNvSpPr>
@@ -3676,7 +2632,7 @@
         <p:spPr>
           <a:xfrm>
             <a:off x="4648320" y="1600200"/>
-            <a:ext cx="4038120" cy="4525560"/>
+            <a:ext cx="4037040" cy="4524480"/>
           </a:xfrm>
           <a:prstGeom prst="rect">
             <a:avLst/>
@@ -3715,13 +2671,13 @@
               </a:rPr>
               <a:t>Click to edit Master text styles</a:t>
             </a:r>
-            <a:endParaRPr lang="en-US" sz="2800" b="0" u="none" strike="noStrike">
-              <a:solidFill>
-                <a:schemeClr val="dk1"/>
-              </a:solidFill>
-              <a:effectLst/>
-              <a:uFillTx/>
-              <a:latin typeface="Calibri"/>
+            <a:endParaRPr lang="pt-PT" sz="2800" b="0" u="none" strike="noStrike">
+              <a:solidFill>
+                <a:srgbClr val="000000"/>
+              </a:solidFill>
+              <a:effectLst/>
+              <a:uFillTx/>
+              <a:latin typeface="Arial"/>
             </a:endParaRPr>
           </a:p>
           <a:p>
@@ -3749,13 +2705,13 @@
               </a:rPr>
               <a:t>Second level</a:t>
             </a:r>
-            <a:endParaRPr lang="en-US" sz="2400" b="0" u="none" strike="noStrike">
-              <a:solidFill>
-                <a:schemeClr val="dk1"/>
-              </a:solidFill>
-              <a:effectLst/>
-              <a:uFillTx/>
-              <a:latin typeface="Calibri"/>
+            <a:endParaRPr lang="pt-PT" sz="2400" b="0" u="none" strike="noStrike">
+              <a:solidFill>
+                <a:srgbClr val="000000"/>
+              </a:solidFill>
+              <a:effectLst/>
+              <a:uFillTx/>
+              <a:latin typeface="Arial"/>
             </a:endParaRPr>
           </a:p>
           <a:p>
@@ -3783,13 +2739,13 @@
               </a:rPr>
               <a:t>Third level</a:t>
             </a:r>
-            <a:endParaRPr lang="en-US" sz="2000" b="0" u="none" strike="noStrike">
-              <a:solidFill>
-                <a:schemeClr val="dk1"/>
-              </a:solidFill>
-              <a:effectLst/>
-              <a:uFillTx/>
-              <a:latin typeface="Calibri"/>
+            <a:endParaRPr lang="pt-PT" sz="2000" b="0" u="none" strike="noStrike">
+              <a:solidFill>
+                <a:srgbClr val="000000"/>
+              </a:solidFill>
+              <a:effectLst/>
+              <a:uFillTx/>
+              <a:latin typeface="Arial"/>
             </a:endParaRPr>
           </a:p>
           <a:p>
@@ -3817,13 +2773,13 @@
               </a:rPr>
               <a:t>Fourth level</a:t>
             </a:r>
-            <a:endParaRPr lang="en-US" sz="1800" b="0" u="none" strike="noStrike">
-              <a:solidFill>
-                <a:schemeClr val="dk1"/>
-              </a:solidFill>
-              <a:effectLst/>
-              <a:uFillTx/>
-              <a:latin typeface="Calibri"/>
+            <a:endParaRPr lang="pt-PT" sz="1800" b="0" u="none" strike="noStrike">
+              <a:solidFill>
+                <a:srgbClr val="000000"/>
+              </a:solidFill>
+              <a:effectLst/>
+              <a:uFillTx/>
+              <a:latin typeface="Arial"/>
             </a:endParaRPr>
           </a:p>
           <a:p>
@@ -3851,31 +2807,31 @@
               </a:rPr>
               <a:t>Fifth level</a:t>
             </a:r>
-            <a:endParaRPr lang="en-US" sz="1800" b="0" u="none" strike="noStrike">
-              <a:solidFill>
-                <a:schemeClr val="dk1"/>
-              </a:solidFill>
-              <a:effectLst/>
-              <a:uFillTx/>
-              <a:latin typeface="Calibri"/>
+            <a:endParaRPr lang="pt-PT" sz="1800" b="0" u="none" strike="noStrike">
+              <a:solidFill>
+                <a:srgbClr val="000000"/>
+              </a:solidFill>
+              <a:effectLst/>
+              <a:uFillTx/>
+              <a:latin typeface="Arial"/>
             </a:endParaRPr>
           </a:p>
         </p:txBody>
       </p:sp>
       <p:sp>
         <p:nvSpPr>
-          <p:cNvPr id="29" name="PlaceHolder 4"/>
+          <p:cNvPr id="20" name="PlaceHolder 4"/>
           <p:cNvSpPr>
             <a:spLocks noGrp="1"/>
           </p:cNvSpPr>
           <p:nvPr>
-            <p:ph type="dt" idx="16"/>
+            <p:ph type="dt" idx="10"/>
           </p:nvPr>
         </p:nvSpPr>
         <p:spPr>
           <a:xfrm>
             <a:off x="457200" y="6356520"/>
-            <a:ext cx="2133360" cy="364680"/>
+            <a:ext cx="2132280" cy="363600"/>
           </a:xfrm>
           <a:prstGeom prst="rect">
             <a:avLst/>
@@ -3895,6 +2851,9 @@
                 <a:spcPct val="100000"/>
               </a:lnSpc>
               <a:buNone/>
+              <a:tabLst>
+                <a:tab algn="l" pos="0"/>
+              </a:tabLst>
               <a:defRPr lang="en-US" sz="1200" b="0" u="none" strike="noStrike">
                 <a:solidFill>
                   <a:schemeClr val="dk1">
@@ -3913,6 +2872,9 @@
                 <a:spcPct val="100000"/>
               </a:lnSpc>
               <a:buNone/>
+              <a:tabLst>
+                <a:tab algn="l" pos="0"/>
+              </a:tabLst>
             </a:pPr>
             <a:r>
               <a:rPr lang="en-US" sz="1200" b="0" u="none" strike="noStrike">
@@ -3940,18 +2902,18 @@
       </p:sp>
       <p:sp>
         <p:nvSpPr>
-          <p:cNvPr id="30" name="PlaceHolder 5"/>
+          <p:cNvPr id="21" name="PlaceHolder 5"/>
           <p:cNvSpPr>
             <a:spLocks noGrp="1"/>
           </p:cNvSpPr>
           <p:nvPr>
-            <p:ph type="ftr" idx="17"/>
+            <p:ph type="ftr" idx="11"/>
           </p:nvPr>
         </p:nvSpPr>
         <p:spPr>
           <a:xfrm>
             <a:off x="3124080" y="6356520"/>
-            <a:ext cx="2895120" cy="364680"/>
+            <a:ext cx="2894040" cy="363600"/>
           </a:xfrm>
           <a:prstGeom prst="rect">
             <a:avLst/>
@@ -3967,7 +2929,13 @@
           </a:bodyPr>
           <a:lstStyle>
             <a:lvl1pPr indent="0" algn="ctr">
+              <a:lnSpc>
+                <a:spcPct val="100000"/>
+              </a:lnSpc>
               <a:buNone/>
+              <a:tabLst>
+                <a:tab algn="l" pos="0"/>
+              </a:tabLst>
               <a:defRPr lang="pt-PT" sz="1400" b="0" u="none" strike="noStrike">
                 <a:solidFill>
                   <a:srgbClr val="000000"/>
@@ -3980,7 +2948,13 @@
           </a:lstStyle>
           <a:p>
             <a:pPr indent="0" algn="ctr">
+              <a:lnSpc>
+                <a:spcPct val="100000"/>
+              </a:lnSpc>
               <a:buNone/>
+              <a:tabLst>
+                <a:tab algn="l" pos="0"/>
+              </a:tabLst>
             </a:pPr>
             <a:r>
               <a:rPr lang="pt-PT" sz="1400" b="0" u="none" strike="noStrike">
@@ -4006,18 +2980,18 @@
       </p:sp>
       <p:sp>
         <p:nvSpPr>
-          <p:cNvPr id="31" name="PlaceHolder 6"/>
+          <p:cNvPr id="22" name="PlaceHolder 6"/>
           <p:cNvSpPr>
             <a:spLocks noGrp="1"/>
           </p:cNvSpPr>
           <p:nvPr>
-            <p:ph type="sldNum" idx="18"/>
+            <p:ph type="sldNum" idx="12"/>
           </p:nvPr>
         </p:nvSpPr>
         <p:spPr>
           <a:xfrm>
             <a:off x="6553080" y="6356520"/>
-            <a:ext cx="2133360" cy="364680"/>
+            <a:ext cx="2132280" cy="363600"/>
           </a:xfrm>
           <a:prstGeom prst="rect">
             <a:avLst/>
@@ -4037,6 +3011,9 @@
                 <a:spcPct val="100000"/>
               </a:lnSpc>
               <a:buNone/>
+              <a:tabLst>
+                <a:tab algn="l" pos="0"/>
+              </a:tabLst>
               <a:defRPr lang="en-US" sz="1200" b="0" u="none" strike="noStrike">
                 <a:solidFill>
                   <a:schemeClr val="dk1">
@@ -4055,8 +3032,11 @@
                 <a:spcPct val="100000"/>
               </a:lnSpc>
               <a:buNone/>
-            </a:pPr>
-            <a:fld id="{1756F096-FE1C-4F38-9F70-6E4A71112EAA}" type="slidenum">
+              <a:tabLst>
+                <a:tab algn="l" pos="0"/>
+              </a:tabLst>
+            </a:pPr>
+            <a:fld id="{F8E9DDD6-56A5-43EF-8329-C9A380890A18}" type="slidenum">
               <a:rPr lang="en-US" sz="1200" b="0" u="none" strike="noStrike">
                 <a:solidFill>
                   <a:schemeClr val="dk1">
@@ -4085,7 +3065,7 @@
 </p:sldLayout>
 </file>
 
-<file path=ppt/slideLayouts/slideLayout7.xml><?xml version="1.0" encoding="utf-8"?>
+<file path=ppt/slideLayouts/slideLayout5.xml><?xml version="1.0" encoding="utf-8"?>
 <p:sldLayout xmlns:a="http://schemas.openxmlformats.org/drawingml/2006/main" xmlns:p="http://schemas.openxmlformats.org/presentationml/2006/main" xmlns:r="http://schemas.openxmlformats.org/officeDocument/2006/relationships" xmlns:p14="http://schemas.microsoft.com/office/powerpoint/2010/main" xmlns:p15="http://schemas.microsoft.com/office/powerpoint/2012/main" xmlns:mc="http://schemas.openxmlformats.org/markup-compatibility/2006" type="blank" preserve="1">
   <p:cSld name="Comparison">
     <p:bg>
@@ -4111,7 +3091,7 @@
       </p:grpSpPr>
       <p:sp>
         <p:nvSpPr>
-          <p:cNvPr id="32" name="PlaceHolder 1"/>
+          <p:cNvPr id="23" name="PlaceHolder 1"/>
           <p:cNvSpPr>
             <a:spLocks noGrp="1"/>
           </p:cNvSpPr>
@@ -4122,7 +3102,7 @@
         <p:spPr>
           <a:xfrm>
             <a:off x="457200" y="274680"/>
-            <a:ext cx="8229240" cy="1142640"/>
+            <a:ext cx="8228160" cy="1141560"/>
           </a:xfrm>
           <a:prstGeom prst="rect">
             <a:avLst/>
@@ -4142,6 +3122,9 @@
                 <a:spcPct val="100000"/>
               </a:lnSpc>
               <a:buNone/>
+              <a:tabLst>
+                <a:tab algn="l" pos="0"/>
+              </a:tabLst>
             </a:pPr>
             <a:r>
               <a:rPr lang="en-US" sz="4400" b="0" u="none" strike="noStrike">
@@ -4154,20 +3137,20 @@
               </a:rPr>
               <a:t>Click to edit Master title style</a:t>
             </a:r>
-            <a:endParaRPr lang="en-US" sz="4400" b="0" u="none" strike="noStrike">
-              <a:solidFill>
-                <a:schemeClr val="dk1"/>
-              </a:solidFill>
-              <a:effectLst/>
-              <a:uFillTx/>
-              <a:latin typeface="Calibri"/>
+            <a:endParaRPr lang="pt-PT" sz="4400" b="0" u="none" strike="noStrike">
+              <a:solidFill>
+                <a:srgbClr val="000000"/>
+              </a:solidFill>
+              <a:effectLst/>
+              <a:uFillTx/>
+              <a:latin typeface="Arial"/>
             </a:endParaRPr>
           </a:p>
         </p:txBody>
       </p:sp>
       <p:sp>
         <p:nvSpPr>
-          <p:cNvPr id="33" name="PlaceHolder 2"/>
+          <p:cNvPr id="24" name="PlaceHolder 2"/>
           <p:cNvSpPr>
             <a:spLocks noGrp="1"/>
           </p:cNvSpPr>
@@ -4178,7 +3161,7 @@
         <p:spPr>
           <a:xfrm>
             <a:off x="457200" y="1535040"/>
-            <a:ext cx="4039920" cy="639360"/>
+            <a:ext cx="4038840" cy="638280"/>
           </a:xfrm>
           <a:prstGeom prst="rect">
             <a:avLst/>
@@ -4216,20 +3199,20 @@
               </a:rPr>
               <a:t>Click to edit Master text styles</a:t>
             </a:r>
-            <a:endParaRPr lang="en-US" sz="2400" b="0" u="none" strike="noStrike">
-              <a:solidFill>
-                <a:schemeClr val="dk1"/>
-              </a:solidFill>
-              <a:effectLst/>
-              <a:uFillTx/>
-              <a:latin typeface="Calibri"/>
+            <a:endParaRPr lang="pt-PT" sz="2400" b="0" u="none" strike="noStrike">
+              <a:solidFill>
+                <a:srgbClr val="000000"/>
+              </a:solidFill>
+              <a:effectLst/>
+              <a:uFillTx/>
+              <a:latin typeface="Arial"/>
             </a:endParaRPr>
           </a:p>
         </p:txBody>
       </p:sp>
       <p:sp>
         <p:nvSpPr>
-          <p:cNvPr id="34" name="PlaceHolder 3"/>
+          <p:cNvPr id="25" name="PlaceHolder 3"/>
           <p:cNvSpPr>
             <a:spLocks noGrp="1"/>
           </p:cNvSpPr>
@@ -4240,7 +3223,7 @@
         <p:spPr>
           <a:xfrm>
             <a:off x="457200" y="2174760"/>
-            <a:ext cx="4039920" cy="3951000"/>
+            <a:ext cx="4038840" cy="3949920"/>
           </a:xfrm>
           <a:prstGeom prst="rect">
             <a:avLst/>
@@ -4279,13 +3262,13 @@
               </a:rPr>
               <a:t>Click to edit Master text styles</a:t>
             </a:r>
-            <a:endParaRPr lang="en-US" sz="2400" b="0" u="none" strike="noStrike">
-              <a:solidFill>
-                <a:schemeClr val="dk1"/>
-              </a:solidFill>
-              <a:effectLst/>
-              <a:uFillTx/>
-              <a:latin typeface="Calibri"/>
+            <a:endParaRPr lang="pt-PT" sz="2400" b="0" u="none" strike="noStrike">
+              <a:solidFill>
+                <a:srgbClr val="000000"/>
+              </a:solidFill>
+              <a:effectLst/>
+              <a:uFillTx/>
+              <a:latin typeface="Arial"/>
             </a:endParaRPr>
           </a:p>
           <a:p>
@@ -4313,13 +3296,13 @@
               </a:rPr>
               <a:t>Second level</a:t>
             </a:r>
-            <a:endParaRPr lang="en-US" sz="2000" b="0" u="none" strike="noStrike">
-              <a:solidFill>
-                <a:schemeClr val="dk1"/>
-              </a:solidFill>
-              <a:effectLst/>
-              <a:uFillTx/>
-              <a:latin typeface="Calibri"/>
+            <a:endParaRPr lang="pt-PT" sz="2000" b="0" u="none" strike="noStrike">
+              <a:solidFill>
+                <a:srgbClr val="000000"/>
+              </a:solidFill>
+              <a:effectLst/>
+              <a:uFillTx/>
+              <a:latin typeface="Arial"/>
             </a:endParaRPr>
           </a:p>
           <a:p>
@@ -4347,13 +3330,13 @@
               </a:rPr>
               <a:t>Third level</a:t>
             </a:r>
-            <a:endParaRPr lang="en-US" sz="1800" b="0" u="none" strike="noStrike">
-              <a:solidFill>
-                <a:schemeClr val="dk1"/>
-              </a:solidFill>
-              <a:effectLst/>
-              <a:uFillTx/>
-              <a:latin typeface="Calibri"/>
+            <a:endParaRPr lang="pt-PT" sz="1800" b="0" u="none" strike="noStrike">
+              <a:solidFill>
+                <a:srgbClr val="000000"/>
+              </a:solidFill>
+              <a:effectLst/>
+              <a:uFillTx/>
+              <a:latin typeface="Arial"/>
             </a:endParaRPr>
           </a:p>
           <a:p>
@@ -4381,13 +3364,13 @@
               </a:rPr>
               <a:t>Fourth level</a:t>
             </a:r>
-            <a:endParaRPr lang="en-US" sz="1600" b="0" u="none" strike="noStrike">
-              <a:solidFill>
-                <a:schemeClr val="dk1"/>
-              </a:solidFill>
-              <a:effectLst/>
-              <a:uFillTx/>
-              <a:latin typeface="Calibri"/>
+            <a:endParaRPr lang="pt-PT" sz="1600" b="0" u="none" strike="noStrike">
+              <a:solidFill>
+                <a:srgbClr val="000000"/>
+              </a:solidFill>
+              <a:effectLst/>
+              <a:uFillTx/>
+              <a:latin typeface="Arial"/>
             </a:endParaRPr>
           </a:p>
           <a:p>
@@ -4415,20 +3398,20 @@
               </a:rPr>
               <a:t>Fifth level</a:t>
             </a:r>
-            <a:endParaRPr lang="en-US" sz="1600" b="0" u="none" strike="noStrike">
-              <a:solidFill>
-                <a:schemeClr val="dk1"/>
-              </a:solidFill>
-              <a:effectLst/>
-              <a:uFillTx/>
-              <a:latin typeface="Calibri"/>
+            <a:endParaRPr lang="pt-PT" sz="1600" b="0" u="none" strike="noStrike">
+              <a:solidFill>
+                <a:srgbClr val="000000"/>
+              </a:solidFill>
+              <a:effectLst/>
+              <a:uFillTx/>
+              <a:latin typeface="Arial"/>
             </a:endParaRPr>
           </a:p>
         </p:txBody>
       </p:sp>
       <p:sp>
         <p:nvSpPr>
-          <p:cNvPr id="35" name="PlaceHolder 4"/>
+          <p:cNvPr id="26" name="PlaceHolder 4"/>
           <p:cNvSpPr>
             <a:spLocks noGrp="1"/>
           </p:cNvSpPr>
@@ -4439,7 +3422,7 @@
         <p:spPr>
           <a:xfrm>
             <a:off x="4645080" y="1535040"/>
-            <a:ext cx="4041360" cy="639360"/>
+            <a:ext cx="4040280" cy="638280"/>
           </a:xfrm>
           <a:prstGeom prst="rect">
             <a:avLst/>
@@ -4477,20 +3460,20 @@
               </a:rPr>
               <a:t>Click to edit Master text styles</a:t>
             </a:r>
-            <a:endParaRPr lang="en-US" sz="2400" b="0" u="none" strike="noStrike">
-              <a:solidFill>
-                <a:schemeClr val="dk1"/>
-              </a:solidFill>
-              <a:effectLst/>
-              <a:uFillTx/>
-              <a:latin typeface="Calibri"/>
+            <a:endParaRPr lang="pt-PT" sz="2400" b="0" u="none" strike="noStrike">
+              <a:solidFill>
+                <a:srgbClr val="000000"/>
+              </a:solidFill>
+              <a:effectLst/>
+              <a:uFillTx/>
+              <a:latin typeface="Arial"/>
             </a:endParaRPr>
           </a:p>
         </p:txBody>
       </p:sp>
       <p:sp>
         <p:nvSpPr>
-          <p:cNvPr id="36" name="PlaceHolder 5"/>
+          <p:cNvPr id="27" name="PlaceHolder 5"/>
           <p:cNvSpPr>
             <a:spLocks noGrp="1"/>
           </p:cNvSpPr>
@@ -4501,7 +3484,7 @@
         <p:spPr>
           <a:xfrm>
             <a:off x="4645080" y="2174760"/>
-            <a:ext cx="4041360" cy="3951000"/>
+            <a:ext cx="4040280" cy="3949920"/>
           </a:xfrm>
           <a:prstGeom prst="rect">
             <a:avLst/>
@@ -4540,13 +3523,13 @@
               </a:rPr>
               <a:t>Click to edit Master text styles</a:t>
             </a:r>
-            <a:endParaRPr lang="en-US" sz="2400" b="0" u="none" strike="noStrike">
-              <a:solidFill>
-                <a:schemeClr val="dk1"/>
-              </a:solidFill>
-              <a:effectLst/>
-              <a:uFillTx/>
-              <a:latin typeface="Calibri"/>
+            <a:endParaRPr lang="pt-PT" sz="2400" b="0" u="none" strike="noStrike">
+              <a:solidFill>
+                <a:srgbClr val="000000"/>
+              </a:solidFill>
+              <a:effectLst/>
+              <a:uFillTx/>
+              <a:latin typeface="Arial"/>
             </a:endParaRPr>
           </a:p>
           <a:p>
@@ -4574,13 +3557,13 @@
               </a:rPr>
               <a:t>Second level</a:t>
             </a:r>
-            <a:endParaRPr lang="en-US" sz="2000" b="0" u="none" strike="noStrike">
-              <a:solidFill>
-                <a:schemeClr val="dk1"/>
-              </a:solidFill>
-              <a:effectLst/>
-              <a:uFillTx/>
-              <a:latin typeface="Calibri"/>
+            <a:endParaRPr lang="pt-PT" sz="2000" b="0" u="none" strike="noStrike">
+              <a:solidFill>
+                <a:srgbClr val="000000"/>
+              </a:solidFill>
+              <a:effectLst/>
+              <a:uFillTx/>
+              <a:latin typeface="Arial"/>
             </a:endParaRPr>
           </a:p>
           <a:p>
@@ -4608,13 +3591,13 @@
               </a:rPr>
               <a:t>Third level</a:t>
             </a:r>
-            <a:endParaRPr lang="en-US" sz="1800" b="0" u="none" strike="noStrike">
-              <a:solidFill>
-                <a:schemeClr val="dk1"/>
-              </a:solidFill>
-              <a:effectLst/>
-              <a:uFillTx/>
-              <a:latin typeface="Calibri"/>
+            <a:endParaRPr lang="pt-PT" sz="1800" b="0" u="none" strike="noStrike">
+              <a:solidFill>
+                <a:srgbClr val="000000"/>
+              </a:solidFill>
+              <a:effectLst/>
+              <a:uFillTx/>
+              <a:latin typeface="Arial"/>
             </a:endParaRPr>
           </a:p>
           <a:p>
@@ -4642,13 +3625,13 @@
               </a:rPr>
               <a:t>Fourth level</a:t>
             </a:r>
-            <a:endParaRPr lang="en-US" sz="1600" b="0" u="none" strike="noStrike">
-              <a:solidFill>
-                <a:schemeClr val="dk1"/>
-              </a:solidFill>
-              <a:effectLst/>
-              <a:uFillTx/>
-              <a:latin typeface="Calibri"/>
+            <a:endParaRPr lang="pt-PT" sz="1600" b="0" u="none" strike="noStrike">
+              <a:solidFill>
+                <a:srgbClr val="000000"/>
+              </a:solidFill>
+              <a:effectLst/>
+              <a:uFillTx/>
+              <a:latin typeface="Arial"/>
             </a:endParaRPr>
           </a:p>
           <a:p>
@@ -4676,31 +3659,31 @@
               </a:rPr>
               <a:t>Fifth level</a:t>
             </a:r>
-            <a:endParaRPr lang="en-US" sz="1600" b="0" u="none" strike="noStrike">
-              <a:solidFill>
-                <a:schemeClr val="dk1"/>
-              </a:solidFill>
-              <a:effectLst/>
-              <a:uFillTx/>
-              <a:latin typeface="Calibri"/>
+            <a:endParaRPr lang="pt-PT" sz="1600" b="0" u="none" strike="noStrike">
+              <a:solidFill>
+                <a:srgbClr val="000000"/>
+              </a:solidFill>
+              <a:effectLst/>
+              <a:uFillTx/>
+              <a:latin typeface="Arial"/>
             </a:endParaRPr>
           </a:p>
         </p:txBody>
       </p:sp>
       <p:sp>
         <p:nvSpPr>
-          <p:cNvPr id="37" name="PlaceHolder 6"/>
+          <p:cNvPr id="28" name="PlaceHolder 6"/>
           <p:cNvSpPr>
             <a:spLocks noGrp="1"/>
           </p:cNvSpPr>
           <p:nvPr>
-            <p:ph type="dt" idx="19"/>
+            <p:ph type="dt" idx="13"/>
           </p:nvPr>
         </p:nvSpPr>
         <p:spPr>
           <a:xfrm>
             <a:off x="457200" y="6356520"/>
-            <a:ext cx="2133360" cy="364680"/>
+            <a:ext cx="2132280" cy="363600"/>
           </a:xfrm>
           <a:prstGeom prst="rect">
             <a:avLst/>
@@ -4720,6 +3703,9 @@
                 <a:spcPct val="100000"/>
               </a:lnSpc>
               <a:buNone/>
+              <a:tabLst>
+                <a:tab algn="l" pos="0"/>
+              </a:tabLst>
               <a:defRPr lang="en-US" sz="1200" b="0" u="none" strike="noStrike">
                 <a:solidFill>
                   <a:schemeClr val="dk1">
@@ -4738,6 +3724,9 @@
                 <a:spcPct val="100000"/>
               </a:lnSpc>
               <a:buNone/>
+              <a:tabLst>
+                <a:tab algn="l" pos="0"/>
+              </a:tabLst>
             </a:pPr>
             <a:r>
               <a:rPr lang="en-US" sz="1200" b="0" u="none" strike="noStrike">
@@ -4765,18 +3754,18 @@
       </p:sp>
       <p:sp>
         <p:nvSpPr>
-          <p:cNvPr id="38" name="PlaceHolder 7"/>
+          <p:cNvPr id="29" name="PlaceHolder 7"/>
           <p:cNvSpPr>
             <a:spLocks noGrp="1"/>
           </p:cNvSpPr>
           <p:nvPr>
-            <p:ph type="ftr" idx="20"/>
+            <p:ph type="ftr" idx="14"/>
           </p:nvPr>
         </p:nvSpPr>
         <p:spPr>
           <a:xfrm>
             <a:off x="3124080" y="6356520"/>
-            <a:ext cx="2895120" cy="364680"/>
+            <a:ext cx="2894040" cy="363600"/>
           </a:xfrm>
           <a:prstGeom prst="rect">
             <a:avLst/>
@@ -4792,7 +3781,13 @@
           </a:bodyPr>
           <a:lstStyle>
             <a:lvl1pPr indent="0" algn="ctr">
+              <a:lnSpc>
+                <a:spcPct val="100000"/>
+              </a:lnSpc>
               <a:buNone/>
+              <a:tabLst>
+                <a:tab algn="l" pos="0"/>
+              </a:tabLst>
               <a:defRPr lang="pt-PT" sz="1400" b="0" u="none" strike="noStrike">
                 <a:solidFill>
                   <a:srgbClr val="000000"/>
@@ -4805,7 +3800,13 @@
           </a:lstStyle>
           <a:p>
             <a:pPr indent="0" algn="ctr">
+              <a:lnSpc>
+                <a:spcPct val="100000"/>
+              </a:lnSpc>
               <a:buNone/>
+              <a:tabLst>
+                <a:tab algn="l" pos="0"/>
+              </a:tabLst>
             </a:pPr>
             <a:r>
               <a:rPr lang="pt-PT" sz="1400" b="0" u="none" strike="noStrike">
@@ -4831,18 +3832,18 @@
       </p:sp>
       <p:sp>
         <p:nvSpPr>
-          <p:cNvPr id="39" name="PlaceHolder 8"/>
+          <p:cNvPr id="30" name="PlaceHolder 8"/>
           <p:cNvSpPr>
             <a:spLocks noGrp="1"/>
           </p:cNvSpPr>
           <p:nvPr>
-            <p:ph type="sldNum" idx="21"/>
+            <p:ph type="sldNum" idx="15"/>
           </p:nvPr>
         </p:nvSpPr>
         <p:spPr>
           <a:xfrm>
             <a:off x="6553080" y="6356520"/>
-            <a:ext cx="2133360" cy="364680"/>
+            <a:ext cx="2132280" cy="363600"/>
           </a:xfrm>
           <a:prstGeom prst="rect">
             <a:avLst/>
@@ -4862,6 +3863,9 @@
                 <a:spcPct val="100000"/>
               </a:lnSpc>
               <a:buNone/>
+              <a:tabLst>
+                <a:tab algn="l" pos="0"/>
+              </a:tabLst>
               <a:defRPr lang="en-US" sz="1200" b="0" u="none" strike="noStrike">
                 <a:solidFill>
                   <a:schemeClr val="dk1">
@@ -4880,8 +3884,11 @@
                 <a:spcPct val="100000"/>
               </a:lnSpc>
               <a:buNone/>
-            </a:pPr>
-            <a:fld id="{4F680A83-0CF4-4CC5-BCD0-0668DEA98A1C}" type="slidenum">
+              <a:tabLst>
+                <a:tab algn="l" pos="0"/>
+              </a:tabLst>
+            </a:pPr>
+            <a:fld id="{8A362CED-4734-441F-A84E-9FF07682DBCE}" type="slidenum">
               <a:rPr lang="en-US" sz="1200" b="0" u="none" strike="noStrike">
                 <a:solidFill>
                   <a:schemeClr val="dk1">
@@ -4901,6 +3908,940 @@
               <a:effectLst/>
               <a:uFillTx/>
               <a:latin typeface="Times New Roman"/>
+            </a:endParaRPr>
+          </a:p>
+        </p:txBody>
+      </p:sp>
+    </p:spTree>
+  </p:cSld>
+</p:sldLayout>
+</file>
+
+<file path=ppt/slideLayouts/slideLayout6.xml><?xml version="1.0" encoding="utf-8"?>
+<p:sldLayout xmlns:a="http://schemas.openxmlformats.org/drawingml/2006/main" xmlns:p="http://schemas.openxmlformats.org/presentationml/2006/main" xmlns:r="http://schemas.openxmlformats.org/officeDocument/2006/relationships" xmlns:p14="http://schemas.microsoft.com/office/powerpoint/2010/main" xmlns:p15="http://schemas.microsoft.com/office/powerpoint/2012/main" xmlns:mc="http://schemas.openxmlformats.org/markup-compatibility/2006" type="titleOnly" preserve="1">
+  <p:cSld name="Title Only">
+    <p:bg>
+      <p:bgPr>
+        <a:solidFill>
+          <a:srgbClr val="ffffff"/>
+        </a:solidFill>
+      </p:bgPr>
+    </p:bg>
+    <p:spTree>
+      <p:nvGrpSpPr>
+        <p:cNvPr id="1" name=""/>
+        <p:cNvGrpSpPr/>
+        <p:nvPr/>
+      </p:nvGrpSpPr>
+      <p:grpSpPr>
+        <a:xfrm>
+          <a:off x="0" y="0"/>
+          <a:ext cx="0" cy="0"/>
+          <a:chOff x="0" y="0"/>
+          <a:chExt cx="0" cy="0"/>
+        </a:xfrm>
+      </p:grpSpPr>
+      <p:sp>
+        <p:nvSpPr>
+          <p:cNvPr id="31" name="PlaceHolder 1"/>
+          <p:cNvSpPr>
+            <a:spLocks noGrp="1"/>
+          </p:cNvSpPr>
+          <p:nvPr>
+            <p:ph type="title"/>
+          </p:nvPr>
+        </p:nvSpPr>
+        <p:spPr>
+          <a:xfrm>
+            <a:off x="457200" y="274680"/>
+            <a:ext cx="8228160" cy="1141560"/>
+          </a:xfrm>
+          <a:prstGeom prst="rect">
+            <a:avLst/>
+          </a:prstGeom>
+          <a:noFill/>
+          <a:ln w="0">
+            <a:noFill/>
+          </a:ln>
+        </p:spPr>
+        <p:txBody>
+          <a:bodyPr lIns="91440" rIns="91440" tIns="45720" bIns="45720" anchor="ctr">
+            <a:noAutofit/>
+          </a:bodyPr>
+          <a:p>
+            <a:pPr indent="0" algn="ctr" defTabSz="457200">
+              <a:lnSpc>
+                <a:spcPct val="100000"/>
+              </a:lnSpc>
+              <a:buNone/>
+              <a:tabLst>
+                <a:tab algn="l" pos="0"/>
+              </a:tabLst>
+            </a:pPr>
+            <a:r>
+              <a:rPr lang="en-US" sz="4400" b="0" u="none" strike="noStrike">
+                <a:solidFill>
+                  <a:schemeClr val="dk1"/>
+                </a:solidFill>
+                <a:effectLst/>
+                <a:uFillTx/>
+                <a:latin typeface="Calibri"/>
+              </a:rPr>
+              <a:t>Click to edit Master title style</a:t>
+            </a:r>
+            <a:endParaRPr lang="pt-PT" sz="4400" b="0" u="none" strike="noStrike">
+              <a:solidFill>
+                <a:srgbClr val="000000"/>
+              </a:solidFill>
+              <a:effectLst/>
+              <a:uFillTx/>
+              <a:latin typeface="Arial"/>
+            </a:endParaRPr>
+          </a:p>
+        </p:txBody>
+      </p:sp>
+      <p:sp>
+        <p:nvSpPr>
+          <p:cNvPr id="32" name="PlaceHolder 2"/>
+          <p:cNvSpPr>
+            <a:spLocks noGrp="1"/>
+          </p:cNvSpPr>
+          <p:nvPr>
+            <p:ph type="dt" idx="16"/>
+          </p:nvPr>
+        </p:nvSpPr>
+        <p:spPr>
+          <a:xfrm>
+            <a:off x="457200" y="6356520"/>
+            <a:ext cx="2132280" cy="363600"/>
+          </a:xfrm>
+          <a:prstGeom prst="rect">
+            <a:avLst/>
+          </a:prstGeom>
+          <a:noFill/>
+          <a:ln w="0">
+            <a:noFill/>
+          </a:ln>
+        </p:spPr>
+        <p:txBody>
+          <a:bodyPr lIns="91440" rIns="91440" tIns="45720" bIns="45720" anchor="ctr">
+            <a:noAutofit/>
+          </a:bodyPr>
+          <a:lstStyle>
+            <a:lvl1pPr indent="0" defTabSz="457200">
+              <a:lnSpc>
+                <a:spcPct val="100000"/>
+              </a:lnSpc>
+              <a:buNone/>
+              <a:tabLst>
+                <a:tab algn="l" pos="0"/>
+              </a:tabLst>
+              <a:defRPr lang="en-US" sz="1200" b="0" u="none" strike="noStrike">
+                <a:solidFill>
+                  <a:schemeClr val="dk1">
+                    <a:tint val="75000"/>
+                  </a:schemeClr>
+                </a:solidFill>
+                <a:effectLst/>
+                <a:uFillTx/>
+                <a:latin typeface="Calibri"/>
+              </a:defRPr>
+            </a:lvl1pPr>
+          </a:lstStyle>
+          <a:p>
+            <a:pPr indent="0" defTabSz="457200">
+              <a:lnSpc>
+                <a:spcPct val="100000"/>
+              </a:lnSpc>
+              <a:buNone/>
+              <a:tabLst>
+                <a:tab algn="l" pos="0"/>
+              </a:tabLst>
+            </a:pPr>
+            <a:r>
+              <a:rPr lang="en-US" sz="1200" b="0" u="none" strike="noStrike">
+                <a:solidFill>
+                  <a:schemeClr val="dk1">
+                    <a:tint val="75000"/>
+                  </a:schemeClr>
+                </a:solidFill>
+                <a:effectLst/>
+                <a:uFillTx/>
+                <a:latin typeface="Calibri"/>
+              </a:rPr>
+              <a:t>&lt;data/hora&gt;</a:t>
+            </a:r>
+            <a:endParaRPr lang="pt-PT" sz="1200" b="0" u="none" strike="noStrike">
+              <a:solidFill>
+                <a:srgbClr val="000000"/>
+              </a:solidFill>
+              <a:effectLst/>
+              <a:uFillTx/>
+              <a:latin typeface="Times New Roman"/>
+            </a:endParaRPr>
+          </a:p>
+        </p:txBody>
+      </p:sp>
+      <p:sp>
+        <p:nvSpPr>
+          <p:cNvPr id="33" name="PlaceHolder 3"/>
+          <p:cNvSpPr>
+            <a:spLocks noGrp="1"/>
+          </p:cNvSpPr>
+          <p:nvPr>
+            <p:ph type="ftr" idx="17"/>
+          </p:nvPr>
+        </p:nvSpPr>
+        <p:spPr>
+          <a:xfrm>
+            <a:off x="3124080" y="6356520"/>
+            <a:ext cx="2894040" cy="363600"/>
+          </a:xfrm>
+          <a:prstGeom prst="rect">
+            <a:avLst/>
+          </a:prstGeom>
+          <a:noFill/>
+          <a:ln w="0">
+            <a:noFill/>
+          </a:ln>
+        </p:spPr>
+        <p:txBody>
+          <a:bodyPr lIns="91440" rIns="91440" tIns="45720" bIns="45720" anchor="ctr">
+            <a:noAutofit/>
+          </a:bodyPr>
+          <a:lstStyle>
+            <a:lvl1pPr indent="0" algn="ctr">
+              <a:lnSpc>
+                <a:spcPct val="100000"/>
+              </a:lnSpc>
+              <a:buNone/>
+              <a:tabLst>
+                <a:tab algn="l" pos="0"/>
+              </a:tabLst>
+              <a:defRPr lang="pt-PT" sz="1400" b="0" u="none" strike="noStrike">
+                <a:solidFill>
+                  <a:srgbClr val="000000"/>
+                </a:solidFill>
+                <a:effectLst/>
+                <a:uFillTx/>
+                <a:latin typeface="Times New Roman"/>
+              </a:defRPr>
+            </a:lvl1pPr>
+          </a:lstStyle>
+          <a:p>
+            <a:pPr indent="0" algn="ctr">
+              <a:lnSpc>
+                <a:spcPct val="100000"/>
+              </a:lnSpc>
+              <a:buNone/>
+              <a:tabLst>
+                <a:tab algn="l" pos="0"/>
+              </a:tabLst>
+            </a:pPr>
+            <a:r>
+              <a:rPr lang="pt-PT" sz="1400" b="0" u="none" strike="noStrike">
+                <a:solidFill>
+                  <a:srgbClr val="000000"/>
+                </a:solidFill>
+                <a:effectLst/>
+                <a:uFillTx/>
+                <a:latin typeface="Times New Roman"/>
+              </a:rPr>
+              <a:t>&lt;rodapé&gt;</a:t>
+            </a:r>
+            <a:endParaRPr lang="pt-PT" sz="1400" b="0" u="none" strike="noStrike">
+              <a:solidFill>
+                <a:srgbClr val="000000"/>
+              </a:solidFill>
+              <a:effectLst/>
+              <a:uFillTx/>
+              <a:latin typeface="Times New Roman"/>
+            </a:endParaRPr>
+          </a:p>
+        </p:txBody>
+      </p:sp>
+      <p:sp>
+        <p:nvSpPr>
+          <p:cNvPr id="34" name="PlaceHolder 4"/>
+          <p:cNvSpPr>
+            <a:spLocks noGrp="1"/>
+          </p:cNvSpPr>
+          <p:nvPr>
+            <p:ph type="sldNum" idx="18"/>
+          </p:nvPr>
+        </p:nvSpPr>
+        <p:spPr>
+          <a:xfrm>
+            <a:off x="6553080" y="6356520"/>
+            <a:ext cx="2132280" cy="363600"/>
+          </a:xfrm>
+          <a:prstGeom prst="rect">
+            <a:avLst/>
+          </a:prstGeom>
+          <a:noFill/>
+          <a:ln w="0">
+            <a:noFill/>
+          </a:ln>
+        </p:spPr>
+        <p:txBody>
+          <a:bodyPr lIns="91440" rIns="91440" tIns="45720" bIns="45720" anchor="ctr">
+            <a:noAutofit/>
+          </a:bodyPr>
+          <a:lstStyle>
+            <a:lvl1pPr indent="0" algn="r" defTabSz="457200">
+              <a:lnSpc>
+                <a:spcPct val="100000"/>
+              </a:lnSpc>
+              <a:buNone/>
+              <a:tabLst>
+                <a:tab algn="l" pos="0"/>
+              </a:tabLst>
+              <a:defRPr lang="en-US" sz="1200" b="0" u="none" strike="noStrike">
+                <a:solidFill>
+                  <a:schemeClr val="dk1">
+                    <a:tint val="75000"/>
+                  </a:schemeClr>
+                </a:solidFill>
+                <a:effectLst/>
+                <a:uFillTx/>
+                <a:latin typeface="Calibri"/>
+              </a:defRPr>
+            </a:lvl1pPr>
+          </a:lstStyle>
+          <a:p>
+            <a:pPr indent="0" algn="r" defTabSz="457200">
+              <a:lnSpc>
+                <a:spcPct val="100000"/>
+              </a:lnSpc>
+              <a:buNone/>
+              <a:tabLst>
+                <a:tab algn="l" pos="0"/>
+              </a:tabLst>
+            </a:pPr>
+            <a:fld id="{5D016FE7-B283-40DE-A5E5-602C580CEE6F}" type="slidenum">
+              <a:rPr lang="en-US" sz="1200" b="0" u="none" strike="noStrike">
+                <a:solidFill>
+                  <a:schemeClr val="dk1">
+                    <a:tint val="75000"/>
+                  </a:schemeClr>
+                </a:solidFill>
+                <a:effectLst/>
+                <a:uFillTx/>
+                <a:latin typeface="Calibri"/>
+              </a:rPr>
+              <a:t>&lt;número&gt;</a:t>
+            </a:fld>
+            <a:endParaRPr lang="pt-PT" sz="1200" b="0" u="none" strike="noStrike">
+              <a:solidFill>
+                <a:srgbClr val="000000"/>
+              </a:solidFill>
+              <a:effectLst/>
+              <a:uFillTx/>
+              <a:latin typeface="Times New Roman"/>
+            </a:endParaRPr>
+          </a:p>
+        </p:txBody>
+      </p:sp>
+    </p:spTree>
+  </p:cSld>
+</p:sldLayout>
+</file>
+
+<file path=ppt/slideLayouts/slideLayout7.xml><?xml version="1.0" encoding="utf-8"?>
+<p:sldLayout xmlns:a="http://schemas.openxmlformats.org/drawingml/2006/main" xmlns:p="http://schemas.openxmlformats.org/presentationml/2006/main" xmlns:r="http://schemas.openxmlformats.org/officeDocument/2006/relationships" xmlns:p14="http://schemas.microsoft.com/office/powerpoint/2010/main" xmlns:p15="http://schemas.microsoft.com/office/powerpoint/2012/main" xmlns:mc="http://schemas.openxmlformats.org/markup-compatibility/2006" type="blank" preserve="1">
+  <p:cSld name="Blank">
+    <p:bg>
+      <p:bgPr>
+        <a:solidFill>
+          <a:srgbClr val="ffffff"/>
+        </a:solidFill>
+      </p:bgPr>
+    </p:bg>
+    <p:spTree>
+      <p:nvGrpSpPr>
+        <p:cNvPr id="1" name=""/>
+        <p:cNvGrpSpPr/>
+        <p:nvPr/>
+      </p:nvGrpSpPr>
+      <p:grpSpPr>
+        <a:xfrm>
+          <a:off x="0" y="0"/>
+          <a:ext cx="0" cy="0"/>
+          <a:chOff x="0" y="0"/>
+          <a:chExt cx="0" cy="0"/>
+        </a:xfrm>
+      </p:grpSpPr>
+      <p:sp>
+        <p:nvSpPr>
+          <p:cNvPr id="35" name="PlaceHolder 1"/>
+          <p:cNvSpPr>
+            <a:spLocks noGrp="1"/>
+          </p:cNvSpPr>
+          <p:nvPr>
+            <p:ph type="dt" idx="19"/>
+          </p:nvPr>
+        </p:nvSpPr>
+        <p:spPr>
+          <a:xfrm>
+            <a:off x="457200" y="6356520"/>
+            <a:ext cx="2132280" cy="363600"/>
+          </a:xfrm>
+          <a:prstGeom prst="rect">
+            <a:avLst/>
+          </a:prstGeom>
+          <a:noFill/>
+          <a:ln w="0">
+            <a:noFill/>
+          </a:ln>
+        </p:spPr>
+        <p:txBody>
+          <a:bodyPr lIns="91440" rIns="91440" tIns="45720" bIns="45720" anchor="ctr">
+            <a:noAutofit/>
+          </a:bodyPr>
+          <a:lstStyle>
+            <a:lvl1pPr indent="0" defTabSz="457200">
+              <a:lnSpc>
+                <a:spcPct val="100000"/>
+              </a:lnSpc>
+              <a:buNone/>
+              <a:tabLst>
+                <a:tab algn="l" pos="0"/>
+              </a:tabLst>
+              <a:defRPr lang="en-US" sz="1200" b="0" u="none" strike="noStrike">
+                <a:solidFill>
+                  <a:schemeClr val="dk1">
+                    <a:tint val="75000"/>
+                  </a:schemeClr>
+                </a:solidFill>
+                <a:effectLst/>
+                <a:uFillTx/>
+                <a:latin typeface="Calibri"/>
+              </a:defRPr>
+            </a:lvl1pPr>
+          </a:lstStyle>
+          <a:p>
+            <a:pPr indent="0" defTabSz="457200">
+              <a:lnSpc>
+                <a:spcPct val="100000"/>
+              </a:lnSpc>
+              <a:buNone/>
+              <a:tabLst>
+                <a:tab algn="l" pos="0"/>
+              </a:tabLst>
+            </a:pPr>
+            <a:r>
+              <a:rPr lang="en-US" sz="1200" b="0" u="none" strike="noStrike">
+                <a:solidFill>
+                  <a:schemeClr val="dk1">
+                    <a:tint val="75000"/>
+                  </a:schemeClr>
+                </a:solidFill>
+                <a:effectLst/>
+                <a:uFillTx/>
+                <a:latin typeface="Calibri"/>
+              </a:rPr>
+              <a:t>&lt;data/hora&gt;</a:t>
+            </a:r>
+            <a:endParaRPr lang="pt-PT" sz="1200" b="0" u="none" strike="noStrike">
+              <a:solidFill>
+                <a:srgbClr val="000000"/>
+              </a:solidFill>
+              <a:effectLst/>
+              <a:uFillTx/>
+              <a:latin typeface="Times New Roman"/>
+            </a:endParaRPr>
+          </a:p>
+        </p:txBody>
+      </p:sp>
+      <p:sp>
+        <p:nvSpPr>
+          <p:cNvPr id="36" name="PlaceHolder 2"/>
+          <p:cNvSpPr>
+            <a:spLocks noGrp="1"/>
+          </p:cNvSpPr>
+          <p:nvPr>
+            <p:ph type="ftr" idx="20"/>
+          </p:nvPr>
+        </p:nvSpPr>
+        <p:spPr>
+          <a:xfrm>
+            <a:off x="3124080" y="6356520"/>
+            <a:ext cx="2894040" cy="363600"/>
+          </a:xfrm>
+          <a:prstGeom prst="rect">
+            <a:avLst/>
+          </a:prstGeom>
+          <a:noFill/>
+          <a:ln w="0">
+            <a:noFill/>
+          </a:ln>
+        </p:spPr>
+        <p:txBody>
+          <a:bodyPr lIns="91440" rIns="91440" tIns="45720" bIns="45720" anchor="ctr">
+            <a:noAutofit/>
+          </a:bodyPr>
+          <a:lstStyle>
+            <a:lvl1pPr indent="0" algn="ctr">
+              <a:lnSpc>
+                <a:spcPct val="100000"/>
+              </a:lnSpc>
+              <a:buNone/>
+              <a:tabLst>
+                <a:tab algn="l" pos="0"/>
+              </a:tabLst>
+              <a:defRPr lang="pt-PT" sz="1400" b="0" u="none" strike="noStrike">
+                <a:solidFill>
+                  <a:srgbClr val="000000"/>
+                </a:solidFill>
+                <a:effectLst/>
+                <a:uFillTx/>
+                <a:latin typeface="Times New Roman"/>
+              </a:defRPr>
+            </a:lvl1pPr>
+          </a:lstStyle>
+          <a:p>
+            <a:pPr indent="0" algn="ctr">
+              <a:lnSpc>
+                <a:spcPct val="100000"/>
+              </a:lnSpc>
+              <a:buNone/>
+              <a:tabLst>
+                <a:tab algn="l" pos="0"/>
+              </a:tabLst>
+            </a:pPr>
+            <a:r>
+              <a:rPr lang="pt-PT" sz="1400" b="0" u="none" strike="noStrike">
+                <a:solidFill>
+                  <a:srgbClr val="000000"/>
+                </a:solidFill>
+                <a:effectLst/>
+                <a:uFillTx/>
+                <a:latin typeface="Times New Roman"/>
+              </a:rPr>
+              <a:t>&lt;rodapé&gt;</a:t>
+            </a:r>
+            <a:endParaRPr lang="pt-PT" sz="1400" b="0" u="none" strike="noStrike">
+              <a:solidFill>
+                <a:srgbClr val="000000"/>
+              </a:solidFill>
+              <a:effectLst/>
+              <a:uFillTx/>
+              <a:latin typeface="Times New Roman"/>
+            </a:endParaRPr>
+          </a:p>
+        </p:txBody>
+      </p:sp>
+      <p:sp>
+        <p:nvSpPr>
+          <p:cNvPr id="37" name="PlaceHolder 3"/>
+          <p:cNvSpPr>
+            <a:spLocks noGrp="1"/>
+          </p:cNvSpPr>
+          <p:nvPr>
+            <p:ph type="sldNum" idx="21"/>
+          </p:nvPr>
+        </p:nvSpPr>
+        <p:spPr>
+          <a:xfrm>
+            <a:off x="6553080" y="6356520"/>
+            <a:ext cx="2132280" cy="363600"/>
+          </a:xfrm>
+          <a:prstGeom prst="rect">
+            <a:avLst/>
+          </a:prstGeom>
+          <a:noFill/>
+          <a:ln w="0">
+            <a:noFill/>
+          </a:ln>
+        </p:spPr>
+        <p:txBody>
+          <a:bodyPr lIns="91440" rIns="91440" tIns="45720" bIns="45720" anchor="ctr">
+            <a:noAutofit/>
+          </a:bodyPr>
+          <a:lstStyle>
+            <a:lvl1pPr indent="0" algn="r" defTabSz="457200">
+              <a:lnSpc>
+                <a:spcPct val="100000"/>
+              </a:lnSpc>
+              <a:buNone/>
+              <a:tabLst>
+                <a:tab algn="l" pos="0"/>
+              </a:tabLst>
+              <a:defRPr lang="en-US" sz="1200" b="0" u="none" strike="noStrike">
+                <a:solidFill>
+                  <a:schemeClr val="dk1">
+                    <a:tint val="75000"/>
+                  </a:schemeClr>
+                </a:solidFill>
+                <a:effectLst/>
+                <a:uFillTx/>
+                <a:latin typeface="Calibri"/>
+              </a:defRPr>
+            </a:lvl1pPr>
+          </a:lstStyle>
+          <a:p>
+            <a:pPr indent="0" algn="r" defTabSz="457200">
+              <a:lnSpc>
+                <a:spcPct val="100000"/>
+              </a:lnSpc>
+              <a:buNone/>
+              <a:tabLst>
+                <a:tab algn="l" pos="0"/>
+              </a:tabLst>
+            </a:pPr>
+            <a:fld id="{99870877-ABA1-45F4-B424-559294713D29}" type="slidenum">
+              <a:rPr lang="en-US" sz="1200" b="0" u="none" strike="noStrike">
+                <a:solidFill>
+                  <a:schemeClr val="dk1">
+                    <a:tint val="75000"/>
+                  </a:schemeClr>
+                </a:solidFill>
+                <a:effectLst/>
+                <a:uFillTx/>
+                <a:latin typeface="Calibri"/>
+              </a:rPr>
+              <a:t>&lt;número&gt;</a:t>
+            </a:fld>
+            <a:endParaRPr lang="pt-PT" sz="1200" b="0" u="none" strike="noStrike">
+              <a:solidFill>
+                <a:srgbClr val="000000"/>
+              </a:solidFill>
+              <a:effectLst/>
+              <a:uFillTx/>
+              <a:latin typeface="Times New Roman"/>
+            </a:endParaRPr>
+          </a:p>
+        </p:txBody>
+      </p:sp>
+      <p:sp>
+        <p:nvSpPr>
+          <p:cNvPr id="38" name="PlaceHolder 4"/>
+          <p:cNvSpPr>
+            <a:spLocks noGrp="1"/>
+          </p:cNvSpPr>
+          <p:nvPr>
+            <p:ph type="title"/>
+          </p:nvPr>
+        </p:nvSpPr>
+        <p:spPr>
+          <a:xfrm>
+            <a:off x="457200" y="205200"/>
+            <a:ext cx="8228160" cy="857520"/>
+          </a:xfrm>
+          <a:prstGeom prst="rect">
+            <a:avLst/>
+          </a:prstGeom>
+          <a:noFill/>
+          <a:ln w="0">
+            <a:noFill/>
+          </a:ln>
+        </p:spPr>
+        <p:txBody>
+          <a:bodyPr lIns="0" rIns="0" tIns="0" bIns="0" anchor="ctr">
+            <a:noAutofit/>
+          </a:bodyPr>
+          <a:p>
+            <a:pPr indent="0">
+              <a:lnSpc>
+                <a:spcPct val="100000"/>
+              </a:lnSpc>
+              <a:buNone/>
+              <a:tabLst>
+                <a:tab algn="l" pos="0"/>
+              </a:tabLst>
+            </a:pPr>
+            <a:r>
+              <a:rPr lang="en-US" sz="1800" b="0" u="none" strike="noStrike">
+                <a:solidFill>
+                  <a:schemeClr val="dk1"/>
+                </a:solidFill>
+                <a:effectLst/>
+                <a:uFillTx/>
+                <a:latin typeface="Calibri"/>
+              </a:rPr>
+              <a:t>Clique para editar o formato do título</a:t>
+            </a:r>
+            <a:endParaRPr lang="pt-PT" sz="1800" b="0" u="none" strike="noStrike">
+              <a:solidFill>
+                <a:srgbClr val="000000"/>
+              </a:solidFill>
+              <a:effectLst/>
+              <a:uFillTx/>
+              <a:latin typeface="Arial"/>
+            </a:endParaRPr>
+          </a:p>
+        </p:txBody>
+      </p:sp>
+      <p:sp>
+        <p:nvSpPr>
+          <p:cNvPr id="39" name="PlaceHolder 5"/>
+          <p:cNvSpPr>
+            <a:spLocks noGrp="1"/>
+          </p:cNvSpPr>
+          <p:nvPr>
+            <p:ph type="body"/>
+          </p:nvPr>
+        </p:nvSpPr>
+        <p:spPr>
+          <a:xfrm>
+            <a:off x="457200" y="1203480"/>
+            <a:ext cx="8228160" cy="2981880"/>
+          </a:xfrm>
+          <a:prstGeom prst="rect">
+            <a:avLst/>
+          </a:prstGeom>
+          <a:noFill/>
+          <a:ln w="0">
+            <a:noFill/>
+          </a:ln>
+        </p:spPr>
+        <p:txBody>
+          <a:bodyPr lIns="0" rIns="0" tIns="0" bIns="0" anchor="t">
+            <a:normAutofit lnSpcReduction="9999"/>
+          </a:bodyPr>
+          <a:p>
+            <a:pPr marL="432000" indent="-324000">
+              <a:lnSpc>
+                <a:spcPct val="100000"/>
+              </a:lnSpc>
+              <a:spcBef>
+                <a:spcPts val="1417"/>
+              </a:spcBef>
+              <a:buClr>
+                <a:srgbClr val="000000"/>
+              </a:buClr>
+              <a:buSzPct val="45000"/>
+              <a:buFont typeface="Wingdings" charset="2"/>
+              <a:buChar char=""/>
+            </a:pPr>
+            <a:r>
+              <a:rPr lang="en-US" sz="3200" b="0" u="none" strike="noStrike">
+                <a:solidFill>
+                  <a:schemeClr val="dk1"/>
+                </a:solidFill>
+                <a:effectLst/>
+                <a:uFillTx/>
+                <a:latin typeface="Calibri"/>
+              </a:rPr>
+              <a:t>Clique para editar o formato de texto dos tópicos</a:t>
+            </a:r>
+            <a:endParaRPr lang="pt-PT" sz="3200" b="0" u="none" strike="noStrike">
+              <a:solidFill>
+                <a:srgbClr val="000000"/>
+              </a:solidFill>
+              <a:effectLst/>
+              <a:uFillTx/>
+              <a:latin typeface="Arial"/>
+            </a:endParaRPr>
+          </a:p>
+          <a:p>
+            <a:pPr marL="864000" lvl="1" indent="-324000">
+              <a:lnSpc>
+                <a:spcPct val="100000"/>
+              </a:lnSpc>
+              <a:spcBef>
+                <a:spcPts val="1134"/>
+              </a:spcBef>
+              <a:buClr>
+                <a:srgbClr val="000000"/>
+              </a:buClr>
+              <a:buSzPct val="75000"/>
+              <a:buFont typeface="Symbol" charset="2"/>
+              <a:buChar char=""/>
+            </a:pPr>
+            <a:r>
+              <a:rPr lang="en-US" sz="2400" b="0" u="none" strike="noStrike">
+                <a:solidFill>
+                  <a:schemeClr val="dk1"/>
+                </a:solidFill>
+                <a:effectLst/>
+                <a:uFillTx/>
+                <a:latin typeface="Calibri"/>
+              </a:rPr>
+              <a:t>Segundo nível de tópicos</a:t>
+            </a:r>
+            <a:endParaRPr lang="pt-PT" sz="2400" b="0" u="none" strike="noStrike">
+              <a:solidFill>
+                <a:srgbClr val="000000"/>
+              </a:solidFill>
+              <a:effectLst/>
+              <a:uFillTx/>
+              <a:latin typeface="Arial"/>
+            </a:endParaRPr>
+          </a:p>
+          <a:p>
+            <a:pPr marL="1296000" lvl="2" indent="-288000">
+              <a:lnSpc>
+                <a:spcPct val="100000"/>
+              </a:lnSpc>
+              <a:spcBef>
+                <a:spcPts val="850"/>
+              </a:spcBef>
+              <a:buClr>
+                <a:srgbClr val="000000"/>
+              </a:buClr>
+              <a:buSzPct val="45000"/>
+              <a:buFont typeface="Wingdings" charset="2"/>
+              <a:buChar char=""/>
+            </a:pPr>
+            <a:r>
+              <a:rPr lang="en-US" sz="2000" b="0" u="none" strike="noStrike">
+                <a:solidFill>
+                  <a:schemeClr val="dk1"/>
+                </a:solidFill>
+                <a:effectLst/>
+                <a:uFillTx/>
+                <a:latin typeface="Calibri"/>
+              </a:rPr>
+              <a:t>Terceiro nível de tópicos</a:t>
+            </a:r>
+            <a:endParaRPr lang="pt-PT" sz="2000" b="0" u="none" strike="noStrike">
+              <a:solidFill>
+                <a:srgbClr val="000000"/>
+              </a:solidFill>
+              <a:effectLst/>
+              <a:uFillTx/>
+              <a:latin typeface="Arial"/>
+            </a:endParaRPr>
+          </a:p>
+          <a:p>
+            <a:pPr marL="1728000" lvl="3" indent="-216000">
+              <a:lnSpc>
+                <a:spcPct val="100000"/>
+              </a:lnSpc>
+              <a:spcBef>
+                <a:spcPts val="567"/>
+              </a:spcBef>
+              <a:buClr>
+                <a:srgbClr val="000000"/>
+              </a:buClr>
+              <a:buSzPct val="75000"/>
+              <a:buFont typeface="Symbol" charset="2"/>
+              <a:buChar char=""/>
+            </a:pPr>
+            <a:r>
+              <a:rPr lang="en-US" sz="2000" b="0" u="none" strike="noStrike">
+                <a:solidFill>
+                  <a:schemeClr val="dk1"/>
+                </a:solidFill>
+                <a:effectLst/>
+                <a:uFillTx/>
+                <a:latin typeface="Calibri"/>
+              </a:rPr>
+              <a:t>Quarto nível de tópicos</a:t>
+            </a:r>
+            <a:endParaRPr lang="pt-PT" sz="2000" b="0" u="none" strike="noStrike">
+              <a:solidFill>
+                <a:srgbClr val="000000"/>
+              </a:solidFill>
+              <a:effectLst/>
+              <a:uFillTx/>
+              <a:latin typeface="Arial"/>
+            </a:endParaRPr>
+          </a:p>
+          <a:p>
+            <a:pPr marL="2160000" lvl="4" indent="-216000">
+              <a:lnSpc>
+                <a:spcPct val="100000"/>
+              </a:lnSpc>
+              <a:spcBef>
+                <a:spcPts val="283"/>
+              </a:spcBef>
+              <a:buClr>
+                <a:srgbClr val="000000"/>
+              </a:buClr>
+              <a:buSzPct val="45000"/>
+              <a:buFont typeface="Wingdings" charset="2"/>
+              <a:buChar char=""/>
+            </a:pPr>
+            <a:r>
+              <a:rPr lang="en-US" sz="2000" b="0" u="none" strike="noStrike">
+                <a:solidFill>
+                  <a:schemeClr val="dk1"/>
+                </a:solidFill>
+                <a:effectLst/>
+                <a:uFillTx/>
+                <a:latin typeface="Calibri"/>
+              </a:rPr>
+              <a:t>Quinto nível de tópicos</a:t>
+            </a:r>
+            <a:endParaRPr lang="pt-PT" sz="2000" b="0" u="none" strike="noStrike">
+              <a:solidFill>
+                <a:srgbClr val="000000"/>
+              </a:solidFill>
+              <a:effectLst/>
+              <a:uFillTx/>
+              <a:latin typeface="Arial"/>
+            </a:endParaRPr>
+          </a:p>
+          <a:p>
+            <a:pPr marL="2592000" lvl="5" indent="-216000">
+              <a:lnSpc>
+                <a:spcPct val="100000"/>
+              </a:lnSpc>
+              <a:spcBef>
+                <a:spcPts val="283"/>
+              </a:spcBef>
+              <a:buClr>
+                <a:srgbClr val="000000"/>
+              </a:buClr>
+              <a:buSzPct val="45000"/>
+              <a:buFont typeface="Wingdings" charset="2"/>
+              <a:buChar char=""/>
+            </a:pPr>
+            <a:r>
+              <a:rPr lang="en-US" sz="2000" b="0" u="none" strike="noStrike">
+                <a:solidFill>
+                  <a:schemeClr val="dk1"/>
+                </a:solidFill>
+                <a:effectLst/>
+                <a:uFillTx/>
+                <a:latin typeface="Calibri"/>
+              </a:rPr>
+              <a:t>Sexto nível de tópicos</a:t>
+            </a:r>
+            <a:endParaRPr lang="pt-PT" sz="2000" b="0" u="none" strike="noStrike">
+              <a:solidFill>
+                <a:srgbClr val="000000"/>
+              </a:solidFill>
+              <a:effectLst/>
+              <a:uFillTx/>
+              <a:latin typeface="Arial"/>
+            </a:endParaRPr>
+          </a:p>
+          <a:p>
+            <a:pPr marL="3024000" lvl="6" indent="-216000">
+              <a:lnSpc>
+                <a:spcPct val="100000"/>
+              </a:lnSpc>
+              <a:spcBef>
+                <a:spcPts val="283"/>
+              </a:spcBef>
+              <a:buClr>
+                <a:srgbClr val="000000"/>
+              </a:buClr>
+              <a:buSzPct val="45000"/>
+              <a:buFont typeface="Wingdings" charset="2"/>
+              <a:buChar char=""/>
+            </a:pPr>
+            <a:r>
+              <a:rPr lang="en-US" sz="2000" b="0" u="none" strike="noStrike">
+                <a:solidFill>
+                  <a:schemeClr val="dk1"/>
+                </a:solidFill>
+                <a:effectLst/>
+                <a:uFillTx/>
+                <a:latin typeface="Calibri"/>
+              </a:rPr>
+              <a:t>Sétimo nível de tópicos</a:t>
+            </a:r>
+            <a:endParaRPr lang="pt-PT" sz="2000" b="0" u="none" strike="noStrike">
+              <a:solidFill>
+                <a:srgbClr val="000000"/>
+              </a:solidFill>
+              <a:effectLst/>
+              <a:uFillTx/>
+              <a:latin typeface="Arial"/>
             </a:endParaRPr>
           </a:p>
         </p:txBody>
@@ -4911,8 +4852,8 @@
 </file>
 
 <file path=ppt/slideLayouts/slideLayout8.xml><?xml version="1.0" encoding="utf-8"?>
-<p:sldLayout xmlns:a="http://schemas.openxmlformats.org/drawingml/2006/main" xmlns:p="http://schemas.openxmlformats.org/presentationml/2006/main" xmlns:r="http://schemas.openxmlformats.org/officeDocument/2006/relationships" xmlns:p14="http://schemas.microsoft.com/office/powerpoint/2010/main" xmlns:p15="http://schemas.microsoft.com/office/powerpoint/2012/main" xmlns:mc="http://schemas.openxmlformats.org/markup-compatibility/2006" type="titleOnly" preserve="1">
-  <p:cSld name="Title Only">
+<p:sldLayout xmlns:a="http://schemas.openxmlformats.org/drawingml/2006/main" xmlns:p="http://schemas.openxmlformats.org/presentationml/2006/main" xmlns:r="http://schemas.openxmlformats.org/officeDocument/2006/relationships" xmlns:p14="http://schemas.microsoft.com/office/powerpoint/2010/main" xmlns:p15="http://schemas.microsoft.com/office/powerpoint/2012/main" xmlns:mc="http://schemas.openxmlformats.org/markup-compatibility/2006" type="blank" preserve="1">
+  <p:cSld name="Content with Caption">
     <p:bg>
       <p:bgPr>
         <a:solidFill>
@@ -4946,8 +4887,8 @@
         </p:nvSpPr>
         <p:spPr>
           <a:xfrm>
-            <a:off x="457200" y="274680"/>
-            <a:ext cx="8229240" cy="1142640"/>
+            <a:off x="457200" y="272880"/>
+            <a:ext cx="3006720" cy="1160640"/>
           </a:xfrm>
           <a:prstGeom prst="rect">
             <a:avLst/>
@@ -4958,18 +4899,21 @@
           </a:ln>
         </p:spPr>
         <p:txBody>
-          <a:bodyPr lIns="91440" rIns="91440" tIns="45720" bIns="45720" anchor="ctr">
+          <a:bodyPr lIns="91440" rIns="91440" tIns="45720" bIns="45720" anchor="b">
             <a:noAutofit/>
           </a:bodyPr>
           <a:p>
-            <a:pPr indent="0" algn="ctr" defTabSz="457200">
+            <a:pPr indent="0" defTabSz="457200">
               <a:lnSpc>
                 <a:spcPct val="100000"/>
               </a:lnSpc>
               <a:buNone/>
-            </a:pPr>
-            <a:r>
-              <a:rPr lang="en-US" sz="4400" b="0" u="none" strike="noStrike">
+              <a:tabLst>
+                <a:tab algn="l" pos="0"/>
+              </a:tabLst>
+            </a:pPr>
+            <a:r>
+              <a:rPr lang="en-US" sz="2000" b="1" u="none" strike="noStrike">
                 <a:solidFill>
                   <a:schemeClr val="dk1"/>
                 </a:solidFill>
@@ -4979,13 +4923,13 @@
               </a:rPr>
               <a:t>Click to edit Master title style</a:t>
             </a:r>
-            <a:endParaRPr lang="en-US" sz="4400" b="0" u="none" strike="noStrike">
-              <a:solidFill>
-                <a:schemeClr val="dk1"/>
-              </a:solidFill>
-              <a:effectLst/>
-              <a:uFillTx/>
-              <a:latin typeface="Calibri"/>
+            <a:endParaRPr lang="pt-PT" sz="2000" b="0" u="none" strike="noStrike">
+              <a:solidFill>
+                <a:srgbClr val="000000"/>
+              </a:solidFill>
+              <a:effectLst/>
+              <a:uFillTx/>
+              <a:latin typeface="Arial"/>
             </a:endParaRPr>
           </a:p>
         </p:txBody>
@@ -4993,6 +4937,267 @@
       <p:sp>
         <p:nvSpPr>
           <p:cNvPr id="41" name="PlaceHolder 2"/>
+          <p:cNvSpPr>
+            <a:spLocks noGrp="1"/>
+          </p:cNvSpPr>
+          <p:nvPr>
+            <p:ph type="body"/>
+          </p:nvPr>
+        </p:nvSpPr>
+        <p:spPr>
+          <a:xfrm>
+            <a:off x="3575160" y="272880"/>
+            <a:ext cx="5110200" cy="5851800"/>
+          </a:xfrm>
+          <a:prstGeom prst="rect">
+            <a:avLst/>
+          </a:prstGeom>
+          <a:noFill/>
+          <a:ln w="0">
+            <a:noFill/>
+          </a:ln>
+        </p:spPr>
+        <p:txBody>
+          <a:bodyPr lIns="91440" rIns="91440" tIns="45720" bIns="45720" anchor="t">
+            <a:noAutofit/>
+          </a:bodyPr>
+          <a:p>
+            <a:pPr marL="343080" indent="-343080" defTabSz="457200">
+              <a:lnSpc>
+                <a:spcPct val="100000"/>
+              </a:lnSpc>
+              <a:spcBef>
+                <a:spcPts val="641"/>
+              </a:spcBef>
+              <a:buClr>
+                <a:srgbClr val="000000"/>
+              </a:buClr>
+              <a:buFont typeface="Arial"/>
+              <a:buChar char="•"/>
+            </a:pPr>
+            <a:r>
+              <a:rPr lang="en-US" sz="3200" b="0" u="none" strike="noStrike">
+                <a:solidFill>
+                  <a:schemeClr val="dk1"/>
+                </a:solidFill>
+                <a:effectLst/>
+                <a:uFillTx/>
+                <a:latin typeface="Calibri"/>
+              </a:rPr>
+              <a:t>Click to edit Master text styles</a:t>
+            </a:r>
+            <a:endParaRPr lang="pt-PT" sz="3200" b="0" u="none" strike="noStrike">
+              <a:solidFill>
+                <a:srgbClr val="000000"/>
+              </a:solidFill>
+              <a:effectLst/>
+              <a:uFillTx/>
+              <a:latin typeface="Arial"/>
+            </a:endParaRPr>
+          </a:p>
+          <a:p>
+            <a:pPr marL="743040" lvl="1" indent="-285840" defTabSz="457200">
+              <a:lnSpc>
+                <a:spcPct val="100000"/>
+              </a:lnSpc>
+              <a:spcBef>
+                <a:spcPts val="561"/>
+              </a:spcBef>
+              <a:buClr>
+                <a:srgbClr val="000000"/>
+              </a:buClr>
+              <a:buFont typeface="Arial"/>
+              <a:buChar char="–"/>
+            </a:pPr>
+            <a:r>
+              <a:rPr lang="en-US" sz="2800" b="0" u="none" strike="noStrike">
+                <a:solidFill>
+                  <a:schemeClr val="dk1"/>
+                </a:solidFill>
+                <a:effectLst/>
+                <a:uFillTx/>
+                <a:latin typeface="Calibri"/>
+              </a:rPr>
+              <a:t>Second level</a:t>
+            </a:r>
+            <a:endParaRPr lang="pt-PT" sz="2800" b="0" u="none" strike="noStrike">
+              <a:solidFill>
+                <a:srgbClr val="000000"/>
+              </a:solidFill>
+              <a:effectLst/>
+              <a:uFillTx/>
+              <a:latin typeface="Arial"/>
+            </a:endParaRPr>
+          </a:p>
+          <a:p>
+            <a:pPr marL="1143000" lvl="2" indent="-228600" defTabSz="457200">
+              <a:lnSpc>
+                <a:spcPct val="100000"/>
+              </a:lnSpc>
+              <a:spcBef>
+                <a:spcPts val="479"/>
+              </a:spcBef>
+              <a:buClr>
+                <a:srgbClr val="000000"/>
+              </a:buClr>
+              <a:buFont typeface="Arial"/>
+              <a:buChar char="•"/>
+            </a:pPr>
+            <a:r>
+              <a:rPr lang="en-US" sz="2400" b="0" u="none" strike="noStrike">
+                <a:solidFill>
+                  <a:schemeClr val="dk1"/>
+                </a:solidFill>
+                <a:effectLst/>
+                <a:uFillTx/>
+                <a:latin typeface="Calibri"/>
+              </a:rPr>
+              <a:t>Third level</a:t>
+            </a:r>
+            <a:endParaRPr lang="pt-PT" sz="2400" b="0" u="none" strike="noStrike">
+              <a:solidFill>
+                <a:srgbClr val="000000"/>
+              </a:solidFill>
+              <a:effectLst/>
+              <a:uFillTx/>
+              <a:latin typeface="Arial"/>
+            </a:endParaRPr>
+          </a:p>
+          <a:p>
+            <a:pPr marL="1600200" lvl="3" indent="-228600" defTabSz="457200">
+              <a:lnSpc>
+                <a:spcPct val="100000"/>
+              </a:lnSpc>
+              <a:spcBef>
+                <a:spcPts val="400"/>
+              </a:spcBef>
+              <a:buClr>
+                <a:srgbClr val="000000"/>
+              </a:buClr>
+              <a:buFont typeface="Arial"/>
+              <a:buChar char="–"/>
+            </a:pPr>
+            <a:r>
+              <a:rPr lang="en-US" sz="2000" b="0" u="none" strike="noStrike">
+                <a:solidFill>
+                  <a:schemeClr val="dk1"/>
+                </a:solidFill>
+                <a:effectLst/>
+                <a:uFillTx/>
+                <a:latin typeface="Calibri"/>
+              </a:rPr>
+              <a:t>Fourth level</a:t>
+            </a:r>
+            <a:endParaRPr lang="pt-PT" sz="2000" b="0" u="none" strike="noStrike">
+              <a:solidFill>
+                <a:srgbClr val="000000"/>
+              </a:solidFill>
+              <a:effectLst/>
+              <a:uFillTx/>
+              <a:latin typeface="Arial"/>
+            </a:endParaRPr>
+          </a:p>
+          <a:p>
+            <a:pPr marL="2057400" lvl="4" indent="-228600" defTabSz="457200">
+              <a:lnSpc>
+                <a:spcPct val="100000"/>
+              </a:lnSpc>
+              <a:spcBef>
+                <a:spcPts val="400"/>
+              </a:spcBef>
+              <a:buClr>
+                <a:srgbClr val="000000"/>
+              </a:buClr>
+              <a:buFont typeface="Arial"/>
+              <a:buChar char="»"/>
+            </a:pPr>
+            <a:r>
+              <a:rPr lang="en-US" sz="2000" b="0" u="none" strike="noStrike">
+                <a:solidFill>
+                  <a:schemeClr val="dk1"/>
+                </a:solidFill>
+                <a:effectLst/>
+                <a:uFillTx/>
+                <a:latin typeface="Calibri"/>
+              </a:rPr>
+              <a:t>Fifth level</a:t>
+            </a:r>
+            <a:endParaRPr lang="pt-PT" sz="2000" b="0" u="none" strike="noStrike">
+              <a:solidFill>
+                <a:srgbClr val="000000"/>
+              </a:solidFill>
+              <a:effectLst/>
+              <a:uFillTx/>
+              <a:latin typeface="Arial"/>
+            </a:endParaRPr>
+          </a:p>
+        </p:txBody>
+      </p:sp>
+      <p:sp>
+        <p:nvSpPr>
+          <p:cNvPr id="42" name="PlaceHolder 3"/>
+          <p:cNvSpPr>
+            <a:spLocks noGrp="1"/>
+          </p:cNvSpPr>
+          <p:nvPr>
+            <p:ph type="body"/>
+          </p:nvPr>
+        </p:nvSpPr>
+        <p:spPr>
+          <a:xfrm>
+            <a:off x="457200" y="1434960"/>
+            <a:ext cx="3006720" cy="4689720"/>
+          </a:xfrm>
+          <a:prstGeom prst="rect">
+            <a:avLst/>
+          </a:prstGeom>
+          <a:noFill/>
+          <a:ln w="0">
+            <a:noFill/>
+          </a:ln>
+        </p:spPr>
+        <p:txBody>
+          <a:bodyPr lIns="91440" rIns="91440" tIns="45720" bIns="45720" anchor="t">
+            <a:noAutofit/>
+          </a:bodyPr>
+          <a:p>
+            <a:pPr indent="0" defTabSz="457200">
+              <a:lnSpc>
+                <a:spcPct val="100000"/>
+              </a:lnSpc>
+              <a:spcBef>
+                <a:spcPts val="281"/>
+              </a:spcBef>
+              <a:buNone/>
+              <a:tabLst>
+                <a:tab algn="l" pos="0"/>
+              </a:tabLst>
+            </a:pPr>
+            <a:r>
+              <a:rPr lang="en-US" sz="1400" b="0" u="none" strike="noStrike">
+                <a:solidFill>
+                  <a:schemeClr val="dk1"/>
+                </a:solidFill>
+                <a:effectLst/>
+                <a:uFillTx/>
+                <a:latin typeface="Calibri"/>
+              </a:rPr>
+              <a:t>Click to edit Master text styles</a:t>
+            </a:r>
+            <a:endParaRPr lang="pt-PT" sz="1400" b="0" u="none" strike="noStrike">
+              <a:solidFill>
+                <a:srgbClr val="000000"/>
+              </a:solidFill>
+              <a:effectLst/>
+              <a:uFillTx/>
+              <a:latin typeface="Arial"/>
+            </a:endParaRPr>
+          </a:p>
+        </p:txBody>
+      </p:sp>
+      <p:sp>
+        <p:nvSpPr>
+          <p:cNvPr id="43" name="PlaceHolder 4"/>
           <p:cNvSpPr>
             <a:spLocks noGrp="1"/>
           </p:cNvSpPr>
@@ -5003,7 +5208,7 @@
         <p:spPr>
           <a:xfrm>
             <a:off x="457200" y="6356520"/>
-            <a:ext cx="2133360" cy="364680"/>
+            <a:ext cx="2132280" cy="363600"/>
           </a:xfrm>
           <a:prstGeom prst="rect">
             <a:avLst/>
@@ -5023,6 +5228,9 @@
                 <a:spcPct val="100000"/>
               </a:lnSpc>
               <a:buNone/>
+              <a:tabLst>
+                <a:tab algn="l" pos="0"/>
+              </a:tabLst>
               <a:defRPr lang="en-US" sz="1200" b="0" u="none" strike="noStrike">
                 <a:solidFill>
                   <a:schemeClr val="dk1">
@@ -5041,6 +5249,9 @@
                 <a:spcPct val="100000"/>
               </a:lnSpc>
               <a:buNone/>
+              <a:tabLst>
+                <a:tab algn="l" pos="0"/>
+              </a:tabLst>
             </a:pPr>
             <a:r>
               <a:rPr lang="en-US" sz="1200" b="0" u="none" strike="noStrike">
@@ -5068,7 +5279,7 @@
       </p:sp>
       <p:sp>
         <p:nvSpPr>
-          <p:cNvPr id="42" name="PlaceHolder 3"/>
+          <p:cNvPr id="44" name="PlaceHolder 5"/>
           <p:cNvSpPr>
             <a:spLocks noGrp="1"/>
           </p:cNvSpPr>
@@ -5079,7 +5290,7 @@
         <p:spPr>
           <a:xfrm>
             <a:off x="3124080" y="6356520"/>
-            <a:ext cx="2895120" cy="364680"/>
+            <a:ext cx="2894040" cy="363600"/>
           </a:xfrm>
           <a:prstGeom prst="rect">
             <a:avLst/>
@@ -5095,7 +5306,13 @@
           </a:bodyPr>
           <a:lstStyle>
             <a:lvl1pPr indent="0" algn="ctr">
+              <a:lnSpc>
+                <a:spcPct val="100000"/>
+              </a:lnSpc>
               <a:buNone/>
+              <a:tabLst>
+                <a:tab algn="l" pos="0"/>
+              </a:tabLst>
               <a:defRPr lang="pt-PT" sz="1400" b="0" u="none" strike="noStrike">
                 <a:solidFill>
                   <a:srgbClr val="000000"/>
@@ -5108,7 +5325,13 @@
           </a:lstStyle>
           <a:p>
             <a:pPr indent="0" algn="ctr">
+              <a:lnSpc>
+                <a:spcPct val="100000"/>
+              </a:lnSpc>
               <a:buNone/>
+              <a:tabLst>
+                <a:tab algn="l" pos="0"/>
+              </a:tabLst>
             </a:pPr>
             <a:r>
               <a:rPr lang="pt-PT" sz="1400" b="0" u="none" strike="noStrike">
@@ -5134,7 +5357,7 @@
       </p:sp>
       <p:sp>
         <p:nvSpPr>
-          <p:cNvPr id="43" name="PlaceHolder 4"/>
+          <p:cNvPr id="45" name="PlaceHolder 6"/>
           <p:cNvSpPr>
             <a:spLocks noGrp="1"/>
           </p:cNvSpPr>
@@ -5145,7 +5368,7 @@
         <p:spPr>
           <a:xfrm>
             <a:off x="6553080" y="6356520"/>
-            <a:ext cx="2133360" cy="364680"/>
+            <a:ext cx="2132280" cy="363600"/>
           </a:xfrm>
           <a:prstGeom prst="rect">
             <a:avLst/>
@@ -5165,6 +5388,9 @@
                 <a:spcPct val="100000"/>
               </a:lnSpc>
               <a:buNone/>
+              <a:tabLst>
+                <a:tab algn="l" pos="0"/>
+              </a:tabLst>
               <a:defRPr lang="en-US" sz="1200" b="0" u="none" strike="noStrike">
                 <a:solidFill>
                   <a:schemeClr val="dk1">
@@ -5183,8 +5409,11 @@
                 <a:spcPct val="100000"/>
               </a:lnSpc>
               <a:buNone/>
-            </a:pPr>
-            <a:fld id="{B5440C89-0710-4DF9-BC0D-CE4A045A6909}" type="slidenum">
+              <a:tabLst>
+                <a:tab algn="l" pos="0"/>
+              </a:tabLst>
+            </a:pPr>
+            <a:fld id="{E2A2056E-2284-4CCE-8930-C30556F5CA6F}" type="slidenum">
               <a:rPr lang="en-US" sz="1200" b="0" u="none" strike="noStrike">
                 <a:solidFill>
                   <a:schemeClr val="dk1">
@@ -5215,7 +5444,7 @@
 
 <file path=ppt/slideLayouts/slideLayout9.xml><?xml version="1.0" encoding="utf-8"?>
 <p:sldLayout xmlns:a="http://schemas.openxmlformats.org/drawingml/2006/main" xmlns:p="http://schemas.openxmlformats.org/presentationml/2006/main" xmlns:r="http://schemas.openxmlformats.org/officeDocument/2006/relationships" xmlns:p14="http://schemas.microsoft.com/office/powerpoint/2010/main" xmlns:p15="http://schemas.microsoft.com/office/powerpoint/2012/main" xmlns:mc="http://schemas.openxmlformats.org/markup-compatibility/2006" type="blank" preserve="1">
-  <p:cSld name="Blank">
+  <p:cSld name="Picture with Caption">
     <p:bg>
       <p:bgPr>
         <a:solidFill>
@@ -5239,7 +5468,402 @@
       </p:grpSpPr>
       <p:sp>
         <p:nvSpPr>
-          <p:cNvPr id="44" name="PlaceHolder 1"/>
+          <p:cNvPr id="46" name="PlaceHolder 1"/>
+          <p:cNvSpPr>
+            <a:spLocks noGrp="1"/>
+          </p:cNvSpPr>
+          <p:nvPr>
+            <p:ph type="title"/>
+          </p:nvPr>
+        </p:nvSpPr>
+        <p:spPr>
+          <a:xfrm>
+            <a:off x="1792440" y="4800600"/>
+            <a:ext cx="5484960" cy="565200"/>
+          </a:xfrm>
+          <a:prstGeom prst="rect">
+            <a:avLst/>
+          </a:prstGeom>
+          <a:noFill/>
+          <a:ln w="0">
+            <a:noFill/>
+          </a:ln>
+        </p:spPr>
+        <p:txBody>
+          <a:bodyPr lIns="91440" rIns="91440" tIns="45720" bIns="45720" anchor="b">
+            <a:noAutofit/>
+          </a:bodyPr>
+          <a:p>
+            <a:pPr indent="0" defTabSz="457200">
+              <a:lnSpc>
+                <a:spcPct val="100000"/>
+              </a:lnSpc>
+              <a:buNone/>
+              <a:tabLst>
+                <a:tab algn="l" pos="0"/>
+              </a:tabLst>
+            </a:pPr>
+            <a:r>
+              <a:rPr lang="en-US" sz="2000" b="1" u="none" strike="noStrike">
+                <a:solidFill>
+                  <a:schemeClr val="dk1"/>
+                </a:solidFill>
+                <a:effectLst/>
+                <a:uFillTx/>
+                <a:latin typeface="Calibri"/>
+              </a:rPr>
+              <a:t>Click to edit Master title style</a:t>
+            </a:r>
+            <a:endParaRPr lang="pt-PT" sz="2000" b="0" u="none" strike="noStrike">
+              <a:solidFill>
+                <a:srgbClr val="000000"/>
+              </a:solidFill>
+              <a:effectLst/>
+              <a:uFillTx/>
+              <a:latin typeface="Arial"/>
+            </a:endParaRPr>
+          </a:p>
+        </p:txBody>
+      </p:sp>
+      <p:sp>
+        <p:nvSpPr>
+          <p:cNvPr id="47" name="PlaceHolder 2"/>
+          <p:cNvSpPr>
+            <a:spLocks noGrp="1"/>
+          </p:cNvSpPr>
+          <p:nvPr>
+            <p:ph type="body"/>
+          </p:nvPr>
+        </p:nvSpPr>
+        <p:spPr>
+          <a:xfrm>
+            <a:off x="1792440" y="612720"/>
+            <a:ext cx="5484960" cy="4113360"/>
+          </a:xfrm>
+          <a:prstGeom prst="rect">
+            <a:avLst/>
+          </a:prstGeom>
+          <a:noFill/>
+          <a:ln w="0">
+            <a:noFill/>
+          </a:ln>
+        </p:spPr>
+        <p:txBody>
+          <a:bodyPr lIns="90000" rIns="90000" tIns="45000" bIns="45000" anchor="t">
+            <a:noAutofit/>
+          </a:bodyPr>
+          <a:p>
+            <a:pPr marL="432000" indent="-324000">
+              <a:lnSpc>
+                <a:spcPct val="100000"/>
+              </a:lnSpc>
+              <a:spcBef>
+                <a:spcPts val="1417"/>
+              </a:spcBef>
+              <a:buClr>
+                <a:srgbClr val="000000"/>
+              </a:buClr>
+              <a:buSzPct val="45000"/>
+              <a:buFont typeface="Wingdings" charset="2"/>
+              <a:buChar char=""/>
+            </a:pPr>
+            <a:r>
+              <a:rPr lang="en-US" sz="3200" b="0" u="none" strike="noStrike">
+                <a:solidFill>
+                  <a:schemeClr val="dk1"/>
+                </a:solidFill>
+                <a:effectLst/>
+                <a:uFillTx/>
+                <a:latin typeface="Calibri"/>
+              </a:rPr>
+              <a:t>Clique para editar o formato de texto dos tópicos</a:t>
+            </a:r>
+            <a:endParaRPr lang="pt-PT" sz="3200" b="0" u="none" strike="noStrike">
+              <a:solidFill>
+                <a:srgbClr val="000000"/>
+              </a:solidFill>
+              <a:effectLst/>
+              <a:uFillTx/>
+              <a:latin typeface="Arial"/>
+            </a:endParaRPr>
+          </a:p>
+          <a:p>
+            <a:pPr marL="864000" lvl="1" indent="-324000">
+              <a:lnSpc>
+                <a:spcPct val="100000"/>
+              </a:lnSpc>
+              <a:spcBef>
+                <a:spcPts val="1134"/>
+              </a:spcBef>
+              <a:buClr>
+                <a:srgbClr val="000000"/>
+              </a:buClr>
+              <a:buSzPct val="75000"/>
+              <a:buFont typeface="Symbol" charset="2"/>
+              <a:buChar char=""/>
+            </a:pPr>
+            <a:r>
+              <a:rPr lang="en-US" sz="3200" b="0" u="none" strike="noStrike">
+                <a:solidFill>
+                  <a:schemeClr val="dk1"/>
+                </a:solidFill>
+                <a:effectLst/>
+                <a:uFillTx/>
+                <a:latin typeface="Calibri"/>
+              </a:rPr>
+              <a:t>Segundo nível de tópicos</a:t>
+            </a:r>
+            <a:endParaRPr lang="pt-PT" sz="3200" b="0" u="none" strike="noStrike">
+              <a:solidFill>
+                <a:srgbClr val="000000"/>
+              </a:solidFill>
+              <a:effectLst/>
+              <a:uFillTx/>
+              <a:latin typeface="Arial"/>
+            </a:endParaRPr>
+          </a:p>
+          <a:p>
+            <a:pPr marL="1296000" lvl="2" indent="-288000">
+              <a:lnSpc>
+                <a:spcPct val="100000"/>
+              </a:lnSpc>
+              <a:spcBef>
+                <a:spcPts val="850"/>
+              </a:spcBef>
+              <a:buClr>
+                <a:srgbClr val="000000"/>
+              </a:buClr>
+              <a:buSzPct val="45000"/>
+              <a:buFont typeface="Wingdings" charset="2"/>
+              <a:buChar char=""/>
+            </a:pPr>
+            <a:r>
+              <a:rPr lang="en-US" sz="3200" b="0" u="none" strike="noStrike">
+                <a:solidFill>
+                  <a:schemeClr val="dk1"/>
+                </a:solidFill>
+                <a:effectLst/>
+                <a:uFillTx/>
+                <a:latin typeface="Calibri"/>
+              </a:rPr>
+              <a:t>Terceiro nível de tópicos</a:t>
+            </a:r>
+            <a:endParaRPr lang="pt-PT" sz="3200" b="0" u="none" strike="noStrike">
+              <a:solidFill>
+                <a:srgbClr val="000000"/>
+              </a:solidFill>
+              <a:effectLst/>
+              <a:uFillTx/>
+              <a:latin typeface="Arial"/>
+            </a:endParaRPr>
+          </a:p>
+          <a:p>
+            <a:pPr marL="1728000" lvl="3" indent="-216000">
+              <a:lnSpc>
+                <a:spcPct val="100000"/>
+              </a:lnSpc>
+              <a:spcBef>
+                <a:spcPts val="567"/>
+              </a:spcBef>
+              <a:buClr>
+                <a:srgbClr val="000000"/>
+              </a:buClr>
+              <a:buSzPct val="75000"/>
+              <a:buFont typeface="Symbol" charset="2"/>
+              <a:buChar char=""/>
+            </a:pPr>
+            <a:r>
+              <a:rPr lang="en-US" sz="3200" b="0" u="none" strike="noStrike">
+                <a:solidFill>
+                  <a:schemeClr val="dk1"/>
+                </a:solidFill>
+                <a:effectLst/>
+                <a:uFillTx/>
+                <a:latin typeface="Calibri"/>
+              </a:rPr>
+              <a:t>Quarto nível de tópicos</a:t>
+            </a:r>
+            <a:endParaRPr lang="pt-PT" sz="3200" b="0" u="none" strike="noStrike">
+              <a:solidFill>
+                <a:srgbClr val="000000"/>
+              </a:solidFill>
+              <a:effectLst/>
+              <a:uFillTx/>
+              <a:latin typeface="Arial"/>
+            </a:endParaRPr>
+          </a:p>
+          <a:p>
+            <a:pPr marL="2160000" lvl="4" indent="-216000">
+              <a:lnSpc>
+                <a:spcPct val="100000"/>
+              </a:lnSpc>
+              <a:spcBef>
+                <a:spcPts val="283"/>
+              </a:spcBef>
+              <a:buClr>
+                <a:srgbClr val="000000"/>
+              </a:buClr>
+              <a:buSzPct val="45000"/>
+              <a:buFont typeface="Wingdings" charset="2"/>
+              <a:buChar char=""/>
+            </a:pPr>
+            <a:r>
+              <a:rPr lang="en-US" sz="3200" b="0" u="none" strike="noStrike">
+                <a:solidFill>
+                  <a:schemeClr val="dk1"/>
+                </a:solidFill>
+                <a:effectLst/>
+                <a:uFillTx/>
+                <a:latin typeface="Calibri"/>
+              </a:rPr>
+              <a:t>Quinto nível de tópicos</a:t>
+            </a:r>
+            <a:endParaRPr lang="pt-PT" sz="3200" b="0" u="none" strike="noStrike">
+              <a:solidFill>
+                <a:srgbClr val="000000"/>
+              </a:solidFill>
+              <a:effectLst/>
+              <a:uFillTx/>
+              <a:latin typeface="Arial"/>
+            </a:endParaRPr>
+          </a:p>
+          <a:p>
+            <a:pPr marL="2592000" lvl="5" indent="-216000">
+              <a:lnSpc>
+                <a:spcPct val="100000"/>
+              </a:lnSpc>
+              <a:spcBef>
+                <a:spcPts val="283"/>
+              </a:spcBef>
+              <a:buClr>
+                <a:srgbClr val="000000"/>
+              </a:buClr>
+              <a:buSzPct val="45000"/>
+              <a:buFont typeface="Wingdings" charset="2"/>
+              <a:buChar char=""/>
+            </a:pPr>
+            <a:r>
+              <a:rPr lang="en-US" sz="3200" b="0" u="none" strike="noStrike">
+                <a:solidFill>
+                  <a:schemeClr val="dk1"/>
+                </a:solidFill>
+                <a:effectLst/>
+                <a:uFillTx/>
+                <a:latin typeface="Calibri"/>
+              </a:rPr>
+              <a:t>Sexto nível de tópicos</a:t>
+            </a:r>
+            <a:endParaRPr lang="pt-PT" sz="3200" b="0" u="none" strike="noStrike">
+              <a:solidFill>
+                <a:srgbClr val="000000"/>
+              </a:solidFill>
+              <a:effectLst/>
+              <a:uFillTx/>
+              <a:latin typeface="Arial"/>
+            </a:endParaRPr>
+          </a:p>
+          <a:p>
+            <a:pPr marL="3024000" lvl="6" indent="-216000">
+              <a:lnSpc>
+                <a:spcPct val="100000"/>
+              </a:lnSpc>
+              <a:spcBef>
+                <a:spcPts val="283"/>
+              </a:spcBef>
+              <a:buClr>
+                <a:srgbClr val="000000"/>
+              </a:buClr>
+              <a:buSzPct val="45000"/>
+              <a:buFont typeface="Wingdings" charset="2"/>
+              <a:buChar char=""/>
+            </a:pPr>
+            <a:r>
+              <a:rPr lang="en-US" sz="3200" b="0" u="none" strike="noStrike">
+                <a:solidFill>
+                  <a:schemeClr val="dk1"/>
+                </a:solidFill>
+                <a:effectLst/>
+                <a:uFillTx/>
+                <a:latin typeface="Calibri"/>
+              </a:rPr>
+              <a:t>Sétimo nível de tópicos</a:t>
+            </a:r>
+            <a:endParaRPr lang="pt-PT" sz="3200" b="0" u="none" strike="noStrike">
+              <a:solidFill>
+                <a:srgbClr val="000000"/>
+              </a:solidFill>
+              <a:effectLst/>
+              <a:uFillTx/>
+              <a:latin typeface="Arial"/>
+            </a:endParaRPr>
+          </a:p>
+        </p:txBody>
+      </p:sp>
+      <p:sp>
+        <p:nvSpPr>
+          <p:cNvPr id="48" name="PlaceHolder 3"/>
+          <p:cNvSpPr>
+            <a:spLocks noGrp="1"/>
+          </p:cNvSpPr>
+          <p:nvPr>
+            <p:ph type="body"/>
+          </p:nvPr>
+        </p:nvSpPr>
+        <p:spPr>
+          <a:xfrm>
+            <a:off x="1792440" y="5367240"/>
+            <a:ext cx="5484960" cy="803520"/>
+          </a:xfrm>
+          <a:prstGeom prst="rect">
+            <a:avLst/>
+          </a:prstGeom>
+          <a:noFill/>
+          <a:ln w="0">
+            <a:noFill/>
+          </a:ln>
+        </p:spPr>
+        <p:txBody>
+          <a:bodyPr lIns="91440" rIns="91440" tIns="45720" bIns="45720" anchor="t">
+            <a:noAutofit/>
+          </a:bodyPr>
+          <a:p>
+            <a:pPr indent="0" defTabSz="457200">
+              <a:lnSpc>
+                <a:spcPct val="100000"/>
+              </a:lnSpc>
+              <a:spcBef>
+                <a:spcPts val="281"/>
+              </a:spcBef>
+              <a:buNone/>
+              <a:tabLst>
+                <a:tab algn="l" pos="0"/>
+              </a:tabLst>
+            </a:pPr>
+            <a:r>
+              <a:rPr lang="en-US" sz="1400" b="0" u="none" strike="noStrike">
+                <a:solidFill>
+                  <a:schemeClr val="dk1"/>
+                </a:solidFill>
+                <a:effectLst/>
+                <a:uFillTx/>
+                <a:latin typeface="Calibri"/>
+              </a:rPr>
+              <a:t>Click to edit Master text styles</a:t>
+            </a:r>
+            <a:endParaRPr lang="pt-PT" sz="1400" b="0" u="none" strike="noStrike">
+              <a:solidFill>
+                <a:srgbClr val="000000"/>
+              </a:solidFill>
+              <a:effectLst/>
+              <a:uFillTx/>
+              <a:latin typeface="Arial"/>
+            </a:endParaRPr>
+          </a:p>
+        </p:txBody>
+      </p:sp>
+      <p:sp>
+        <p:nvSpPr>
+          <p:cNvPr id="49" name="PlaceHolder 4"/>
           <p:cNvSpPr>
             <a:spLocks noGrp="1"/>
           </p:cNvSpPr>
@@ -5250,7 +5874,7 @@
         <p:spPr>
           <a:xfrm>
             <a:off x="457200" y="6356520"/>
-            <a:ext cx="2133360" cy="364680"/>
+            <a:ext cx="2132280" cy="363600"/>
           </a:xfrm>
           <a:prstGeom prst="rect">
             <a:avLst/>
@@ -5270,6 +5894,9 @@
                 <a:spcPct val="100000"/>
               </a:lnSpc>
               <a:buNone/>
+              <a:tabLst>
+                <a:tab algn="l" pos="0"/>
+              </a:tabLst>
               <a:defRPr lang="en-US" sz="1200" b="0" u="none" strike="noStrike">
                 <a:solidFill>
                   <a:schemeClr val="dk1">
@@ -5288,6 +5915,9 @@
                 <a:spcPct val="100000"/>
               </a:lnSpc>
               <a:buNone/>
+              <a:tabLst>
+                <a:tab algn="l" pos="0"/>
+              </a:tabLst>
             </a:pPr>
             <a:r>
               <a:rPr lang="en-US" sz="1200" b="0" u="none" strike="noStrike">
@@ -5315,7 +5945,7 @@
       </p:sp>
       <p:sp>
         <p:nvSpPr>
-          <p:cNvPr id="45" name="PlaceHolder 2"/>
+          <p:cNvPr id="50" name="PlaceHolder 5"/>
           <p:cNvSpPr>
             <a:spLocks noGrp="1"/>
           </p:cNvSpPr>
@@ -5326,7 +5956,7 @@
         <p:spPr>
           <a:xfrm>
             <a:off x="3124080" y="6356520"/>
-            <a:ext cx="2895120" cy="364680"/>
+            <a:ext cx="2894040" cy="363600"/>
           </a:xfrm>
           <a:prstGeom prst="rect">
             <a:avLst/>
@@ -5342,7 +5972,13 @@
           </a:bodyPr>
           <a:lstStyle>
             <a:lvl1pPr indent="0" algn="ctr">
+              <a:lnSpc>
+                <a:spcPct val="100000"/>
+              </a:lnSpc>
               <a:buNone/>
+              <a:tabLst>
+                <a:tab algn="l" pos="0"/>
+              </a:tabLst>
               <a:defRPr lang="pt-PT" sz="1400" b="0" u="none" strike="noStrike">
                 <a:solidFill>
                   <a:srgbClr val="000000"/>
@@ -5355,7 +5991,13 @@
           </a:lstStyle>
           <a:p>
             <a:pPr indent="0" algn="ctr">
+              <a:lnSpc>
+                <a:spcPct val="100000"/>
+              </a:lnSpc>
               <a:buNone/>
+              <a:tabLst>
+                <a:tab algn="l" pos="0"/>
+              </a:tabLst>
             </a:pPr>
             <a:r>
               <a:rPr lang="pt-PT" sz="1400" b="0" u="none" strike="noStrike">
@@ -5381,7 +6023,7 @@
       </p:sp>
       <p:sp>
         <p:nvSpPr>
-          <p:cNvPr id="46" name="PlaceHolder 3"/>
+          <p:cNvPr id="51" name="PlaceHolder 6"/>
           <p:cNvSpPr>
             <a:spLocks noGrp="1"/>
           </p:cNvSpPr>
@@ -5392,7 +6034,7 @@
         <p:spPr>
           <a:xfrm>
             <a:off x="6553080" y="6356520"/>
-            <a:ext cx="2133360" cy="364680"/>
+            <a:ext cx="2132280" cy="363600"/>
           </a:xfrm>
           <a:prstGeom prst="rect">
             <a:avLst/>
@@ -5412,6 +6054,9 @@
                 <a:spcPct val="100000"/>
               </a:lnSpc>
               <a:buNone/>
+              <a:tabLst>
+                <a:tab algn="l" pos="0"/>
+              </a:tabLst>
               <a:defRPr lang="en-US" sz="1200" b="0" u="none" strike="noStrike">
                 <a:solidFill>
                   <a:schemeClr val="dk1">
@@ -5430,8 +6075,11 @@
                 <a:spcPct val="100000"/>
               </a:lnSpc>
               <a:buNone/>
-            </a:pPr>
-            <a:fld id="{50100A6A-A3DF-423F-AC27-25B3FA51325D}" type="slidenum">
+              <a:tabLst>
+                <a:tab algn="l" pos="0"/>
+              </a:tabLst>
+            </a:pPr>
+            <a:fld id="{36DB4FED-C414-443E-AC66-205AB9065618}" type="slidenum">
               <a:rPr lang="en-US" sz="1200" b="0" u="none" strike="noStrike">
                 <a:solidFill>
                   <a:schemeClr val="dk1">
@@ -5451,312 +6099,6 @@
               <a:effectLst/>
               <a:uFillTx/>
               <a:latin typeface="Times New Roman"/>
-            </a:endParaRPr>
-          </a:p>
-        </p:txBody>
-      </p:sp>
-      <p:sp>
-        <p:nvSpPr>
-          <p:cNvPr id="47" name="PlaceHolder 4"/>
-          <p:cNvSpPr>
-            <a:spLocks noGrp="1"/>
-          </p:cNvSpPr>
-          <p:nvPr>
-            <p:ph type="title"/>
-          </p:nvPr>
-        </p:nvSpPr>
-        <p:spPr>
-          <a:xfrm>
-            <a:off x="457200" y="205200"/>
-            <a:ext cx="8229240" cy="858600"/>
-          </a:xfrm>
-          <a:prstGeom prst="rect">
-            <a:avLst/>
-          </a:prstGeom>
-          <a:noFill/>
-          <a:ln w="0">
-            <a:noFill/>
-          </a:ln>
-        </p:spPr>
-        <p:txBody>
-          <a:bodyPr lIns="0" rIns="0" tIns="0" bIns="0" anchor="ctr">
-            <a:noAutofit/>
-          </a:bodyPr>
-          <a:p>
-            <a:pPr indent="0">
-              <a:buNone/>
-            </a:pPr>
-            <a:r>
-              <a:rPr lang="en-US" sz="1800" b="0" u="none" strike="noStrike">
-                <a:solidFill>
-                  <a:schemeClr val="dk1"/>
-                </a:solidFill>
-                <a:effectLst/>
-                <a:uFillTx/>
-                <a:latin typeface="Calibri"/>
-              </a:rPr>
-              <a:t>Clique para editar o formato do título</a:t>
-            </a:r>
-            <a:endParaRPr lang="en-US" sz="1800" b="0" u="none" strike="noStrike">
-              <a:solidFill>
-                <a:schemeClr val="dk1"/>
-              </a:solidFill>
-              <a:effectLst/>
-              <a:uFillTx/>
-              <a:latin typeface="Calibri"/>
-            </a:endParaRPr>
-          </a:p>
-        </p:txBody>
-      </p:sp>
-      <p:sp>
-        <p:nvSpPr>
-          <p:cNvPr id="48" name="PlaceHolder 5"/>
-          <p:cNvSpPr>
-            <a:spLocks noGrp="1"/>
-          </p:cNvSpPr>
-          <p:nvPr>
-            <p:ph type="body"/>
-          </p:nvPr>
-        </p:nvSpPr>
-        <p:spPr>
-          <a:xfrm>
-            <a:off x="457200" y="1203480"/>
-            <a:ext cx="8229240" cy="2982960"/>
-          </a:xfrm>
-          <a:prstGeom prst="rect">
-            <a:avLst/>
-          </a:prstGeom>
-          <a:noFill/>
-          <a:ln w="0">
-            <a:noFill/>
-          </a:ln>
-        </p:spPr>
-        <p:txBody>
-          <a:bodyPr lIns="0" rIns="0" tIns="0" bIns="0" anchor="t">
-            <a:normAutofit/>
-          </a:bodyPr>
-          <a:p>
-            <a:pPr marL="432000" indent="-324000">
-              <a:spcBef>
-                <a:spcPts val="1417"/>
-              </a:spcBef>
-              <a:buClr>
-                <a:srgbClr val="000000"/>
-              </a:buClr>
-              <a:buSzPct val="45000"/>
-              <a:buFont typeface="Wingdings" charset="2"/>
-              <a:buChar char=""/>
-            </a:pPr>
-            <a:r>
-              <a:rPr lang="en-US" sz="3200" b="0" u="none" strike="noStrike">
-                <a:solidFill>
-                  <a:schemeClr val="dk1"/>
-                </a:solidFill>
-                <a:effectLst/>
-                <a:uFillTx/>
-                <a:latin typeface="Calibri"/>
-              </a:rPr>
-              <a:t>Clique para editar o formato de texto dos tópicos</a:t>
-            </a:r>
-            <a:endParaRPr lang="en-US" sz="3200" b="0" u="none" strike="noStrike">
-              <a:solidFill>
-                <a:schemeClr val="dk1"/>
-              </a:solidFill>
-              <a:effectLst/>
-              <a:uFillTx/>
-              <a:latin typeface="Calibri"/>
-            </a:endParaRPr>
-          </a:p>
-          <a:p>
-            <a:pPr marL="864000" lvl="1" indent="-324000">
-              <a:spcBef>
-                <a:spcPts val="1134"/>
-              </a:spcBef>
-              <a:buClr>
-                <a:srgbClr val="000000"/>
-              </a:buClr>
-              <a:buSzPct val="75000"/>
-              <a:buFont typeface="Symbol" charset="2"/>
-              <a:buChar char=""/>
-            </a:pPr>
-            <a:r>
-              <a:rPr lang="en-US" sz="2400" b="0" u="none" strike="noStrike">
-                <a:solidFill>
-                  <a:schemeClr val="dk1"/>
-                </a:solidFill>
-                <a:effectLst/>
-                <a:uFillTx/>
-                <a:latin typeface="Calibri"/>
-              </a:rPr>
-              <a:t>Segundo nível de tópicos</a:t>
-            </a:r>
-            <a:endParaRPr lang="en-US" sz="2400" b="0" u="none" strike="noStrike">
-              <a:solidFill>
-                <a:schemeClr val="dk1"/>
-              </a:solidFill>
-              <a:effectLst/>
-              <a:uFillTx/>
-              <a:latin typeface="Calibri"/>
-            </a:endParaRPr>
-          </a:p>
-          <a:p>
-            <a:pPr marL="1296000" lvl="2" indent="-288000">
-              <a:spcBef>
-                <a:spcPts val="850"/>
-              </a:spcBef>
-              <a:buClr>
-                <a:srgbClr val="000000"/>
-              </a:buClr>
-              <a:buSzPct val="45000"/>
-              <a:buFont typeface="Wingdings" charset="2"/>
-              <a:buChar char=""/>
-            </a:pPr>
-            <a:r>
-              <a:rPr lang="en-US" sz="2000" b="0" u="none" strike="noStrike">
-                <a:solidFill>
-                  <a:schemeClr val="dk1"/>
-                </a:solidFill>
-                <a:effectLst/>
-                <a:uFillTx/>
-                <a:latin typeface="Calibri"/>
-              </a:rPr>
-              <a:t>Terceiro nível de tópicos</a:t>
-            </a:r>
-            <a:endParaRPr lang="en-US" sz="2000" b="0" u="none" strike="noStrike">
-              <a:solidFill>
-                <a:schemeClr val="dk1"/>
-              </a:solidFill>
-              <a:effectLst/>
-              <a:uFillTx/>
-              <a:latin typeface="Calibri"/>
-            </a:endParaRPr>
-          </a:p>
-          <a:p>
-            <a:pPr marL="1728000" lvl="3" indent="-216000">
-              <a:spcBef>
-                <a:spcPts val="567"/>
-              </a:spcBef>
-              <a:buClr>
-                <a:srgbClr val="000000"/>
-              </a:buClr>
-              <a:buSzPct val="75000"/>
-              <a:buFont typeface="Symbol" charset="2"/>
-              <a:buChar char=""/>
-            </a:pPr>
-            <a:r>
-              <a:rPr lang="en-US" sz="2000" b="0" u="none" strike="noStrike">
-                <a:solidFill>
-                  <a:schemeClr val="dk1"/>
-                </a:solidFill>
-                <a:effectLst/>
-                <a:uFillTx/>
-                <a:latin typeface="Calibri"/>
-              </a:rPr>
-              <a:t>Quarto nível de tópicos</a:t>
-            </a:r>
-            <a:endParaRPr lang="en-US" sz="2000" b="0" u="none" strike="noStrike">
-              <a:solidFill>
-                <a:schemeClr val="dk1"/>
-              </a:solidFill>
-              <a:effectLst/>
-              <a:uFillTx/>
-              <a:latin typeface="Calibri"/>
-            </a:endParaRPr>
-          </a:p>
-          <a:p>
-            <a:pPr marL="2160000" lvl="4" indent="-216000">
-              <a:spcBef>
-                <a:spcPts val="283"/>
-              </a:spcBef>
-              <a:buClr>
-                <a:srgbClr val="000000"/>
-              </a:buClr>
-              <a:buSzPct val="45000"/>
-              <a:buFont typeface="Wingdings" charset="2"/>
-              <a:buChar char=""/>
-            </a:pPr>
-            <a:r>
-              <a:rPr lang="en-US" sz="2000" b="0" u="none" strike="noStrike">
-                <a:solidFill>
-                  <a:schemeClr val="dk1"/>
-                </a:solidFill>
-                <a:effectLst/>
-                <a:uFillTx/>
-                <a:latin typeface="Calibri"/>
-              </a:rPr>
-              <a:t>Quinto nível de tópicos</a:t>
-            </a:r>
-            <a:endParaRPr lang="en-US" sz="2000" b="0" u="none" strike="noStrike">
-              <a:solidFill>
-                <a:schemeClr val="dk1"/>
-              </a:solidFill>
-              <a:effectLst/>
-              <a:uFillTx/>
-              <a:latin typeface="Calibri"/>
-            </a:endParaRPr>
-          </a:p>
-          <a:p>
-            <a:pPr marL="2592000" lvl="5" indent="-216000">
-              <a:spcBef>
-                <a:spcPts val="283"/>
-              </a:spcBef>
-              <a:buClr>
-                <a:srgbClr val="000000"/>
-              </a:buClr>
-              <a:buSzPct val="45000"/>
-              <a:buFont typeface="Wingdings" charset="2"/>
-              <a:buChar char=""/>
-            </a:pPr>
-            <a:r>
-              <a:rPr lang="en-US" sz="2000" b="0" u="none" strike="noStrike">
-                <a:solidFill>
-                  <a:schemeClr val="dk1"/>
-                </a:solidFill>
-                <a:effectLst/>
-                <a:uFillTx/>
-                <a:latin typeface="Calibri"/>
-              </a:rPr>
-              <a:t>Sexto nível de tópicos</a:t>
-            </a:r>
-            <a:endParaRPr lang="en-US" sz="2000" b="0" u="none" strike="noStrike">
-              <a:solidFill>
-                <a:schemeClr val="dk1"/>
-              </a:solidFill>
-              <a:effectLst/>
-              <a:uFillTx/>
-              <a:latin typeface="Calibri"/>
-            </a:endParaRPr>
-          </a:p>
-          <a:p>
-            <a:pPr marL="3024000" lvl="6" indent="-216000">
-              <a:spcBef>
-                <a:spcPts val="283"/>
-              </a:spcBef>
-              <a:buClr>
-                <a:srgbClr val="000000"/>
-              </a:buClr>
-              <a:buSzPct val="45000"/>
-              <a:buFont typeface="Wingdings" charset="2"/>
-              <a:buChar char=""/>
-            </a:pPr>
-            <a:r>
-              <a:rPr lang="en-US" sz="2000" b="0" u="none" strike="noStrike">
-                <a:solidFill>
-                  <a:schemeClr val="dk1"/>
-                </a:solidFill>
-                <a:effectLst/>
-                <a:uFillTx/>
-                <a:latin typeface="Calibri"/>
-              </a:rPr>
-              <a:t>Sétimo nível de tópicos</a:t>
-            </a:r>
-            <a:endParaRPr lang="en-US" sz="2000" b="0" u="none" strike="noStrike">
-              <a:solidFill>
-                <a:schemeClr val="dk1"/>
-              </a:solidFill>
-              <a:effectLst/>
-              <a:uFillTx/>
-              <a:latin typeface="Calibri"/>
             </a:endParaRPr>
           </a:p>
         </p:txBody>
@@ -5835,7 +6177,7 @@
         <p:spPr>
           <a:xfrm>
             <a:off x="457200" y="914400"/>
-            <a:ext cx="8229240" cy="731160"/>
+            <a:ext cx="8228160" cy="730080"/>
           </a:xfrm>
           <a:prstGeom prst="rect">
             <a:avLst/>
@@ -5892,7 +6234,7 @@
         <p:spPr>
           <a:xfrm>
             <a:off x="1828800" y="2011680"/>
-            <a:ext cx="5486040" cy="456840"/>
+            <a:ext cx="5484960" cy="455760"/>
           </a:xfrm>
           <a:prstGeom prst="rect">
             <a:avLst/>
@@ -5949,7 +6291,7 @@
         <p:spPr>
           <a:xfrm>
             <a:off x="3200400" y="2743200"/>
-            <a:ext cx="2742840" cy="365400"/>
+            <a:ext cx="2741760" cy="364320"/>
           </a:xfrm>
           <a:prstGeom prst="rect">
             <a:avLst/>
@@ -6006,7 +6348,7 @@
         <p:spPr>
           <a:xfrm>
             <a:off x="2743200" y="4114800"/>
-            <a:ext cx="3657240" cy="731160"/>
+            <a:ext cx="3656160" cy="730080"/>
           </a:xfrm>
           <a:prstGeom prst="rect">
             <a:avLst/>
@@ -6152,7 +6494,7 @@
         <p:spPr>
           <a:xfrm>
             <a:off x="457200" y="274320"/>
-            <a:ext cx="8229240" cy="548280"/>
+            <a:ext cx="8228160" cy="547200"/>
           </a:xfrm>
           <a:prstGeom prst="rect">
             <a:avLst/>
@@ -6209,7 +6551,7 @@
         <p:spPr>
           <a:xfrm>
             <a:off x="914400" y="1005840"/>
-            <a:ext cx="1838520" cy="1360080"/>
+            <a:ext cx="1837800" cy="1360080"/>
           </a:xfrm>
           <a:prstGeom prst="rect">
             <a:avLst/>
@@ -6385,7 +6727,7 @@
         <p:spPr>
           <a:xfrm>
             <a:off x="5409360" y="1005840"/>
-            <a:ext cx="2583000" cy="456120"/>
+            <a:ext cx="2581920" cy="455400"/>
           </a:xfrm>
           <a:prstGeom prst="rect">
             <a:avLst/>
@@ -6402,7 +6744,7 @@
           <a:fontRef idx="minor"/>
         </p:style>
         <p:txBody>
-          <a:bodyPr wrap="none" lIns="90000" rIns="90000" tIns="45000" bIns="45000" anchor="t" anchorCtr="1">
+          <a:bodyPr wrap="none" lIns="90000" rIns="90000" tIns="45000" bIns="45000" anchor="t">
             <a:spAutoFit/>
           </a:bodyPr>
           <a:p>
@@ -6468,7 +6810,7 @@
         <p:spPr>
           <a:xfrm>
             <a:off x="3498480" y="2377440"/>
-            <a:ext cx="2146320" cy="2254680"/>
+            <a:ext cx="2145240" cy="2254680"/>
           </a:xfrm>
           <a:prstGeom prst="rect">
             <a:avLst/>
@@ -6763,7 +7105,7 @@
         <p:spPr>
           <a:xfrm>
             <a:off x="457200" y="274320"/>
-            <a:ext cx="8229240" cy="548280"/>
+            <a:ext cx="8228160" cy="547200"/>
           </a:xfrm>
           <a:prstGeom prst="rect">
             <a:avLst/>
@@ -6820,7 +7162,7 @@
         <p:spPr>
           <a:xfrm>
             <a:off x="2929680" y="1097280"/>
-            <a:ext cx="3283560" cy="730080"/>
+            <a:ext cx="3282480" cy="730080"/>
           </a:xfrm>
           <a:prstGeom prst="rect">
             <a:avLst/>
@@ -6882,7 +7224,34 @@
                 <a:latin typeface="Courier New"/>
                 <a:ea typeface="Microsoft YaHei"/>
               </a:rPr>
-              <a:t>↓         </a:t>
+              <a:t>↓         ↓</a:t>
+            </a:r>
+            <a:endParaRPr lang="pt-PT" sz="1400" b="0" u="none" strike="noStrike">
+              <a:solidFill>
+                <a:srgbClr val="000000"/>
+              </a:solidFill>
+              <a:effectLst/>
+              <a:uFillTx/>
+              <a:latin typeface="Arial"/>
+            </a:endParaRPr>
+          </a:p>
+          <a:p>
+            <a:pPr defTabSz="457200">
+              <a:lnSpc>
+                <a:spcPct val="100000"/>
+              </a:lnSpc>
+            </a:pPr>
+            <a:r>
+              <a:rPr lang="en-US" sz="1400" b="1" u="none" strike="noStrike">
+                <a:solidFill>
+                  <a:srgbClr val="2c5f2d"/>
+                </a:solidFill>
+                <a:effectLst/>
+                <a:uFillTx/>
+                <a:latin typeface="Courier New"/>
+                <a:ea typeface="Microsoft YaHei"/>
+              </a:rPr>
+              <a:t>DadosInvalidos</a:t>
             </a:r>
             <a:r>
               <a:rPr lang="en-US" sz="1400" b="0" u="none" strike="noStrike">
@@ -6892,24 +7261,10 @@
                 <a:effectLst/>
                 <a:uFillTx/>
                 <a:latin typeface="Courier New"/>
-              </a:rPr>
-              <a:t>↓</a:t>
-            </a:r>
-            <a:endParaRPr lang="pt-PT" sz="1400" b="0" u="none" strike="noStrike">
-              <a:solidFill>
-                <a:srgbClr val="000000"/>
-              </a:solidFill>
-              <a:effectLst/>
-              <a:uFillTx/>
-              <a:latin typeface="Arial"/>
-            </a:endParaRPr>
-          </a:p>
-          <a:p>
-            <a:pPr defTabSz="457200">
-              <a:lnSpc>
-                <a:spcPct val="100000"/>
-              </a:lnSpc>
-            </a:pPr>
+                <a:ea typeface="Microsoft YaHei"/>
+              </a:rPr>
+              <a:t> </a:t>
+            </a:r>
             <a:r>
               <a:rPr lang="en-US" sz="1400" b="1" u="none" strike="noStrike">
                 <a:solidFill>
@@ -6918,8 +7273,9 @@
                 <a:effectLst/>
                 <a:uFillTx/>
                 <a:latin typeface="Courier New"/>
-              </a:rPr>
-              <a:t>DadosInvalidos</a:t>
+                <a:ea typeface="Microsoft YaHei"/>
+              </a:rPr>
+              <a:t>e ConexaoBD </a:t>
             </a:r>
             <a:r>
               <a:rPr lang="en-US" sz="1400" b="0" u="none" strike="noStrike">
@@ -6929,28 +7285,7 @@
                 <a:effectLst/>
                 <a:uFillTx/>
                 <a:latin typeface="Courier New"/>
-              </a:rPr>
-              <a:t> </a:t>
-            </a:r>
-            <a:r>
-              <a:rPr lang="en-US" sz="1400" b="1" u="none" strike="noStrike">
-                <a:solidFill>
-                  <a:srgbClr val="2c5f2d"/>
-                </a:solidFill>
-                <a:effectLst/>
-                <a:uFillTx/>
-                <a:latin typeface="Courier New"/>
-              </a:rPr>
-              <a:t>e ConexaoBD </a:t>
-            </a:r>
-            <a:r>
-              <a:rPr lang="en-US" sz="1400" b="0" u="none" strike="noStrike">
-                <a:solidFill>
-                  <a:srgbClr val="212121"/>
-                </a:solidFill>
-                <a:effectLst/>
-                <a:uFillTx/>
-                <a:latin typeface="Courier New"/>
+                <a:ea typeface="Microsoft YaHei"/>
               </a:rPr>
               <a:t>  </a:t>
             </a:r>
@@ -6974,7 +7309,7 @@
         <p:spPr>
           <a:xfrm>
             <a:off x="1371600" y="2743200"/>
-            <a:ext cx="3657240" cy="1645560"/>
+            <a:ext cx="3656160" cy="1644480"/>
           </a:xfrm>
           <a:prstGeom prst="rect">
             <a:avLst/>
@@ -7135,7 +7470,7 @@
         <p:spPr>
           <a:xfrm>
             <a:off x="5029200" y="2743200"/>
-            <a:ext cx="1673280" cy="944280"/>
+            <a:ext cx="1672560" cy="943560"/>
           </a:xfrm>
           <a:prstGeom prst="rect">
             <a:avLst/>
@@ -7307,7 +7642,7 @@
         <p:spPr>
           <a:xfrm>
             <a:off x="457200" y="274320"/>
-            <a:ext cx="8229240" cy="548280"/>
+            <a:ext cx="8228160" cy="547200"/>
           </a:xfrm>
           <a:prstGeom prst="rect">
             <a:avLst/>
@@ -7363,8 +7698,8 @@
         </p:nvSpPr>
         <p:spPr>
           <a:xfrm>
-            <a:off x="0" y="1097280"/>
-            <a:ext cx="3657240" cy="1096920"/>
+            <a:off x="900000" y="1097280"/>
+            <a:ext cx="3656160" cy="1095840"/>
           </a:xfrm>
           <a:prstGeom prst="rect">
             <a:avLst/>
@@ -7481,8 +7816,8 @@
         </p:nvSpPr>
         <p:spPr>
           <a:xfrm>
-            <a:off x="0" y="2468880"/>
-            <a:ext cx="3657240" cy="1096920"/>
+            <a:off x="843120" y="2323440"/>
+            <a:ext cx="3656160" cy="1095840"/>
           </a:xfrm>
           <a:prstGeom prst="rect">
             <a:avLst/>
@@ -7600,7 +7935,7 @@
         <p:spPr>
           <a:xfrm>
             <a:off x="4860000" y="1080000"/>
-            <a:ext cx="3657240" cy="1096920"/>
+            <a:ext cx="3656160" cy="1095840"/>
           </a:xfrm>
           <a:prstGeom prst="rect">
             <a:avLst/>
@@ -7747,7 +8082,7 @@
         <p:spPr>
           <a:xfrm>
             <a:off x="4860000" y="2323080"/>
-            <a:ext cx="3657240" cy="1096920"/>
+            <a:ext cx="3656160" cy="1095840"/>
           </a:xfrm>
           <a:prstGeom prst="rect">
             <a:avLst/>
@@ -7931,7 +8266,7 @@
         <p:spPr>
           <a:xfrm>
             <a:off x="457200" y="274320"/>
-            <a:ext cx="8229240" cy="548280"/>
+            <a:ext cx="8228160" cy="547200"/>
           </a:xfrm>
           <a:prstGeom prst="rect">
             <a:avLst/>
@@ -7987,8 +8322,8 @@
         </p:nvSpPr>
         <p:spPr>
           <a:xfrm>
-            <a:off x="0" y="1097280"/>
-            <a:ext cx="3657240" cy="486720"/>
+            <a:off x="483120" y="1134000"/>
+            <a:ext cx="3656160" cy="486000"/>
           </a:xfrm>
           <a:prstGeom prst="rect">
             <a:avLst/>
@@ -8071,7 +8406,7 @@
         <p:spPr>
           <a:xfrm>
             <a:off x="4622760" y="1080000"/>
-            <a:ext cx="3657240" cy="486720"/>
+            <a:ext cx="3656160" cy="486000"/>
           </a:xfrm>
           <a:prstGeom prst="rect">
             <a:avLst/>
@@ -8153,8 +8488,8 @@
         </p:nvSpPr>
         <p:spPr>
           <a:xfrm>
-            <a:off x="0" y="2011680"/>
-            <a:ext cx="3657240" cy="486720"/>
+            <a:off x="483120" y="1980000"/>
+            <a:ext cx="3656160" cy="486000"/>
           </a:xfrm>
           <a:prstGeom prst="rect">
             <a:avLst/>
@@ -8237,7 +8572,7 @@
         <p:spPr>
           <a:xfrm>
             <a:off x="4680000" y="1968840"/>
-            <a:ext cx="3657240" cy="486720"/>
+            <a:ext cx="3656160" cy="486000"/>
           </a:xfrm>
           <a:prstGeom prst="rect">
             <a:avLst/>
@@ -8319,8 +8654,8 @@
         </p:nvSpPr>
         <p:spPr>
           <a:xfrm>
-            <a:off x="0" y="2926080"/>
-            <a:ext cx="3657240" cy="486720"/>
+            <a:off x="483120" y="2700000"/>
+            <a:ext cx="3656160" cy="486000"/>
           </a:xfrm>
           <a:prstGeom prst="rect">
             <a:avLst/>
@@ -8402,8 +8737,8 @@
         </p:nvSpPr>
         <p:spPr>
           <a:xfrm>
-            <a:off x="4680000" y="2868840"/>
-            <a:ext cx="3657240" cy="486720"/>
+            <a:off x="4680000" y="2700000"/>
+            <a:ext cx="3656160" cy="486000"/>
           </a:xfrm>
           <a:prstGeom prst="rect">
             <a:avLst/>
@@ -8523,7 +8858,7 @@
         <p:spPr>
           <a:xfrm>
             <a:off x="457200" y="274320"/>
-            <a:ext cx="8229240" cy="548280"/>
+            <a:ext cx="8228160" cy="547200"/>
           </a:xfrm>
           <a:prstGeom prst="rect">
             <a:avLst/>
@@ -8579,8 +8914,8 @@
         </p:nvSpPr>
         <p:spPr>
           <a:xfrm>
-            <a:off x="0" y="1097280"/>
-            <a:ext cx="3657240" cy="731160"/>
+            <a:off x="1203480" y="1097280"/>
+            <a:ext cx="3656160" cy="730080"/>
           </a:xfrm>
           <a:prstGeom prst="rect">
             <a:avLst/>
@@ -8662,8 +8997,8 @@
         </p:nvSpPr>
         <p:spPr>
           <a:xfrm>
-            <a:off x="4680000" y="1080000"/>
-            <a:ext cx="3657240" cy="731160"/>
+            <a:off x="5040000" y="1080000"/>
+            <a:ext cx="3656160" cy="730080"/>
           </a:xfrm>
           <a:prstGeom prst="rect">
             <a:avLst/>
@@ -8745,8 +9080,8 @@
         </p:nvSpPr>
         <p:spPr>
           <a:xfrm>
-            <a:off x="0" y="2011680"/>
-            <a:ext cx="3657240" cy="731160"/>
+            <a:off x="1203480" y="1969560"/>
+            <a:ext cx="3656160" cy="730080"/>
           </a:xfrm>
           <a:prstGeom prst="rect">
             <a:avLst/>
@@ -8828,8 +9163,8 @@
         </p:nvSpPr>
         <p:spPr>
           <a:xfrm>
-            <a:off x="4680000" y="1968840"/>
-            <a:ext cx="3657240" cy="731160"/>
+            <a:off x="5040000" y="1968840"/>
+            <a:ext cx="3656160" cy="730080"/>
           </a:xfrm>
           <a:prstGeom prst="rect">
             <a:avLst/>
@@ -8911,8 +9246,8 @@
         </p:nvSpPr>
         <p:spPr>
           <a:xfrm>
-            <a:off x="0" y="2926080"/>
-            <a:ext cx="3657240" cy="731160"/>
+            <a:off x="1203480" y="2868840"/>
+            <a:ext cx="3656160" cy="730080"/>
           </a:xfrm>
           <a:prstGeom prst="rect">
             <a:avLst/>
@@ -8994,8 +9329,8 @@
         </p:nvSpPr>
         <p:spPr>
           <a:xfrm>
-            <a:off x="4680000" y="2868840"/>
-            <a:ext cx="3657240" cy="731160"/>
+            <a:off x="5040000" y="2868840"/>
+            <a:ext cx="3656160" cy="730080"/>
           </a:xfrm>
           <a:prstGeom prst="rect">
             <a:avLst/>
@@ -9115,7 +9450,7 @@
         <p:spPr>
           <a:xfrm>
             <a:off x="1828800" y="731520"/>
-            <a:ext cx="5486040" cy="548280"/>
+            <a:ext cx="5484960" cy="547200"/>
           </a:xfrm>
           <a:prstGeom prst="rect">
             <a:avLst/>
@@ -9172,7 +9507,7 @@
         <p:spPr>
           <a:xfrm>
             <a:off x="1371600" y="1554480"/>
-            <a:ext cx="6400440" cy="914040"/>
+            <a:ext cx="6399360" cy="912960"/>
           </a:xfrm>
           <a:prstGeom prst="rect">
             <a:avLst/>
@@ -9319,7 +9654,7 @@
         <p:spPr>
           <a:xfrm>
             <a:off x="1800000" y="3045960"/>
-            <a:ext cx="5486040" cy="914040"/>
+            <a:ext cx="5484960" cy="912960"/>
           </a:xfrm>
           <a:prstGeom prst="rect">
             <a:avLst/>
@@ -9437,7 +9772,7 @@
         <p:spPr>
           <a:xfrm>
             <a:off x="2286000" y="4114800"/>
-            <a:ext cx="4571640" cy="731160"/>
+            <a:ext cx="4570560" cy="730080"/>
           </a:xfrm>
           <a:prstGeom prst="rect">
             <a:avLst/>
@@ -9557,7 +9892,7 @@
         <p:spPr>
           <a:xfrm>
             <a:off x="457200" y="274320"/>
-            <a:ext cx="8229240" cy="548280"/>
+            <a:ext cx="8228160" cy="547200"/>
           </a:xfrm>
           <a:prstGeom prst="rect">
             <a:avLst/>
@@ -9614,7 +9949,7 @@
         <p:spPr>
           <a:xfrm>
             <a:off x="731520" y="1097280"/>
-            <a:ext cx="7772040" cy="1918440"/>
+            <a:ext cx="7770960" cy="1918440"/>
           </a:xfrm>
           <a:prstGeom prst="rect">
             <a:avLst/>
@@ -9802,7 +10137,7 @@
         <p:spPr>
           <a:xfrm>
             <a:off x="540000" y="3060000"/>
-            <a:ext cx="8100000" cy="1521720"/>
+            <a:ext cx="8098920" cy="1521720"/>
           </a:xfrm>
           <a:prstGeom prst="rect">
             <a:avLst/>
@@ -9961,7 +10296,7 @@
         <p:spPr>
           <a:xfrm>
             <a:off x="4320000" y="3931920"/>
-            <a:ext cx="4571640" cy="731160"/>
+            <a:ext cx="4570560" cy="730080"/>
           </a:xfrm>
           <a:prstGeom prst="rect">
             <a:avLst/>
@@ -10081,7 +10416,7 @@
         <p:spPr>
           <a:xfrm>
             <a:off x="457200" y="274320"/>
-            <a:ext cx="8229240" cy="548280"/>
+            <a:ext cx="8228160" cy="547200"/>
           </a:xfrm>
           <a:prstGeom prst="rect">
             <a:avLst/>
@@ -10138,7 +10473,7 @@
         <p:spPr>
           <a:xfrm>
             <a:off x="731520" y="1188720"/>
-            <a:ext cx="3840120" cy="1828440"/>
+            <a:ext cx="3839040" cy="1400400"/>
           </a:xfrm>
           <a:prstGeom prst="rect">
             <a:avLst/>
@@ -10173,7 +10508,7 @@
                 <a:uFillTx/>
                 <a:latin typeface="Calibri"/>
               </a:rPr>
-              <a:t>📋 GESTÃO DE BOVINOS</a:t>
+              <a:t>  📋 GESTÃO DE BOVINOS</a:t>
             </a:r>
             <a:endParaRPr lang="pt-PT" sz="1600" b="0" u="none" strike="noStrike">
               <a:solidFill>
@@ -10217,6 +10552,17 @@
                 <a:uFillTx/>
                 <a:latin typeface="Calibri"/>
               </a:rPr>
+              <a:t>	</a:t>
+            </a:r>
+            <a:r>
+              <a:rPr lang="en-US" sz="1400" b="0" u="none" strike="noStrike">
+                <a:solidFill>
+                  <a:srgbClr val="212121"/>
+                </a:solidFill>
+                <a:effectLst/>
+                <a:uFillTx/>
+                <a:latin typeface="Calibri"/>
+              </a:rPr>
               <a:t>• Cadastro completo</a:t>
             </a:r>
             <a:endParaRPr lang="pt-PT" sz="1400" b="0" u="none" strike="noStrike">
@@ -10246,7 +10592,18 @@
                 <a:uFillTx/>
                 <a:latin typeface="Calibri"/>
               </a:rPr>
-              <a:t>• Raça e linhagem</a:t>
+              <a:t>	</a:t>
+            </a:r>
+            <a:r>
+              <a:rPr lang="en-US" sz="1400" b="0" u="none" strike="noStrike">
+                <a:solidFill>
+                  <a:srgbClr val="212121"/>
+                </a:solidFill>
+                <a:effectLst/>
+                <a:uFillTx/>
+                <a:latin typeface="Calibri"/>
+              </a:rPr>
+              <a:t>• Raça, linhagem e</a:t>
             </a:r>
             <a:endParaRPr lang="pt-PT" sz="1400" b="0" u="none" strike="noStrike">
               <a:solidFill>
@@ -10266,6 +10623,17 @@
                 <a:spcPts val="400"/>
               </a:spcBef>
             </a:pPr>
+            <a:r>
+              <a:rPr lang="en-US" sz="1400" b="0" u="none" strike="noStrike">
+                <a:solidFill>
+                  <a:srgbClr val="212121"/>
+                </a:solidFill>
+                <a:effectLst/>
+                <a:uFillTx/>
+                <a:latin typeface="Calibri"/>
+              </a:rPr>
+              <a:t>	</a:t>
+            </a:r>
             <a:r>
               <a:rPr lang="en-US" sz="1400" b="0" u="none" strike="noStrike">
                 <a:solidFill>
@@ -10297,7 +10665,7 @@
         <p:spPr>
           <a:xfrm>
             <a:off x="4619880" y="1188720"/>
-            <a:ext cx="3840120" cy="1828440"/>
+            <a:ext cx="3839040" cy="1400400"/>
           </a:xfrm>
           <a:prstGeom prst="rect">
             <a:avLst/>
@@ -10376,6 +10744,17 @@
                 <a:uFillTx/>
                 <a:latin typeface="Calibri"/>
               </a:rPr>
+              <a:t>	</a:t>
+            </a:r>
+            <a:r>
+              <a:rPr lang="en-US" sz="1400" b="0" u="none" strike="noStrike">
+                <a:solidFill>
+                  <a:srgbClr val="212121"/>
+                </a:solidFill>
+                <a:effectLst/>
+                <a:uFillTx/>
+                <a:latin typeface="Calibri"/>
+              </a:rPr>
               <a:t>• Temperatura e umidade</a:t>
             </a:r>
             <a:endParaRPr lang="pt-PT" sz="1400" b="0" u="none" strike="noStrike">
@@ -10405,6 +10784,17 @@
                 <a:uFillTx/>
                 <a:latin typeface="Calibri"/>
               </a:rPr>
+              <a:t>	</a:t>
+            </a:r>
+            <a:r>
+              <a:rPr lang="en-US" sz="1400" b="0" u="none" strike="noStrike">
+                <a:solidFill>
+                  <a:srgbClr val="212121"/>
+                </a:solidFill>
+                <a:effectLst/>
+                <a:uFillTx/>
+                <a:latin typeface="Calibri"/>
+              </a:rPr>
               <a:t>• Registro por local</a:t>
             </a:r>
             <a:endParaRPr lang="pt-PT" sz="1400" b="0" u="none" strike="noStrike">
@@ -10425,6 +10815,17 @@
                 <a:spcPts val="400"/>
               </a:spcBef>
             </a:pPr>
+            <a:r>
+              <a:rPr lang="en-US" sz="1400" b="0" u="none" strike="noStrike">
+                <a:solidFill>
+                  <a:srgbClr val="212121"/>
+                </a:solidFill>
+                <a:effectLst/>
+                <a:uFillTx/>
+                <a:latin typeface="Calibri"/>
+              </a:rPr>
+              <a:t>	</a:t>
+            </a:r>
             <a:r>
               <a:rPr lang="en-US" sz="1400" b="0" u="none" strike="noStrike">
                 <a:solidFill>
@@ -10455,8 +10856,8 @@
         </p:nvSpPr>
         <p:spPr>
           <a:xfrm>
-            <a:off x="914400" y="3200400"/>
-            <a:ext cx="7314840" cy="1613520"/>
+            <a:off x="900000" y="3066480"/>
+            <a:ext cx="7313760" cy="1339200"/>
           </a:xfrm>
           <a:prstGeom prst="rect">
             <a:avLst/>
@@ -10523,23 +10924,63 @@
                 <a:spcPct val="100000"/>
               </a:lnSpc>
             </a:pPr>
-            <a:endParaRPr lang="pt-PT" sz="1800" b="0" u="none" strike="noStrike">
-              <a:solidFill>
-                <a:srgbClr val="000000"/>
-              </a:solidFill>
-              <a:effectLst/>
-              <a:uFillTx/>
-              <a:latin typeface="Arial"/>
-            </a:endParaRPr>
-          </a:p>
-          <a:p>
-            <a:pPr algn="ctr" defTabSz="457200">
-              <a:lnSpc>
-                <a:spcPct val="100000"/>
-              </a:lnSpc>
-            </a:pPr>
             <a:r>
               <a:rPr lang="en-US" sz="1400" b="0" i="1" u="none" strike="noStrike">
+                <a:solidFill>
+                  <a:srgbClr val="212121"/>
+                </a:solidFill>
+                <a:effectLst/>
+                <a:uFillTx/>
+                <a:latin typeface="Calibri"/>
+              </a:rPr>
+              <a:t>	</a:t>
+            </a:r>
+            <a:r>
+              <a:rPr lang="en-US" sz="1400" b="0" i="1" u="none" strike="noStrike">
+                <a:solidFill>
+                  <a:srgbClr val="212121"/>
+                </a:solidFill>
+                <a:effectLst/>
+                <a:uFillTx/>
+                <a:latin typeface="Calibri"/>
+              </a:rPr>
+              <a:t>	</a:t>
+            </a:r>
+            <a:r>
+              <a:rPr lang="en-US" sz="1400" b="0" i="1" u="none" strike="noStrike">
+                <a:solidFill>
+                  <a:srgbClr val="212121"/>
+                </a:solidFill>
+                <a:effectLst/>
+                <a:uFillTx/>
+                <a:latin typeface="Calibri"/>
+              </a:rPr>
+              <a:t>	</a:t>
+            </a:r>
+            <a:r>
+              <a:rPr lang="en-US" sz="1400" b="0" i="1" u="none" strike="noStrike">
+                <a:solidFill>
+                  <a:srgbClr val="212121"/>
+                </a:solidFill>
+                <a:effectLst/>
+                <a:uFillTx/>
+                <a:latin typeface="Calibri"/>
+              </a:rPr>
+              <a:t>	</a:t>
+            </a:r>
+            <a:r>
+              <a:rPr lang="en-US" sz="1400" b="0" i="1" u="none" strike="noStrike">
+                <a:solidFill>
+                  <a:srgbClr val="212121"/>
+                </a:solidFill>
+                <a:effectLst/>
+                <a:uFillTx/>
+                <a:latin typeface="Calibri"/>
+              </a:rPr>
+              <a:t>        </a:t>
+            </a:r>
+            <a:r>
+              <a:rPr lang="en-US" sz="1400" b="1" i="1" u="none" strike="noStrike">
                 <a:solidFill>
                   <a:srgbClr val="212121"/>
                 </a:solidFill>
@@ -10635,7 +11076,7 @@
         <p:spPr>
           <a:xfrm>
             <a:off x="457200" y="274320"/>
-            <a:ext cx="8229240" cy="548280"/>
+            <a:ext cx="8228160" cy="547200"/>
           </a:xfrm>
           <a:prstGeom prst="rect">
             <a:avLst/>
@@ -10692,7 +11133,7 @@
         <p:spPr>
           <a:xfrm>
             <a:off x="1371600" y="1097280"/>
-            <a:ext cx="6400440" cy="639720"/>
+            <a:ext cx="6399360" cy="638640"/>
           </a:xfrm>
           <a:prstGeom prst="rect">
             <a:avLst/>
@@ -10793,7 +11234,7 @@
         <p:spPr>
           <a:xfrm>
             <a:off x="4389120" y="1783080"/>
-            <a:ext cx="365400" cy="273960"/>
+            <a:ext cx="364320" cy="272880"/>
           </a:xfrm>
           <a:prstGeom prst="rect">
             <a:avLst/>
@@ -10850,7 +11291,7 @@
         <p:spPr>
           <a:xfrm>
             <a:off x="1371600" y="2011680"/>
-            <a:ext cx="6400440" cy="639720"/>
+            <a:ext cx="6399360" cy="638640"/>
           </a:xfrm>
           <a:prstGeom prst="rect">
             <a:avLst/>
@@ -10951,7 +11392,7 @@
         <p:spPr>
           <a:xfrm>
             <a:off x="4389120" y="2697480"/>
-            <a:ext cx="365400" cy="273960"/>
+            <a:ext cx="364320" cy="272880"/>
           </a:xfrm>
           <a:prstGeom prst="rect">
             <a:avLst/>
@@ -11008,7 +11449,7 @@
         <p:spPr>
           <a:xfrm>
             <a:off x="1371600" y="2926080"/>
-            <a:ext cx="6400440" cy="639720"/>
+            <a:ext cx="6399360" cy="638640"/>
           </a:xfrm>
           <a:prstGeom prst="rect">
             <a:avLst/>
@@ -11109,7 +11550,7 @@
         <p:spPr>
           <a:xfrm>
             <a:off x="4389120" y="3611880"/>
-            <a:ext cx="365400" cy="273960"/>
+            <a:ext cx="364320" cy="272880"/>
           </a:xfrm>
           <a:prstGeom prst="rect">
             <a:avLst/>
@@ -11166,7 +11607,7 @@
         <p:spPr>
           <a:xfrm>
             <a:off x="1371600" y="3840480"/>
-            <a:ext cx="6400440" cy="639720"/>
+            <a:ext cx="6399360" cy="638640"/>
           </a:xfrm>
           <a:prstGeom prst="rect">
             <a:avLst/>
@@ -11304,7 +11745,7 @@
         <p:spPr>
           <a:xfrm>
             <a:off x="457200" y="274320"/>
-            <a:ext cx="8229240" cy="548280"/>
+            <a:ext cx="8228160" cy="547200"/>
           </a:xfrm>
           <a:prstGeom prst="rect">
             <a:avLst/>
@@ -11365,7 +11806,7 @@
         <p:spPr>
           <a:xfrm>
             <a:off x="2160000" y="1080000"/>
-            <a:ext cx="4512960" cy="3960000"/>
+            <a:ext cx="4511880" cy="3958920"/>
           </a:xfrm>
           <a:prstGeom prst="rect">
             <a:avLst/>
@@ -11377,7 +11818,7 @@
             <a:noFill/>
           </a:ln>
           <a:effectLst>
-            <a:outerShdw dist="101823" dir="2700000" rotWithShape="0">
+            <a:outerShdw dir="2700000" dist="101823" rotWithShape="0">
               <a:srgbClr val="808080"/>
             </a:outerShdw>
           </a:effectLst>
@@ -11429,7 +11870,7 @@
         <p:spPr>
           <a:xfrm>
             <a:off x="457200" y="274320"/>
-            <a:ext cx="8229240" cy="548280"/>
+            <a:ext cx="8228160" cy="547200"/>
           </a:xfrm>
           <a:prstGeom prst="rect">
             <a:avLst/>
@@ -11485,8 +11926,8 @@
         </p:nvSpPr>
         <p:spPr>
           <a:xfrm>
-            <a:off x="0" y="1097280"/>
-            <a:ext cx="3657240" cy="1004760"/>
+            <a:off x="1080000" y="1155960"/>
+            <a:ext cx="3656160" cy="1004040"/>
           </a:xfrm>
           <a:prstGeom prst="rect">
             <a:avLst/>
@@ -11632,8 +12073,8 @@
         </p:nvSpPr>
         <p:spPr>
           <a:xfrm>
-            <a:off x="0" y="2286000"/>
-            <a:ext cx="3657240" cy="771120"/>
+            <a:off x="1023120" y="2469600"/>
+            <a:ext cx="3656160" cy="770400"/>
           </a:xfrm>
           <a:prstGeom prst="rect">
             <a:avLst/>
@@ -11744,14 +12185,14 @@
       </p:sp>
       <p:sp>
         <p:nvSpPr>
-          <p:cNvPr id="86" name="TextBox 4"/>
+          <p:cNvPr id="86" name="TextBox 5"/>
           <p:cNvSpPr/>
           <p:nvPr/>
         </p:nvSpPr>
         <p:spPr>
           <a:xfrm>
-            <a:off x="0" y="3474720"/>
-            <a:ext cx="3657240" cy="771120"/>
+            <a:off x="4680000" y="1154520"/>
+            <a:ext cx="3656160" cy="770400"/>
           </a:xfrm>
           <a:prstGeom prst="rect">
             <a:avLst/>
@@ -11789,7 +12230,7 @@
                 <a:uFillTx/>
                 <a:latin typeface="Calibri"/>
               </a:rPr>
-              <a:t>3️. POLIMORFISMO</a:t>
+              <a:t>3. EXCEÇÕES PERSONALIZADAS</a:t>
             </a:r>
             <a:endParaRPr lang="pt-PT" sz="1400" b="0" u="none" strike="noStrike">
               <a:solidFill>
@@ -11818,7 +12259,7 @@
                 <a:uFillTx/>
                 <a:latin typeface="Calibri"/>
               </a:rPr>
-              <a:t>• @Override toString()</a:t>
+              <a:t>• DadosInvalidosException</a:t>
             </a:r>
             <a:endParaRPr lang="pt-PT" sz="1200" b="0" u="none" strike="noStrike">
               <a:solidFill>
@@ -11847,7 +12288,7 @@
                 <a:uFillTx/>
                 <a:latin typeface="Calibri"/>
               </a:rPr>
-              <a:t>• ArrayList&lt;Animal&gt;</a:t>
+              <a:t>• ConexaoBDException</a:t>
             </a:r>
             <a:endParaRPr lang="pt-PT" sz="1200" b="0" u="none" strike="noStrike">
               <a:solidFill>
@@ -11862,14 +12303,14 @@
       </p:sp>
       <p:sp>
         <p:nvSpPr>
-          <p:cNvPr id="87" name="TextBox 5"/>
+          <p:cNvPr id="87" name="TextBox 6"/>
           <p:cNvSpPr/>
           <p:nvPr/>
         </p:nvSpPr>
         <p:spPr>
           <a:xfrm>
-            <a:off x="4680000" y="1154520"/>
-            <a:ext cx="3657240" cy="771120"/>
+            <a:off x="4680000" y="2520000"/>
+            <a:ext cx="3656160" cy="537480"/>
           </a:xfrm>
           <a:prstGeom prst="rect">
             <a:avLst/>
@@ -11907,7 +12348,7 @@
                 <a:uFillTx/>
                 <a:latin typeface="Calibri"/>
               </a:rPr>
-              <a:t>4️. EXCEÇÕES PERSONALIZADAS</a:t>
+              <a:t>4. VALIDAÇÃO</a:t>
             </a:r>
             <a:endParaRPr lang="pt-PT" sz="1400" b="0" u="none" strike="noStrike">
               <a:solidFill>
@@ -11936,36 +12377,7 @@
                 <a:uFillTx/>
                 <a:latin typeface="Calibri"/>
               </a:rPr>
-              <a:t>• DadosInvalidosException</a:t>
-            </a:r>
-            <a:endParaRPr lang="pt-PT" sz="1200" b="0" u="none" strike="noStrike">
-              <a:solidFill>
-                <a:srgbClr val="000000"/>
-              </a:solidFill>
-              <a:effectLst/>
-              <a:uFillTx/>
-              <a:latin typeface="Arial"/>
-            </a:endParaRPr>
-          </a:p>
-          <a:p>
-            <a:pPr defTabSz="457200">
-              <a:lnSpc>
-                <a:spcPct val="100000"/>
-              </a:lnSpc>
-              <a:spcAft>
-                <a:spcPts val="400"/>
-              </a:spcAft>
-            </a:pPr>
-            <a:r>
-              <a:rPr lang="en-US" sz="1200" b="0" u="none" strike="noStrike">
-                <a:solidFill>
-                  <a:srgbClr val="212121"/>
-                </a:solidFill>
-                <a:effectLst/>
-                <a:uFillTx/>
-                <a:latin typeface="Calibri"/>
-              </a:rPr>
-              <a:t>• ConexaoBDException</a:t>
+              <a:t>• Múltiplas camadas no Service</a:t>
             </a:r>
             <a:endParaRPr lang="pt-PT" sz="1200" b="0" u="none" strike="noStrike">
               <a:solidFill>
@@ -11980,14 +12392,14 @@
       </p:sp>
       <p:sp>
         <p:nvSpPr>
-          <p:cNvPr id="88" name="TextBox 6"/>
+          <p:cNvPr id="88" name="TextBox 8"/>
           <p:cNvSpPr/>
           <p:nvPr/>
         </p:nvSpPr>
         <p:spPr>
           <a:xfrm>
-            <a:off x="4680000" y="2160000"/>
-            <a:ext cx="3657240" cy="771120"/>
+            <a:off x="2283840" y="3729600"/>
+            <a:ext cx="3656160" cy="537480"/>
           </a:xfrm>
           <a:prstGeom prst="rect">
             <a:avLst/>
@@ -12025,7 +12437,7 @@
                 <a:uFillTx/>
                 <a:latin typeface="Calibri"/>
               </a:rPr>
-              <a:t>5️. VALIDAÇÃO</a:t>
+              <a:t>6. Polimorfismo</a:t>
             </a:r>
             <a:endParaRPr lang="pt-PT" sz="1400" b="0" u="none" strike="noStrike">
               <a:solidFill>
@@ -12054,36 +12466,7 @@
                 <a:uFillTx/>
                 <a:latin typeface="Calibri"/>
               </a:rPr>
-              <a:t>• Método validar()</a:t>
-            </a:r>
-            <a:endParaRPr lang="pt-PT" sz="1200" b="0" u="none" strike="noStrike">
-              <a:solidFill>
-                <a:srgbClr val="000000"/>
-              </a:solidFill>
-              <a:effectLst/>
-              <a:uFillTx/>
-              <a:latin typeface="Arial"/>
-            </a:endParaRPr>
-          </a:p>
-          <a:p>
-            <a:pPr defTabSz="457200">
-              <a:lnSpc>
-                <a:spcPct val="100000"/>
-              </a:lnSpc>
-              <a:spcAft>
-                <a:spcPts val="400"/>
-              </a:spcAft>
-            </a:pPr>
-            <a:r>
-              <a:rPr lang="en-US" sz="1200" b="0" u="none" strike="noStrike">
-                <a:solidFill>
-                  <a:srgbClr val="212121"/>
-                </a:solidFill>
-                <a:effectLst/>
-                <a:uFillTx/>
-                <a:latin typeface="Calibri"/>
-              </a:rPr>
-              <a:t>• Múltiplas camadas</a:t>
+              <a:t>• Possibilidade</a:t>
             </a:r>
             <a:endParaRPr lang="pt-PT" sz="1200" b="0" u="none" strike="noStrike">
               <a:solidFill>
@@ -12142,7 +12525,7 @@
         <p:spPr>
           <a:xfrm>
             <a:off x="1921680" y="1828800"/>
-            <a:ext cx="5725080" cy="821880"/>
+            <a:ext cx="5724000" cy="821160"/>
           </a:xfrm>
           <a:prstGeom prst="rect">
             <a:avLst/>
@@ -12198,8 +12581,8 @@
         </p:nvSpPr>
         <p:spPr>
           <a:xfrm>
-            <a:off x="1828800" y="2926080"/>
-            <a:ext cx="5486040" cy="548280"/>
+            <a:off x="3125880" y="2926080"/>
+            <a:ext cx="2889360" cy="1003680"/>
           </a:xfrm>
           <a:prstGeom prst="rect">
             <a:avLst/>
@@ -12233,8 +12616,60 @@
                 <a:effectLst/>
                 <a:uFillTx/>
                 <a:latin typeface="Calibri"/>
+                <a:ea typeface="Microsoft YaHei"/>
               </a:rPr>
               <a:t>🔐 Tela de Login</a:t>
+            </a:r>
+            <a:endParaRPr lang="pt-PT" sz="2800" b="0" u="none" strike="noStrike">
+              <a:solidFill>
+                <a:srgbClr val="ffffff"/>
+              </a:solidFill>
+              <a:effectLst/>
+              <a:uFillTx/>
+              <a:latin typeface="Arial"/>
+            </a:endParaRPr>
+          </a:p>
+          <a:p>
+            <a:pPr algn="ctr" defTabSz="457200">
+              <a:lnSpc>
+                <a:spcPct val="100000"/>
+              </a:lnSpc>
+            </a:pPr>
+            <a:r>
+              <a:rPr lang="en-US" sz="1800" b="0" u="none" strike="noStrike">
+                <a:solidFill>
+                  <a:srgbClr val="97bc62"/>
+                </a:solidFill>
+                <a:effectLst/>
+                <a:uFillTx/>
+                <a:latin typeface="Calibri"/>
+                <a:ea typeface="Microsoft YaHei"/>
+              </a:rPr>
+              <a:t> </a:t>
+            </a:r>
+            <a:r>
+              <a:rPr lang="en-US" sz="3200" b="1" u="none" strike="noStrike">
+                <a:solidFill>
+                  <a:srgbClr val="ffffff"/>
+                </a:solidFill>
+                <a:effectLst/>
+                <a:uFillTx/>
+                <a:latin typeface="Calibri"/>
+                <a:ea typeface="Microsoft YaHei"/>
+              </a:rPr>
+              <a:t>🐄</a:t>
+            </a:r>
+            <a:r>
+              <a:rPr lang="en-US" sz="2800" b="0" u="none" strike="noStrike">
+                <a:solidFill>
+                  <a:srgbClr val="97bc62"/>
+                </a:solidFill>
+                <a:effectLst/>
+                <a:uFillTx/>
+                <a:latin typeface="Calibri"/>
+                <a:ea typeface="Microsoft YaHei"/>
+              </a:rPr>
+              <a:t>ConfortAnimal</a:t>
             </a:r>
             <a:endParaRPr lang="pt-PT" sz="2800" b="0" u="none" strike="noStrike">
               <a:solidFill>
@@ -12255,8 +12690,8 @@
         </p:nvSpPr>
         <p:spPr>
           <a:xfrm>
-            <a:off x="2743200" y="3840480"/>
-            <a:ext cx="3657240" cy="731160"/>
+            <a:off x="3626280" y="3930120"/>
+            <a:ext cx="1889640" cy="820800"/>
           </a:xfrm>
           <a:prstGeom prst="rect">
             <a:avLst/>
@@ -12318,6 +12753,32 @@
                 <a:latin typeface="Calibri"/>
               </a:rPr>
               <a:t>admin / admin</a:t>
+            </a:r>
+            <a:endParaRPr lang="pt-PT" sz="1600" b="0" u="none" strike="noStrike">
+              <a:solidFill>
+                <a:srgbClr val="ffffff"/>
+              </a:solidFill>
+              <a:effectLst/>
+              <a:uFillTx/>
+              <a:latin typeface="Arial"/>
+            </a:endParaRPr>
+          </a:p>
+          <a:p>
+            <a:pPr algn="ctr" defTabSz="457200">
+              <a:lnSpc>
+                <a:spcPct val="100000"/>
+              </a:lnSpc>
+            </a:pPr>
+            <a:r>
+              <a:rPr lang="en-US" sz="1600" b="0" u="none" strike="noStrike">
+                <a:solidFill>
+                  <a:srgbClr val="ffffff"/>
+                </a:solidFill>
+                <a:effectLst/>
+                <a:uFillTx/>
+                <a:latin typeface="Calibri"/>
+              </a:rPr>
+              <a:t>lucas / lucas</a:t>
             </a:r>
             <a:endParaRPr lang="pt-PT" sz="1600" b="0" u="none" strike="noStrike">
               <a:solidFill>
@@ -12376,7 +12837,7 @@
         <p:spPr>
           <a:xfrm>
             <a:off x="457200" y="274320"/>
-            <a:ext cx="8229240" cy="548280"/>
+            <a:ext cx="8228160" cy="547200"/>
           </a:xfrm>
           <a:prstGeom prst="rect">
             <a:avLst/>
@@ -12433,7 +12894,7 @@
         <p:spPr>
           <a:xfrm>
             <a:off x="914400" y="1097280"/>
-            <a:ext cx="3412080" cy="1173240"/>
+            <a:ext cx="3411360" cy="1172520"/>
           </a:xfrm>
           <a:prstGeom prst="rect">
             <a:avLst/>
@@ -12580,7 +13041,7 @@
         <p:spPr>
           <a:xfrm>
             <a:off x="5029200" y="1097280"/>
-            <a:ext cx="2000880" cy="1462320"/>
+            <a:ext cx="2000160" cy="1462320"/>
           </a:xfrm>
           <a:prstGeom prst="rect">
             <a:avLst/>
@@ -12756,7 +13217,7 @@
         <p:spPr>
           <a:xfrm>
             <a:off x="3497040" y="2926080"/>
-            <a:ext cx="2149560" cy="1858320"/>
+            <a:ext cx="2148480" cy="1858320"/>
           </a:xfrm>
           <a:prstGeom prst="rect">
             <a:avLst/>
@@ -12817,29 +13278,7 @@
                 <a:uFillTx/>
                 <a:latin typeface="Calibri"/>
               </a:rPr>
-              <a:t>[Registar]</a:t>
-            </a:r>
-            <a:r>
-              <a:rPr lang="en-US" sz="1400" b="0" u="none" strike="noStrike">
-                <a:solidFill>
-                  <a:srgbClr val="2c5f2d"/>
-                </a:solidFill>
-                <a:effectLst/>
-                <a:uFillTx/>
-                <a:latin typeface="Calibri"/>
-              </a:rPr>
-              <a:t>  </a:t>
-            </a:r>
-            <a:r>
-              <a:rPr lang="en-US" sz="1400" b="0" u="none" strike="noStrike">
-                <a:solidFill>
-                  <a:srgbClr val="2c5f2d"/>
-                </a:solidFill>
-                <a:effectLst/>
-                <a:uFillTx/>
-                <a:latin typeface="Calibri"/>
-              </a:rPr>
-              <a:t>[Listar]</a:t>
+              <a:t>[Registar]  [Listar]</a:t>
             </a:r>
             <a:r>
               <a:rPr lang="en-US" sz="1400" b="0" u="none" strike="noStrike">
@@ -13109,7 +13548,7 @@
         <p:spPr>
           <a:xfrm>
             <a:off x="457200" y="274320"/>
-            <a:ext cx="8229240" cy="548280"/>
+            <a:ext cx="8228160" cy="547200"/>
           </a:xfrm>
           <a:prstGeom prst="rect">
             <a:avLst/>
@@ -13166,7 +13605,7 @@
         <p:spPr>
           <a:xfrm>
             <a:off x="1371600" y="1371600"/>
-            <a:ext cx="2418120" cy="1644120"/>
+            <a:ext cx="2417400" cy="1644120"/>
           </a:xfrm>
           <a:prstGeom prst="rect">
             <a:avLst/>
@@ -13342,7 +13781,7 @@
         <p:spPr>
           <a:xfrm>
             <a:off x="3328200" y="3240000"/>
-            <a:ext cx="2486880" cy="1339560"/>
+            <a:ext cx="2485800" cy="1338840"/>
           </a:xfrm>
           <a:prstGeom prst="rect">
             <a:avLst/>
